--- a/presentation/De Luca Lorenzo_kubebuilder vs crossplane.pptx
+++ b/presentation/De Luca Lorenzo_kubebuilder vs crossplane.pptx
@@ -5,7 +5,7 @@
     <p:sldMasterId id="2147483659" r:id="rId1"/>
   </p:sldMasterIdLst>
   <p:notesMasterIdLst>
-    <p:notesMasterId r:id="rId24"/>
+    <p:notesMasterId r:id="rId26"/>
   </p:notesMasterIdLst>
   <p:sldIdLst>
     <p:sldId id="256" r:id="rId2"/>
@@ -22,14 +22,16 @@
     <p:sldId id="275" r:id="rId13"/>
     <p:sldId id="278" r:id="rId14"/>
     <p:sldId id="280" r:id="rId15"/>
-    <p:sldId id="265" r:id="rId16"/>
-    <p:sldId id="264" r:id="rId17"/>
-    <p:sldId id="285" r:id="rId18"/>
-    <p:sldId id="286" r:id="rId19"/>
-    <p:sldId id="271" r:id="rId20"/>
-    <p:sldId id="281" r:id="rId21"/>
-    <p:sldId id="272" r:id="rId22"/>
-    <p:sldId id="270" r:id="rId23"/>
+    <p:sldId id="279" r:id="rId16"/>
+    <p:sldId id="291" r:id="rId17"/>
+    <p:sldId id="265" r:id="rId18"/>
+    <p:sldId id="264" r:id="rId19"/>
+    <p:sldId id="285" r:id="rId20"/>
+    <p:sldId id="286" r:id="rId21"/>
+    <p:sldId id="271" r:id="rId22"/>
+    <p:sldId id="281" r:id="rId23"/>
+    <p:sldId id="272" r:id="rId24"/>
+    <p:sldId id="270" r:id="rId25"/>
   </p:sldIdLst>
   <p:sldSz cx="12192000" cy="6858000"/>
   <p:notesSz cx="6858000" cy="9144000"/>
@@ -279,6 +281,4702 @@
     </p:ext>
   </p:extLst>
 </p:presentation>
+</file>
+
+<file path=ppt/charts/chart1.xml><?xml version="1.0" encoding="utf-8"?>
+<c:chartSpace xmlns:c="http://schemas.openxmlformats.org/drawingml/2006/chart" xmlns:a="http://schemas.openxmlformats.org/drawingml/2006/main" xmlns:r="http://schemas.openxmlformats.org/officeDocument/2006/relationships" xmlns:c16r2="http://schemas.microsoft.com/office/drawing/2015/06/chart">
+  <c:date1904 val="0"/>
+  <c:lang val="en-US"/>
+  <c:roundedCorners val="0"/>
+  <mc:AlternateContent xmlns:mc="http://schemas.openxmlformats.org/markup-compatibility/2006">
+    <mc:Choice xmlns:c14="http://schemas.microsoft.com/office/drawing/2007/8/2/chart" Requires="c14">
+      <c14:style val="102"/>
+    </mc:Choice>
+    <mc:Fallback>
+      <c:style val="2"/>
+    </mc:Fallback>
+  </mc:AlternateContent>
+  <c:chart>
+    <c:title>
+      <c:tx>
+        <c:rich>
+          <a:bodyPr rot="0" spcFirstLastPara="1" vertOverflow="ellipsis" vert="horz" wrap="square" anchor="ctr" anchorCtr="1"/>
+          <a:lstStyle/>
+          <a:p>
+            <a:pPr>
+              <a:defRPr sz="1400" b="1" i="0" u="none" strike="noStrike" kern="1200" spc="0" baseline="0">
+                <a:solidFill>
+                  <a:schemeClr val="tx1">
+                    <a:lumMod val="65000"/>
+                    <a:lumOff val="35000"/>
+                  </a:schemeClr>
+                </a:solidFill>
+                <a:latin typeface="Arial" panose="020B0604020202020204" pitchFamily="34" charset="0"/>
+                <a:ea typeface="+mn-ea"/>
+                <a:cs typeface="Arial" panose="020B0604020202020204" pitchFamily="34" charset="0"/>
+              </a:defRPr>
+            </a:pPr>
+            <a:r>
+              <a:rPr lang="en-US" b="1">
+                <a:latin typeface="Arial" panose="020B0604020202020204" pitchFamily="34" charset="0"/>
+                <a:cs typeface="Arial" panose="020B0604020202020204" pitchFamily="34" charset="0"/>
+              </a:rPr>
+              <a:t>Average RAM</a:t>
+            </a:r>
+            <a:r>
+              <a:rPr lang="en-US" b="1" baseline="0">
+                <a:latin typeface="Arial" panose="020B0604020202020204" pitchFamily="34" charset="0"/>
+                <a:cs typeface="Arial" panose="020B0604020202020204" pitchFamily="34" charset="0"/>
+              </a:rPr>
+              <a:t> usage vs DataStream objects batch size </a:t>
+            </a:r>
+            <a:endParaRPr lang="en-US" b="1">
+              <a:latin typeface="Arial" panose="020B0604020202020204" pitchFamily="34" charset="0"/>
+              <a:cs typeface="Arial" panose="020B0604020202020204" pitchFamily="34" charset="0"/>
+            </a:endParaRPr>
+          </a:p>
+        </c:rich>
+      </c:tx>
+      <c:overlay val="0"/>
+      <c:spPr>
+        <a:noFill/>
+        <a:ln>
+          <a:noFill/>
+        </a:ln>
+        <a:effectLst/>
+      </c:spPr>
+      <c:txPr>
+        <a:bodyPr rot="0" spcFirstLastPara="1" vertOverflow="ellipsis" vert="horz" wrap="square" anchor="ctr" anchorCtr="1"/>
+        <a:lstStyle/>
+        <a:p>
+          <a:pPr>
+            <a:defRPr sz="1400" b="1" i="0" u="none" strike="noStrike" kern="1200" spc="0" baseline="0">
+              <a:solidFill>
+                <a:schemeClr val="tx1">
+                  <a:lumMod val="65000"/>
+                  <a:lumOff val="35000"/>
+                </a:schemeClr>
+              </a:solidFill>
+              <a:latin typeface="Arial" panose="020B0604020202020204" pitchFamily="34" charset="0"/>
+              <a:ea typeface="+mn-ea"/>
+              <a:cs typeface="Arial" panose="020B0604020202020204" pitchFamily="34" charset="0"/>
+            </a:defRPr>
+          </a:pPr>
+          <a:endParaRPr lang="en-US"/>
+        </a:p>
+      </c:txPr>
+    </c:title>
+    <c:autoTitleDeleted val="0"/>
+    <c:plotArea>
+      <c:layout/>
+      <c:lineChart>
+        <c:grouping val="standard"/>
+        <c:varyColors val="0"/>
+        <c:ser>
+          <c:idx val="0"/>
+          <c:order val="0"/>
+          <c:tx>
+            <c:strRef>
+              <c:f>'memory graphs (2)'!$F$1</c:f>
+              <c:strCache>
+                <c:ptCount val="1"/>
+                <c:pt idx="0">
+                  <c:v>Crossplane</c:v>
+                </c:pt>
+              </c:strCache>
+            </c:strRef>
+          </c:tx>
+          <c:spPr>
+            <a:ln w="28575" cap="rnd">
+              <a:solidFill>
+                <a:schemeClr val="accent1"/>
+              </a:solidFill>
+              <a:round/>
+            </a:ln>
+            <a:effectLst/>
+          </c:spPr>
+          <c:marker>
+            <c:symbol val="circle"/>
+            <c:size val="5"/>
+            <c:spPr>
+              <a:solidFill>
+                <a:schemeClr val="accent1"/>
+              </a:solidFill>
+              <a:ln w="9525">
+                <a:solidFill>
+                  <a:schemeClr val="accent1"/>
+                </a:solidFill>
+              </a:ln>
+              <a:effectLst/>
+            </c:spPr>
+          </c:marker>
+          <c:cat>
+            <c:numRef>
+              <c:f>'memory graphs (2)'!$A$2:$A$7</c:f>
+              <c:numCache>
+                <c:formatCode>General</c:formatCode>
+                <c:ptCount val="6"/>
+                <c:pt idx="0">
+                  <c:v>1</c:v>
+                </c:pt>
+                <c:pt idx="1">
+                  <c:v>10</c:v>
+                </c:pt>
+                <c:pt idx="2">
+                  <c:v>50</c:v>
+                </c:pt>
+                <c:pt idx="3">
+                  <c:v>100</c:v>
+                </c:pt>
+                <c:pt idx="4">
+                  <c:v>500</c:v>
+                </c:pt>
+                <c:pt idx="5">
+                  <c:v>1000</c:v>
+                </c:pt>
+              </c:numCache>
+            </c:numRef>
+          </c:cat>
+          <c:val>
+            <c:numRef>
+              <c:f>'memory graphs (2)'!$F$2:$F$7</c:f>
+              <c:numCache>
+                <c:formatCode>General</c:formatCode>
+                <c:ptCount val="6"/>
+                <c:pt idx="0">
+                  <c:v>384</c:v>
+                </c:pt>
+                <c:pt idx="1">
+                  <c:v>384</c:v>
+                </c:pt>
+                <c:pt idx="2">
+                  <c:v>387.6</c:v>
+                </c:pt>
+                <c:pt idx="3">
+                  <c:v>406.18181818181819</c:v>
+                </c:pt>
+                <c:pt idx="4">
+                  <c:v>501.64864864864865</c:v>
+                </c:pt>
+                <c:pt idx="5">
+                  <c:v>601.53164556962031</c:v>
+                </c:pt>
+              </c:numCache>
+            </c:numRef>
+          </c:val>
+          <c:smooth val="0"/>
+          <c:extLst>
+            <c:ext xmlns:c16="http://schemas.microsoft.com/office/drawing/2014/chart" uri="{C3380CC4-5D6E-409C-BE32-E72D297353CC}">
+              <c16:uniqueId val="{00000000-995B-493C-BD6D-B74A1C80CAAD}"/>
+            </c:ext>
+          </c:extLst>
+        </c:ser>
+        <c:ser>
+          <c:idx val="1"/>
+          <c:order val="1"/>
+          <c:tx>
+            <c:strRef>
+              <c:f>'memory graphs (2)'!$G$1</c:f>
+              <c:strCache>
+                <c:ptCount val="1"/>
+                <c:pt idx="0">
+                  <c:v>Kubebuilder </c:v>
+                </c:pt>
+              </c:strCache>
+            </c:strRef>
+          </c:tx>
+          <c:spPr>
+            <a:ln w="28575" cap="rnd">
+              <a:solidFill>
+                <a:srgbClr val="FF0000"/>
+              </a:solidFill>
+              <a:round/>
+            </a:ln>
+            <a:effectLst/>
+          </c:spPr>
+          <c:marker>
+            <c:symbol val="circle"/>
+            <c:size val="5"/>
+            <c:spPr>
+              <a:solidFill>
+                <a:srgbClr val="FF0000"/>
+              </a:solidFill>
+              <a:ln w="9525">
+                <a:solidFill>
+                  <a:schemeClr val="accent2"/>
+                </a:solidFill>
+              </a:ln>
+              <a:effectLst/>
+            </c:spPr>
+          </c:marker>
+          <c:cat>
+            <c:numRef>
+              <c:f>'memory graphs (2)'!$A$2:$A$7</c:f>
+              <c:numCache>
+                <c:formatCode>General</c:formatCode>
+                <c:ptCount val="6"/>
+                <c:pt idx="0">
+                  <c:v>1</c:v>
+                </c:pt>
+                <c:pt idx="1">
+                  <c:v>10</c:v>
+                </c:pt>
+                <c:pt idx="2">
+                  <c:v>50</c:v>
+                </c:pt>
+                <c:pt idx="3">
+                  <c:v>100</c:v>
+                </c:pt>
+                <c:pt idx="4">
+                  <c:v>500</c:v>
+                </c:pt>
+                <c:pt idx="5">
+                  <c:v>1000</c:v>
+                </c:pt>
+              </c:numCache>
+            </c:numRef>
+          </c:cat>
+          <c:val>
+            <c:numRef>
+              <c:f>'memory graphs (2)'!$G$2:$G$7</c:f>
+              <c:numCache>
+                <c:formatCode>General</c:formatCode>
+                <c:ptCount val="6"/>
+                <c:pt idx="0">
+                  <c:v>51.2</c:v>
+                </c:pt>
+                <c:pt idx="1">
+                  <c:v>56.1</c:v>
+                </c:pt>
+                <c:pt idx="2">
+                  <c:v>56.485714285714288</c:v>
+                </c:pt>
+                <c:pt idx="3">
+                  <c:v>56.873684210526321</c:v>
+                </c:pt>
+                <c:pt idx="4">
+                  <c:v>61.172727272727272</c:v>
+                </c:pt>
+                <c:pt idx="5">
+                  <c:v>66.514553990610281</c:v>
+                </c:pt>
+              </c:numCache>
+            </c:numRef>
+          </c:val>
+          <c:smooth val="0"/>
+          <c:extLst>
+            <c:ext xmlns:c16="http://schemas.microsoft.com/office/drawing/2014/chart" uri="{C3380CC4-5D6E-409C-BE32-E72D297353CC}">
+              <c16:uniqueId val="{00000001-995B-493C-BD6D-B74A1C80CAAD}"/>
+            </c:ext>
+          </c:extLst>
+        </c:ser>
+        <c:dLbls>
+          <c:showLegendKey val="0"/>
+          <c:showVal val="0"/>
+          <c:showCatName val="0"/>
+          <c:showSerName val="0"/>
+          <c:showPercent val="0"/>
+          <c:showBubbleSize val="0"/>
+        </c:dLbls>
+        <c:marker val="1"/>
+        <c:smooth val="0"/>
+        <c:axId val="1785334751"/>
+        <c:axId val="2046661455"/>
+      </c:lineChart>
+      <c:catAx>
+        <c:axId val="1785334751"/>
+        <c:scaling>
+          <c:orientation val="minMax"/>
+        </c:scaling>
+        <c:delete val="0"/>
+        <c:axPos val="b"/>
+        <c:numFmt formatCode="General" sourceLinked="1"/>
+        <c:majorTickMark val="none"/>
+        <c:minorTickMark val="none"/>
+        <c:tickLblPos val="nextTo"/>
+        <c:spPr>
+          <a:noFill/>
+          <a:ln w="9525" cap="flat" cmpd="sng" algn="ctr">
+            <a:solidFill>
+              <a:schemeClr val="tx1">
+                <a:lumMod val="15000"/>
+                <a:lumOff val="85000"/>
+              </a:schemeClr>
+            </a:solidFill>
+            <a:round/>
+          </a:ln>
+          <a:effectLst/>
+        </c:spPr>
+        <c:txPr>
+          <a:bodyPr rot="-60000000" spcFirstLastPara="1" vertOverflow="ellipsis" vert="horz" wrap="square" anchor="ctr" anchorCtr="1"/>
+          <a:lstStyle/>
+          <a:p>
+            <a:pPr>
+              <a:defRPr sz="900" b="0" i="0" u="none" strike="noStrike" kern="1200" baseline="0">
+                <a:solidFill>
+                  <a:schemeClr val="tx1">
+                    <a:lumMod val="65000"/>
+                    <a:lumOff val="35000"/>
+                  </a:schemeClr>
+                </a:solidFill>
+                <a:latin typeface="+mn-lt"/>
+                <a:ea typeface="+mn-ea"/>
+                <a:cs typeface="+mn-cs"/>
+              </a:defRPr>
+            </a:pPr>
+            <a:endParaRPr lang="en-US"/>
+          </a:p>
+        </c:txPr>
+        <c:crossAx val="2046661455"/>
+        <c:crosses val="autoZero"/>
+        <c:auto val="1"/>
+        <c:lblAlgn val="ctr"/>
+        <c:lblOffset val="100"/>
+        <c:noMultiLvlLbl val="0"/>
+      </c:catAx>
+      <c:valAx>
+        <c:axId val="2046661455"/>
+        <c:scaling>
+          <c:orientation val="minMax"/>
+        </c:scaling>
+        <c:delete val="0"/>
+        <c:axPos val="l"/>
+        <c:majorGridlines>
+          <c:spPr>
+            <a:ln w="9525" cap="flat" cmpd="sng" algn="ctr">
+              <a:solidFill>
+                <a:schemeClr val="tx1">
+                  <a:lumMod val="15000"/>
+                  <a:lumOff val="85000"/>
+                </a:schemeClr>
+              </a:solidFill>
+              <a:round/>
+            </a:ln>
+            <a:effectLst/>
+          </c:spPr>
+        </c:majorGridlines>
+        <c:numFmt formatCode="General" sourceLinked="1"/>
+        <c:majorTickMark val="none"/>
+        <c:minorTickMark val="none"/>
+        <c:tickLblPos val="nextTo"/>
+        <c:spPr>
+          <a:noFill/>
+          <a:ln>
+            <a:noFill/>
+          </a:ln>
+          <a:effectLst/>
+        </c:spPr>
+        <c:txPr>
+          <a:bodyPr rot="-60000000" spcFirstLastPara="1" vertOverflow="ellipsis" vert="horz" wrap="square" anchor="ctr" anchorCtr="1"/>
+          <a:lstStyle/>
+          <a:p>
+            <a:pPr>
+              <a:defRPr sz="900" b="0" i="0" u="none" strike="noStrike" kern="1200" baseline="0">
+                <a:solidFill>
+                  <a:schemeClr val="tx1">
+                    <a:lumMod val="65000"/>
+                    <a:lumOff val="35000"/>
+                  </a:schemeClr>
+                </a:solidFill>
+                <a:latin typeface="+mn-lt"/>
+                <a:ea typeface="+mn-ea"/>
+                <a:cs typeface="+mn-cs"/>
+              </a:defRPr>
+            </a:pPr>
+            <a:endParaRPr lang="en-US"/>
+          </a:p>
+        </c:txPr>
+        <c:crossAx val="1785334751"/>
+        <c:crosses val="autoZero"/>
+        <c:crossBetween val="between"/>
+      </c:valAx>
+      <c:spPr>
+        <a:noFill/>
+        <a:ln>
+          <a:noFill/>
+        </a:ln>
+        <a:effectLst/>
+      </c:spPr>
+    </c:plotArea>
+    <c:legend>
+      <c:legendPos val="b"/>
+      <c:overlay val="0"/>
+      <c:spPr>
+        <a:noFill/>
+        <a:ln>
+          <a:noFill/>
+        </a:ln>
+        <a:effectLst/>
+      </c:spPr>
+      <c:txPr>
+        <a:bodyPr rot="0" spcFirstLastPara="1" vertOverflow="ellipsis" vert="horz" wrap="square" anchor="ctr" anchorCtr="1"/>
+        <a:lstStyle/>
+        <a:p>
+          <a:pPr>
+            <a:defRPr sz="900" b="0" i="0" u="none" strike="noStrike" kern="1200" baseline="0">
+              <a:solidFill>
+                <a:schemeClr val="tx1">
+                  <a:lumMod val="65000"/>
+                  <a:lumOff val="35000"/>
+                </a:schemeClr>
+              </a:solidFill>
+              <a:latin typeface="+mn-lt"/>
+              <a:ea typeface="+mn-ea"/>
+              <a:cs typeface="+mn-cs"/>
+            </a:defRPr>
+          </a:pPr>
+          <a:endParaRPr lang="en-US"/>
+        </a:p>
+      </c:txPr>
+    </c:legend>
+    <c:plotVisOnly val="1"/>
+    <c:dispBlanksAs val="gap"/>
+    <c:showDLblsOverMax val="0"/>
+    <c:extLst>
+      <c:ext xmlns:c16r3="http://schemas.microsoft.com/office/drawing/2017/03/chart" uri="{56B9EC1D-385E-4148-901F-78D8002777C0}">
+        <c16r3:dataDisplayOptions16>
+          <c16r3:dispNaAsBlank val="1"/>
+        </c16r3:dataDisplayOptions16>
+      </c:ext>
+    </c:extLst>
+  </c:chart>
+  <c:spPr>
+    <a:noFill/>
+    <a:ln>
+      <a:noFill/>
+    </a:ln>
+    <a:effectLst/>
+  </c:spPr>
+  <c:txPr>
+    <a:bodyPr/>
+    <a:lstStyle/>
+    <a:p>
+      <a:pPr>
+        <a:defRPr/>
+      </a:pPr>
+      <a:endParaRPr lang="en-US"/>
+    </a:p>
+  </c:txPr>
+  <c:externalData r:id="rId3">
+    <c:autoUpdate val="0"/>
+  </c:externalData>
+</c:chartSpace>
+</file>
+
+<file path=ppt/charts/chart2.xml><?xml version="1.0" encoding="utf-8"?>
+<c:chartSpace xmlns:c="http://schemas.openxmlformats.org/drawingml/2006/chart" xmlns:a="http://schemas.openxmlformats.org/drawingml/2006/main" xmlns:r="http://schemas.openxmlformats.org/officeDocument/2006/relationships" xmlns:c16r2="http://schemas.microsoft.com/office/drawing/2015/06/chart">
+  <c:date1904 val="0"/>
+  <c:lang val="en-US"/>
+  <c:roundedCorners val="0"/>
+  <mc:AlternateContent xmlns:mc="http://schemas.openxmlformats.org/markup-compatibility/2006">
+    <mc:Choice xmlns:c14="http://schemas.microsoft.com/office/drawing/2007/8/2/chart" Requires="c14">
+      <c14:style val="102"/>
+    </mc:Choice>
+    <mc:Fallback>
+      <c:style val="2"/>
+    </mc:Fallback>
+  </mc:AlternateContent>
+  <c:chart>
+    <c:title>
+      <c:tx>
+        <c:rich>
+          <a:bodyPr rot="0" spcFirstLastPara="1" vertOverflow="ellipsis" vert="horz" wrap="square" anchor="ctr" anchorCtr="1"/>
+          <a:lstStyle/>
+          <a:p>
+            <a:pPr>
+              <a:defRPr sz="1400" b="1" i="0" u="none" strike="noStrike" kern="1200" spc="0" baseline="0">
+                <a:solidFill>
+                  <a:schemeClr val="tx1">
+                    <a:lumMod val="65000"/>
+                    <a:lumOff val="35000"/>
+                  </a:schemeClr>
+                </a:solidFill>
+                <a:latin typeface="Arial" panose="020B0604020202020204" pitchFamily="34" charset="0"/>
+                <a:ea typeface="+mn-ea"/>
+                <a:cs typeface="Arial" panose="020B0604020202020204" pitchFamily="34" charset="0"/>
+              </a:defRPr>
+            </a:pPr>
+            <a:r>
+              <a:rPr lang="en-US" b="1">
+                <a:latin typeface="Arial" panose="020B0604020202020204" pitchFamily="34" charset="0"/>
+                <a:cs typeface="Arial" panose="020B0604020202020204" pitchFamily="34" charset="0"/>
+              </a:rPr>
+              <a:t>Average CPU</a:t>
+            </a:r>
+            <a:r>
+              <a:rPr lang="en-US" b="1" baseline="0">
+                <a:latin typeface="Arial" panose="020B0604020202020204" pitchFamily="34" charset="0"/>
+                <a:cs typeface="Arial" panose="020B0604020202020204" pitchFamily="34" charset="0"/>
+              </a:rPr>
+              <a:t> usage vs DataStream objects batch size </a:t>
+            </a:r>
+            <a:endParaRPr lang="en-US" b="1">
+              <a:latin typeface="Arial" panose="020B0604020202020204" pitchFamily="34" charset="0"/>
+              <a:cs typeface="Arial" panose="020B0604020202020204" pitchFamily="34" charset="0"/>
+            </a:endParaRPr>
+          </a:p>
+        </c:rich>
+      </c:tx>
+      <c:overlay val="0"/>
+      <c:spPr>
+        <a:noFill/>
+        <a:ln>
+          <a:noFill/>
+        </a:ln>
+        <a:effectLst/>
+      </c:spPr>
+      <c:txPr>
+        <a:bodyPr rot="0" spcFirstLastPara="1" vertOverflow="ellipsis" vert="horz" wrap="square" anchor="ctr" anchorCtr="1"/>
+        <a:lstStyle/>
+        <a:p>
+          <a:pPr>
+            <a:defRPr sz="1400" b="1" i="0" u="none" strike="noStrike" kern="1200" spc="0" baseline="0">
+              <a:solidFill>
+                <a:schemeClr val="tx1">
+                  <a:lumMod val="65000"/>
+                  <a:lumOff val="35000"/>
+                </a:schemeClr>
+              </a:solidFill>
+              <a:latin typeface="Arial" panose="020B0604020202020204" pitchFamily="34" charset="0"/>
+              <a:ea typeface="+mn-ea"/>
+              <a:cs typeface="Arial" panose="020B0604020202020204" pitchFamily="34" charset="0"/>
+            </a:defRPr>
+          </a:pPr>
+          <a:endParaRPr lang="en-US"/>
+        </a:p>
+      </c:txPr>
+    </c:title>
+    <c:autoTitleDeleted val="0"/>
+    <c:plotArea>
+      <c:layout/>
+      <c:lineChart>
+        <c:grouping val="standard"/>
+        <c:varyColors val="0"/>
+        <c:ser>
+          <c:idx val="0"/>
+          <c:order val="0"/>
+          <c:tx>
+            <c:strRef>
+              <c:f>'cpu graphs'!$F$1</c:f>
+              <c:strCache>
+                <c:ptCount val="1"/>
+                <c:pt idx="0">
+                  <c:v>Crossplane</c:v>
+                </c:pt>
+              </c:strCache>
+            </c:strRef>
+          </c:tx>
+          <c:spPr>
+            <a:ln w="28575" cap="rnd">
+              <a:solidFill>
+                <a:schemeClr val="accent1"/>
+              </a:solidFill>
+              <a:round/>
+            </a:ln>
+            <a:effectLst/>
+          </c:spPr>
+          <c:marker>
+            <c:symbol val="circle"/>
+            <c:size val="5"/>
+            <c:spPr>
+              <a:solidFill>
+                <a:schemeClr val="accent1"/>
+              </a:solidFill>
+              <a:ln w="9525">
+                <a:solidFill>
+                  <a:schemeClr val="accent1"/>
+                </a:solidFill>
+              </a:ln>
+              <a:effectLst/>
+            </c:spPr>
+          </c:marker>
+          <c:cat>
+            <c:numRef>
+              <c:f>'cpu graphs'!$A$2:$A$7</c:f>
+              <c:numCache>
+                <c:formatCode>General</c:formatCode>
+                <c:ptCount val="6"/>
+                <c:pt idx="0">
+                  <c:v>1</c:v>
+                </c:pt>
+                <c:pt idx="1">
+                  <c:v>10</c:v>
+                </c:pt>
+                <c:pt idx="2">
+                  <c:v>50</c:v>
+                </c:pt>
+                <c:pt idx="3">
+                  <c:v>100</c:v>
+                </c:pt>
+                <c:pt idx="4">
+                  <c:v>500</c:v>
+                </c:pt>
+                <c:pt idx="5">
+                  <c:v>1000</c:v>
+                </c:pt>
+              </c:numCache>
+            </c:numRef>
+          </c:cat>
+          <c:val>
+            <c:numRef>
+              <c:f>'cpu graphs'!$F$2:$F$7</c:f>
+              <c:numCache>
+                <c:formatCode>General</c:formatCode>
+                <c:ptCount val="6"/>
+                <c:pt idx="0">
+                  <c:v>6</c:v>
+                </c:pt>
+                <c:pt idx="1">
+                  <c:v>14</c:v>
+                </c:pt>
+                <c:pt idx="2">
+                  <c:v>225.4</c:v>
+                </c:pt>
+                <c:pt idx="3">
+                  <c:v>335.18181818181819</c:v>
+                </c:pt>
+                <c:pt idx="4">
+                  <c:v>497.94594594594594</c:v>
+                </c:pt>
+                <c:pt idx="5">
+                  <c:v>498.73417721518985</c:v>
+                </c:pt>
+              </c:numCache>
+            </c:numRef>
+          </c:val>
+          <c:smooth val="0"/>
+          <c:extLst>
+            <c:ext xmlns:c16="http://schemas.microsoft.com/office/drawing/2014/chart" uri="{C3380CC4-5D6E-409C-BE32-E72D297353CC}">
+              <c16:uniqueId val="{00000000-E3AA-437F-95E4-002DB608C4CF}"/>
+            </c:ext>
+          </c:extLst>
+        </c:ser>
+        <c:ser>
+          <c:idx val="1"/>
+          <c:order val="1"/>
+          <c:tx>
+            <c:strRef>
+              <c:f>'cpu graphs'!$G$1</c:f>
+              <c:strCache>
+                <c:ptCount val="1"/>
+                <c:pt idx="0">
+                  <c:v>Kubebuilder</c:v>
+                </c:pt>
+              </c:strCache>
+            </c:strRef>
+          </c:tx>
+          <c:spPr>
+            <a:ln w="28575" cap="rnd">
+              <a:solidFill>
+                <a:srgbClr val="FF0000"/>
+              </a:solidFill>
+              <a:round/>
+            </a:ln>
+            <a:effectLst/>
+          </c:spPr>
+          <c:marker>
+            <c:symbol val="circle"/>
+            <c:size val="5"/>
+            <c:spPr>
+              <a:solidFill>
+                <a:srgbClr val="FF0000"/>
+              </a:solidFill>
+              <a:ln w="9525">
+                <a:solidFill>
+                  <a:schemeClr val="accent2"/>
+                </a:solidFill>
+              </a:ln>
+              <a:effectLst/>
+            </c:spPr>
+          </c:marker>
+          <c:cat>
+            <c:numRef>
+              <c:f>'cpu graphs'!$A$2:$A$7</c:f>
+              <c:numCache>
+                <c:formatCode>General</c:formatCode>
+                <c:ptCount val="6"/>
+                <c:pt idx="0">
+                  <c:v>1</c:v>
+                </c:pt>
+                <c:pt idx="1">
+                  <c:v>10</c:v>
+                </c:pt>
+                <c:pt idx="2">
+                  <c:v>50</c:v>
+                </c:pt>
+                <c:pt idx="3">
+                  <c:v>100</c:v>
+                </c:pt>
+                <c:pt idx="4">
+                  <c:v>500</c:v>
+                </c:pt>
+                <c:pt idx="5">
+                  <c:v>1000</c:v>
+                </c:pt>
+              </c:numCache>
+            </c:numRef>
+          </c:cat>
+          <c:val>
+            <c:numRef>
+              <c:f>'cpu graphs'!$G$2:$G$7</c:f>
+              <c:numCache>
+                <c:formatCode>General</c:formatCode>
+                <c:ptCount val="6"/>
+                <c:pt idx="0">
+                  <c:v>40</c:v>
+                </c:pt>
+                <c:pt idx="1">
+                  <c:v>75.333333333333329</c:v>
+                </c:pt>
+                <c:pt idx="2">
+                  <c:v>73.785714285714292</c:v>
+                </c:pt>
+                <c:pt idx="3">
+                  <c:v>49.89473684210526</c:v>
+                </c:pt>
+                <c:pt idx="4">
+                  <c:v>91.390909090909091</c:v>
+                </c:pt>
+                <c:pt idx="5">
+                  <c:v>101.97183098591549</c:v>
+                </c:pt>
+              </c:numCache>
+            </c:numRef>
+          </c:val>
+          <c:smooth val="0"/>
+          <c:extLst>
+            <c:ext xmlns:c16="http://schemas.microsoft.com/office/drawing/2014/chart" uri="{C3380CC4-5D6E-409C-BE32-E72D297353CC}">
+              <c16:uniqueId val="{00000001-E3AA-437F-95E4-002DB608C4CF}"/>
+            </c:ext>
+          </c:extLst>
+        </c:ser>
+        <c:dLbls>
+          <c:showLegendKey val="0"/>
+          <c:showVal val="0"/>
+          <c:showCatName val="0"/>
+          <c:showSerName val="0"/>
+          <c:showPercent val="0"/>
+          <c:showBubbleSize val="0"/>
+        </c:dLbls>
+        <c:marker val="1"/>
+        <c:smooth val="0"/>
+        <c:axId val="1785334751"/>
+        <c:axId val="2046661455"/>
+      </c:lineChart>
+      <c:catAx>
+        <c:axId val="1785334751"/>
+        <c:scaling>
+          <c:orientation val="minMax"/>
+        </c:scaling>
+        <c:delete val="0"/>
+        <c:axPos val="b"/>
+        <c:numFmt formatCode="General" sourceLinked="1"/>
+        <c:majorTickMark val="none"/>
+        <c:minorTickMark val="none"/>
+        <c:tickLblPos val="nextTo"/>
+        <c:spPr>
+          <a:noFill/>
+          <a:ln w="9525" cap="flat" cmpd="sng" algn="ctr">
+            <a:solidFill>
+              <a:schemeClr val="tx1">
+                <a:lumMod val="15000"/>
+                <a:lumOff val="85000"/>
+              </a:schemeClr>
+            </a:solidFill>
+            <a:round/>
+          </a:ln>
+          <a:effectLst/>
+        </c:spPr>
+        <c:txPr>
+          <a:bodyPr rot="-60000000" spcFirstLastPara="1" vertOverflow="ellipsis" vert="horz" wrap="square" anchor="ctr" anchorCtr="1"/>
+          <a:lstStyle/>
+          <a:p>
+            <a:pPr>
+              <a:defRPr sz="900" b="0" i="0" u="none" strike="noStrike" kern="1200" baseline="0">
+                <a:solidFill>
+                  <a:schemeClr val="tx1">
+                    <a:lumMod val="65000"/>
+                    <a:lumOff val="35000"/>
+                  </a:schemeClr>
+                </a:solidFill>
+                <a:latin typeface="+mn-lt"/>
+                <a:ea typeface="+mn-ea"/>
+                <a:cs typeface="+mn-cs"/>
+              </a:defRPr>
+            </a:pPr>
+            <a:endParaRPr lang="en-US"/>
+          </a:p>
+        </c:txPr>
+        <c:crossAx val="2046661455"/>
+        <c:crosses val="autoZero"/>
+        <c:auto val="1"/>
+        <c:lblAlgn val="ctr"/>
+        <c:lblOffset val="100"/>
+        <c:noMultiLvlLbl val="0"/>
+      </c:catAx>
+      <c:valAx>
+        <c:axId val="2046661455"/>
+        <c:scaling>
+          <c:orientation val="minMax"/>
+        </c:scaling>
+        <c:delete val="0"/>
+        <c:axPos val="l"/>
+        <c:majorGridlines>
+          <c:spPr>
+            <a:ln w="9525" cap="flat" cmpd="sng" algn="ctr">
+              <a:solidFill>
+                <a:schemeClr val="tx1">
+                  <a:lumMod val="15000"/>
+                  <a:lumOff val="85000"/>
+                </a:schemeClr>
+              </a:solidFill>
+              <a:round/>
+            </a:ln>
+            <a:effectLst/>
+          </c:spPr>
+        </c:majorGridlines>
+        <c:numFmt formatCode="General" sourceLinked="1"/>
+        <c:majorTickMark val="none"/>
+        <c:minorTickMark val="none"/>
+        <c:tickLblPos val="nextTo"/>
+        <c:spPr>
+          <a:noFill/>
+          <a:ln>
+            <a:noFill/>
+          </a:ln>
+          <a:effectLst/>
+        </c:spPr>
+        <c:txPr>
+          <a:bodyPr rot="-60000000" spcFirstLastPara="1" vertOverflow="ellipsis" vert="horz" wrap="square" anchor="ctr" anchorCtr="1"/>
+          <a:lstStyle/>
+          <a:p>
+            <a:pPr>
+              <a:defRPr sz="900" b="0" i="0" u="none" strike="noStrike" kern="1200" baseline="0">
+                <a:solidFill>
+                  <a:schemeClr val="tx1">
+                    <a:lumMod val="65000"/>
+                    <a:lumOff val="35000"/>
+                  </a:schemeClr>
+                </a:solidFill>
+                <a:latin typeface="+mn-lt"/>
+                <a:ea typeface="+mn-ea"/>
+                <a:cs typeface="+mn-cs"/>
+              </a:defRPr>
+            </a:pPr>
+            <a:endParaRPr lang="en-US"/>
+          </a:p>
+        </c:txPr>
+        <c:crossAx val="1785334751"/>
+        <c:crosses val="autoZero"/>
+        <c:crossBetween val="between"/>
+      </c:valAx>
+      <c:spPr>
+        <a:noFill/>
+        <a:ln>
+          <a:noFill/>
+        </a:ln>
+        <a:effectLst/>
+      </c:spPr>
+    </c:plotArea>
+    <c:legend>
+      <c:legendPos val="b"/>
+      <c:overlay val="0"/>
+      <c:spPr>
+        <a:noFill/>
+        <a:ln>
+          <a:noFill/>
+        </a:ln>
+        <a:effectLst/>
+      </c:spPr>
+      <c:txPr>
+        <a:bodyPr rot="0" spcFirstLastPara="1" vertOverflow="ellipsis" vert="horz" wrap="square" anchor="ctr" anchorCtr="1"/>
+        <a:lstStyle/>
+        <a:p>
+          <a:pPr>
+            <a:defRPr sz="900" b="0" i="0" u="none" strike="noStrike" kern="1200" baseline="0">
+              <a:solidFill>
+                <a:schemeClr val="tx1">
+                  <a:lumMod val="65000"/>
+                  <a:lumOff val="35000"/>
+                </a:schemeClr>
+              </a:solidFill>
+              <a:latin typeface="+mn-lt"/>
+              <a:ea typeface="+mn-ea"/>
+              <a:cs typeface="+mn-cs"/>
+            </a:defRPr>
+          </a:pPr>
+          <a:endParaRPr lang="en-US"/>
+        </a:p>
+      </c:txPr>
+    </c:legend>
+    <c:plotVisOnly val="1"/>
+    <c:dispBlanksAs val="gap"/>
+    <c:showDLblsOverMax val="0"/>
+    <c:extLst>
+      <c:ext xmlns:c16r3="http://schemas.microsoft.com/office/drawing/2017/03/chart" uri="{56B9EC1D-385E-4148-901F-78D8002777C0}">
+        <c16r3:dataDisplayOptions16>
+          <c16r3:dispNaAsBlank val="1"/>
+        </c16r3:dataDisplayOptions16>
+      </c:ext>
+    </c:extLst>
+  </c:chart>
+  <c:spPr>
+    <a:noFill/>
+    <a:ln>
+      <a:noFill/>
+    </a:ln>
+    <a:effectLst/>
+  </c:spPr>
+  <c:txPr>
+    <a:bodyPr/>
+    <a:lstStyle/>
+    <a:p>
+      <a:pPr>
+        <a:defRPr/>
+      </a:pPr>
+      <a:endParaRPr lang="en-US"/>
+    </a:p>
+  </c:txPr>
+  <c:externalData r:id="rId3">
+    <c:autoUpdate val="0"/>
+  </c:externalData>
+</c:chartSpace>
+</file>
+
+<file path=ppt/charts/chart3.xml><?xml version="1.0" encoding="utf-8"?>
+<c:chartSpace xmlns:c="http://schemas.openxmlformats.org/drawingml/2006/chart" xmlns:a="http://schemas.openxmlformats.org/drawingml/2006/main" xmlns:r="http://schemas.openxmlformats.org/officeDocument/2006/relationships" xmlns:c16r2="http://schemas.microsoft.com/office/drawing/2015/06/chart">
+  <c:date1904 val="0"/>
+  <c:lang val="en-US"/>
+  <c:roundedCorners val="0"/>
+  <mc:AlternateContent xmlns:mc="http://schemas.openxmlformats.org/markup-compatibility/2006">
+    <mc:Choice xmlns:c14="http://schemas.microsoft.com/office/drawing/2007/8/2/chart" Requires="c14">
+      <c14:style val="102"/>
+    </mc:Choice>
+    <mc:Fallback>
+      <c:style val="2"/>
+    </mc:Fallback>
+  </mc:AlternateContent>
+  <c:chart>
+    <c:title>
+      <c:tx>
+        <c:rich>
+          <a:bodyPr rot="0" spcFirstLastPara="1" vertOverflow="ellipsis" vert="horz" wrap="square" anchor="ctr" anchorCtr="1"/>
+          <a:lstStyle/>
+          <a:p>
+            <a:pPr>
+              <a:defRPr sz="1400" b="0" i="0" u="none" strike="noStrike" kern="1200" spc="0" baseline="0">
+                <a:solidFill>
+                  <a:schemeClr val="tx1">
+                    <a:lumMod val="65000"/>
+                    <a:lumOff val="35000"/>
+                  </a:schemeClr>
+                </a:solidFill>
+                <a:latin typeface="+mn-lt"/>
+                <a:ea typeface="+mn-ea"/>
+                <a:cs typeface="+mn-cs"/>
+              </a:defRPr>
+            </a:pPr>
+            <a:r>
+              <a:rPr lang="en-US" dirty="0"/>
+              <a:t>average CPU</a:t>
+            </a:r>
+            <a:r>
+              <a:rPr lang="en-US" baseline="0" dirty="0"/>
+              <a:t> usage(</a:t>
+            </a:r>
+            <a:r>
+              <a:rPr lang="en-US" baseline="0" dirty="0" err="1"/>
+              <a:t>millicores</a:t>
+            </a:r>
+            <a:r>
+              <a:rPr lang="en-US" baseline="0" dirty="0"/>
+              <a:t>) vs batch size </a:t>
+            </a:r>
+            <a:endParaRPr lang="en-US" dirty="0"/>
+          </a:p>
+        </c:rich>
+      </c:tx>
+      <c:overlay val="0"/>
+      <c:spPr>
+        <a:noFill/>
+        <a:ln>
+          <a:noFill/>
+        </a:ln>
+        <a:effectLst/>
+      </c:spPr>
+      <c:txPr>
+        <a:bodyPr rot="0" spcFirstLastPara="1" vertOverflow="ellipsis" vert="horz" wrap="square" anchor="ctr" anchorCtr="1"/>
+        <a:lstStyle/>
+        <a:p>
+          <a:pPr>
+            <a:defRPr sz="1400" b="0" i="0" u="none" strike="noStrike" kern="1200" spc="0" baseline="0">
+              <a:solidFill>
+                <a:schemeClr val="tx1">
+                  <a:lumMod val="65000"/>
+                  <a:lumOff val="35000"/>
+                </a:schemeClr>
+              </a:solidFill>
+              <a:latin typeface="+mn-lt"/>
+              <a:ea typeface="+mn-ea"/>
+              <a:cs typeface="+mn-cs"/>
+            </a:defRPr>
+          </a:pPr>
+          <a:endParaRPr lang="en-US"/>
+        </a:p>
+      </c:txPr>
+    </c:title>
+    <c:autoTitleDeleted val="0"/>
+    <c:plotArea>
+      <c:layout/>
+      <c:lineChart>
+        <c:grouping val="standard"/>
+        <c:varyColors val="0"/>
+        <c:ser>
+          <c:idx val="0"/>
+          <c:order val="0"/>
+          <c:tx>
+            <c:strRef>
+              <c:f>'cpu graphs'!$F$1</c:f>
+              <c:strCache>
+                <c:ptCount val="1"/>
+                <c:pt idx="0">
+                  <c:v>Crossplane</c:v>
+                </c:pt>
+              </c:strCache>
+            </c:strRef>
+          </c:tx>
+          <c:spPr>
+            <a:ln w="28575" cap="rnd">
+              <a:solidFill>
+                <a:schemeClr val="accent1"/>
+              </a:solidFill>
+              <a:round/>
+            </a:ln>
+            <a:effectLst/>
+          </c:spPr>
+          <c:marker>
+            <c:symbol val="circle"/>
+            <c:size val="5"/>
+            <c:spPr>
+              <a:solidFill>
+                <a:schemeClr val="accent1"/>
+              </a:solidFill>
+              <a:ln w="9525">
+                <a:solidFill>
+                  <a:schemeClr val="accent1"/>
+                </a:solidFill>
+              </a:ln>
+              <a:effectLst/>
+            </c:spPr>
+          </c:marker>
+          <c:cat>
+            <c:numRef>
+              <c:f>'cpu graphs'!$A$2:$A$7</c:f>
+              <c:numCache>
+                <c:formatCode>General</c:formatCode>
+                <c:ptCount val="6"/>
+                <c:pt idx="0">
+                  <c:v>1</c:v>
+                </c:pt>
+                <c:pt idx="1">
+                  <c:v>10</c:v>
+                </c:pt>
+                <c:pt idx="2">
+                  <c:v>50</c:v>
+                </c:pt>
+                <c:pt idx="3">
+                  <c:v>100</c:v>
+                </c:pt>
+                <c:pt idx="4">
+                  <c:v>500</c:v>
+                </c:pt>
+                <c:pt idx="5">
+                  <c:v>1000</c:v>
+                </c:pt>
+              </c:numCache>
+            </c:numRef>
+          </c:cat>
+          <c:val>
+            <c:numRef>
+              <c:f>'cpu graphs'!$F$2:$F$7</c:f>
+              <c:numCache>
+                <c:formatCode>General</c:formatCode>
+                <c:ptCount val="6"/>
+                <c:pt idx="0">
+                  <c:v>6</c:v>
+                </c:pt>
+                <c:pt idx="1">
+                  <c:v>14</c:v>
+                </c:pt>
+                <c:pt idx="2">
+                  <c:v>225.4</c:v>
+                </c:pt>
+                <c:pt idx="3">
+                  <c:v>335.18181818181819</c:v>
+                </c:pt>
+                <c:pt idx="4">
+                  <c:v>497.94594594594594</c:v>
+                </c:pt>
+                <c:pt idx="5">
+                  <c:v>498.73417721518985</c:v>
+                </c:pt>
+              </c:numCache>
+            </c:numRef>
+          </c:val>
+          <c:smooth val="0"/>
+          <c:extLst>
+            <c:ext xmlns:c16="http://schemas.microsoft.com/office/drawing/2014/chart" uri="{C3380CC4-5D6E-409C-BE32-E72D297353CC}">
+              <c16:uniqueId val="{00000000-A0EF-4B67-AAFE-FC36AC06A166}"/>
+            </c:ext>
+          </c:extLst>
+        </c:ser>
+        <c:ser>
+          <c:idx val="1"/>
+          <c:order val="1"/>
+          <c:tx>
+            <c:strRef>
+              <c:f>'cpu graphs'!$B$1</c:f>
+              <c:strCache>
+                <c:ptCount val="1"/>
+                <c:pt idx="0">
+                  <c:v>crossplane_core</c:v>
+                </c:pt>
+              </c:strCache>
+            </c:strRef>
+          </c:tx>
+          <c:spPr>
+            <a:ln w="28575" cap="rnd">
+              <a:solidFill>
+                <a:schemeClr val="accent2"/>
+              </a:solidFill>
+              <a:round/>
+            </a:ln>
+            <a:effectLst/>
+          </c:spPr>
+          <c:marker>
+            <c:symbol val="circle"/>
+            <c:size val="5"/>
+            <c:spPr>
+              <a:solidFill>
+                <a:schemeClr val="accent2"/>
+              </a:solidFill>
+              <a:ln w="9525">
+                <a:solidFill>
+                  <a:schemeClr val="accent2"/>
+                </a:solidFill>
+              </a:ln>
+              <a:effectLst/>
+            </c:spPr>
+          </c:marker>
+          <c:cat>
+            <c:numRef>
+              <c:f>'cpu graphs'!$A$2:$A$7</c:f>
+              <c:numCache>
+                <c:formatCode>General</c:formatCode>
+                <c:ptCount val="6"/>
+                <c:pt idx="0">
+                  <c:v>1</c:v>
+                </c:pt>
+                <c:pt idx="1">
+                  <c:v>10</c:v>
+                </c:pt>
+                <c:pt idx="2">
+                  <c:v>50</c:v>
+                </c:pt>
+                <c:pt idx="3">
+                  <c:v>100</c:v>
+                </c:pt>
+                <c:pt idx="4">
+                  <c:v>500</c:v>
+                </c:pt>
+                <c:pt idx="5">
+                  <c:v>1000</c:v>
+                </c:pt>
+              </c:numCache>
+            </c:numRef>
+          </c:cat>
+          <c:val>
+            <c:numRef>
+              <c:f>'cpu graphs'!$B$2:$B$7</c:f>
+              <c:numCache>
+                <c:formatCode>General</c:formatCode>
+                <c:ptCount val="6"/>
+                <c:pt idx="0">
+                  <c:v>2</c:v>
+                </c:pt>
+                <c:pt idx="1">
+                  <c:v>3.3333333333333335</c:v>
+                </c:pt>
+                <c:pt idx="2">
+                  <c:v>99.8</c:v>
+                </c:pt>
+                <c:pt idx="3">
+                  <c:v>158</c:v>
+                </c:pt>
+                <c:pt idx="4">
+                  <c:v>267.43243243243245</c:v>
+                </c:pt>
+                <c:pt idx="5">
+                  <c:v>267.65822784810126</c:v>
+                </c:pt>
+              </c:numCache>
+            </c:numRef>
+          </c:val>
+          <c:smooth val="0"/>
+          <c:extLst>
+            <c:ext xmlns:c16="http://schemas.microsoft.com/office/drawing/2014/chart" uri="{C3380CC4-5D6E-409C-BE32-E72D297353CC}">
+              <c16:uniqueId val="{00000001-A0EF-4B67-AAFE-FC36AC06A166}"/>
+            </c:ext>
+          </c:extLst>
+        </c:ser>
+        <c:ser>
+          <c:idx val="2"/>
+          <c:order val="2"/>
+          <c:tx>
+            <c:strRef>
+              <c:f>'cpu graphs'!$C$1</c:f>
+              <c:strCache>
+                <c:ptCount val="1"/>
+                <c:pt idx="0">
+                  <c:v>function-patch-and-transform</c:v>
+                </c:pt>
+              </c:strCache>
+            </c:strRef>
+          </c:tx>
+          <c:spPr>
+            <a:ln w="28575" cap="rnd">
+              <a:solidFill>
+                <a:schemeClr val="accent3"/>
+              </a:solidFill>
+              <a:round/>
+            </a:ln>
+            <a:effectLst/>
+          </c:spPr>
+          <c:marker>
+            <c:symbol val="circle"/>
+            <c:size val="5"/>
+            <c:spPr>
+              <a:solidFill>
+                <a:schemeClr val="accent3"/>
+              </a:solidFill>
+              <a:ln w="9525">
+                <a:solidFill>
+                  <a:schemeClr val="accent3"/>
+                </a:solidFill>
+              </a:ln>
+              <a:effectLst/>
+            </c:spPr>
+          </c:marker>
+          <c:cat>
+            <c:numRef>
+              <c:f>'cpu graphs'!$A$2:$A$7</c:f>
+              <c:numCache>
+                <c:formatCode>General</c:formatCode>
+                <c:ptCount val="6"/>
+                <c:pt idx="0">
+                  <c:v>1</c:v>
+                </c:pt>
+                <c:pt idx="1">
+                  <c:v>10</c:v>
+                </c:pt>
+                <c:pt idx="2">
+                  <c:v>50</c:v>
+                </c:pt>
+                <c:pt idx="3">
+                  <c:v>100</c:v>
+                </c:pt>
+                <c:pt idx="4">
+                  <c:v>500</c:v>
+                </c:pt>
+                <c:pt idx="5">
+                  <c:v>1000</c:v>
+                </c:pt>
+              </c:numCache>
+            </c:numRef>
+          </c:cat>
+          <c:val>
+            <c:numRef>
+              <c:f>'cpu graphs'!$C$2:$C$7</c:f>
+              <c:numCache>
+                <c:formatCode>General</c:formatCode>
+                <c:ptCount val="6"/>
+                <c:pt idx="0">
+                  <c:v>0</c:v>
+                </c:pt>
+                <c:pt idx="1">
+                  <c:v>2.6666666666666665</c:v>
+                </c:pt>
+                <c:pt idx="2">
+                  <c:v>33.4</c:v>
+                </c:pt>
+                <c:pt idx="3">
+                  <c:v>46.454545454545453</c:v>
+                </c:pt>
+                <c:pt idx="4">
+                  <c:v>64.594594594594597</c:v>
+                </c:pt>
+                <c:pt idx="5">
+                  <c:v>65.922077922077918</c:v>
+                </c:pt>
+              </c:numCache>
+            </c:numRef>
+          </c:val>
+          <c:smooth val="0"/>
+          <c:extLst>
+            <c:ext xmlns:c16="http://schemas.microsoft.com/office/drawing/2014/chart" uri="{C3380CC4-5D6E-409C-BE32-E72D297353CC}">
+              <c16:uniqueId val="{00000002-A0EF-4B67-AAFE-FC36AC06A166}"/>
+            </c:ext>
+          </c:extLst>
+        </c:ser>
+        <c:ser>
+          <c:idx val="3"/>
+          <c:order val="3"/>
+          <c:tx>
+            <c:strRef>
+              <c:f>'cpu graphs'!$D$1</c:f>
+              <c:strCache>
+                <c:ptCount val="1"/>
+                <c:pt idx="0">
+                  <c:v>provider-kafka</c:v>
+                </c:pt>
+              </c:strCache>
+            </c:strRef>
+          </c:tx>
+          <c:spPr>
+            <a:ln w="28575" cap="rnd">
+              <a:solidFill>
+                <a:schemeClr val="accent4"/>
+              </a:solidFill>
+              <a:round/>
+            </a:ln>
+            <a:effectLst/>
+          </c:spPr>
+          <c:marker>
+            <c:symbol val="circle"/>
+            <c:size val="5"/>
+            <c:spPr>
+              <a:solidFill>
+                <a:schemeClr val="accent4"/>
+              </a:solidFill>
+              <a:ln w="9525">
+                <a:solidFill>
+                  <a:schemeClr val="accent4"/>
+                </a:solidFill>
+              </a:ln>
+              <a:effectLst/>
+            </c:spPr>
+          </c:marker>
+          <c:cat>
+            <c:numRef>
+              <c:f>'cpu graphs'!$A$2:$A$7</c:f>
+              <c:numCache>
+                <c:formatCode>General</c:formatCode>
+                <c:ptCount val="6"/>
+                <c:pt idx="0">
+                  <c:v>1</c:v>
+                </c:pt>
+                <c:pt idx="1">
+                  <c:v>10</c:v>
+                </c:pt>
+                <c:pt idx="2">
+                  <c:v>50</c:v>
+                </c:pt>
+                <c:pt idx="3">
+                  <c:v>100</c:v>
+                </c:pt>
+                <c:pt idx="4">
+                  <c:v>500</c:v>
+                </c:pt>
+                <c:pt idx="5">
+                  <c:v>1000</c:v>
+                </c:pt>
+              </c:numCache>
+            </c:numRef>
+          </c:cat>
+          <c:val>
+            <c:numRef>
+              <c:f>'cpu graphs'!$D$2:$D$7</c:f>
+              <c:numCache>
+                <c:formatCode>General</c:formatCode>
+                <c:ptCount val="6"/>
+                <c:pt idx="0">
+                  <c:v>2</c:v>
+                </c:pt>
+                <c:pt idx="1">
+                  <c:v>3</c:v>
+                </c:pt>
+                <c:pt idx="2">
+                  <c:v>21.4</c:v>
+                </c:pt>
+                <c:pt idx="3">
+                  <c:v>36.636363636363633</c:v>
+                </c:pt>
+                <c:pt idx="4">
+                  <c:v>48.027027027027025</c:v>
+                </c:pt>
+                <c:pt idx="5">
+                  <c:v>53.531645569620252</c:v>
+                </c:pt>
+              </c:numCache>
+            </c:numRef>
+          </c:val>
+          <c:smooth val="0"/>
+          <c:extLst>
+            <c:ext xmlns:c16="http://schemas.microsoft.com/office/drawing/2014/chart" uri="{C3380CC4-5D6E-409C-BE32-E72D297353CC}">
+              <c16:uniqueId val="{00000003-A0EF-4B67-AAFE-FC36AC06A166}"/>
+            </c:ext>
+          </c:extLst>
+        </c:ser>
+        <c:ser>
+          <c:idx val="4"/>
+          <c:order val="4"/>
+          <c:tx>
+            <c:strRef>
+              <c:f>'cpu graphs'!$E$1</c:f>
+              <c:strCache>
+                <c:ptCount val="1"/>
+                <c:pt idx="0">
+                  <c:v>provider-kubernetes</c:v>
+                </c:pt>
+              </c:strCache>
+            </c:strRef>
+          </c:tx>
+          <c:spPr>
+            <a:ln w="28575" cap="rnd">
+              <a:solidFill>
+                <a:schemeClr val="accent5"/>
+              </a:solidFill>
+              <a:round/>
+            </a:ln>
+            <a:effectLst/>
+          </c:spPr>
+          <c:marker>
+            <c:symbol val="circle"/>
+            <c:size val="5"/>
+            <c:spPr>
+              <a:solidFill>
+                <a:schemeClr val="accent5"/>
+              </a:solidFill>
+              <a:ln w="9525">
+                <a:solidFill>
+                  <a:schemeClr val="accent5"/>
+                </a:solidFill>
+              </a:ln>
+              <a:effectLst/>
+            </c:spPr>
+          </c:marker>
+          <c:cat>
+            <c:numRef>
+              <c:f>'cpu graphs'!$A$2:$A$7</c:f>
+              <c:numCache>
+                <c:formatCode>General</c:formatCode>
+                <c:ptCount val="6"/>
+                <c:pt idx="0">
+                  <c:v>1</c:v>
+                </c:pt>
+                <c:pt idx="1">
+                  <c:v>10</c:v>
+                </c:pt>
+                <c:pt idx="2">
+                  <c:v>50</c:v>
+                </c:pt>
+                <c:pt idx="3">
+                  <c:v>100</c:v>
+                </c:pt>
+                <c:pt idx="4">
+                  <c:v>500</c:v>
+                </c:pt>
+                <c:pt idx="5">
+                  <c:v>1000</c:v>
+                </c:pt>
+              </c:numCache>
+            </c:numRef>
+          </c:cat>
+          <c:val>
+            <c:numRef>
+              <c:f>'cpu graphs'!$E$2:$E$7</c:f>
+              <c:numCache>
+                <c:formatCode>General</c:formatCode>
+                <c:ptCount val="6"/>
+                <c:pt idx="0">
+                  <c:v>2</c:v>
+                </c:pt>
+                <c:pt idx="1">
+                  <c:v>5</c:v>
+                </c:pt>
+                <c:pt idx="2">
+                  <c:v>70.8</c:v>
+                </c:pt>
+                <c:pt idx="3">
+                  <c:v>94.090909090909093</c:v>
+                </c:pt>
+                <c:pt idx="4">
+                  <c:v>117.89189189189189</c:v>
+                </c:pt>
+                <c:pt idx="5">
+                  <c:v>116.23376623376623</c:v>
+                </c:pt>
+              </c:numCache>
+            </c:numRef>
+          </c:val>
+          <c:smooth val="0"/>
+          <c:extLst>
+            <c:ext xmlns:c16="http://schemas.microsoft.com/office/drawing/2014/chart" uri="{C3380CC4-5D6E-409C-BE32-E72D297353CC}">
+              <c16:uniqueId val="{00000004-A0EF-4B67-AAFE-FC36AC06A166}"/>
+            </c:ext>
+          </c:extLst>
+        </c:ser>
+        <c:dLbls>
+          <c:showLegendKey val="0"/>
+          <c:showVal val="0"/>
+          <c:showCatName val="0"/>
+          <c:showSerName val="0"/>
+          <c:showPercent val="0"/>
+          <c:showBubbleSize val="0"/>
+        </c:dLbls>
+        <c:marker val="1"/>
+        <c:smooth val="0"/>
+        <c:axId val="1785334751"/>
+        <c:axId val="2046661455"/>
+      </c:lineChart>
+      <c:catAx>
+        <c:axId val="1785334751"/>
+        <c:scaling>
+          <c:orientation val="minMax"/>
+        </c:scaling>
+        <c:delete val="0"/>
+        <c:axPos val="b"/>
+        <c:numFmt formatCode="General" sourceLinked="1"/>
+        <c:majorTickMark val="none"/>
+        <c:minorTickMark val="none"/>
+        <c:tickLblPos val="nextTo"/>
+        <c:spPr>
+          <a:noFill/>
+          <a:ln w="9525" cap="flat" cmpd="sng" algn="ctr">
+            <a:solidFill>
+              <a:schemeClr val="tx1">
+                <a:lumMod val="15000"/>
+                <a:lumOff val="85000"/>
+              </a:schemeClr>
+            </a:solidFill>
+            <a:round/>
+          </a:ln>
+          <a:effectLst/>
+        </c:spPr>
+        <c:txPr>
+          <a:bodyPr rot="-60000000" spcFirstLastPara="1" vertOverflow="ellipsis" vert="horz" wrap="square" anchor="ctr" anchorCtr="1"/>
+          <a:lstStyle/>
+          <a:p>
+            <a:pPr>
+              <a:defRPr sz="900" b="0" i="0" u="none" strike="noStrike" kern="1200" baseline="0">
+                <a:solidFill>
+                  <a:schemeClr val="tx1">
+                    <a:lumMod val="65000"/>
+                    <a:lumOff val="35000"/>
+                  </a:schemeClr>
+                </a:solidFill>
+                <a:latin typeface="+mn-lt"/>
+                <a:ea typeface="+mn-ea"/>
+                <a:cs typeface="+mn-cs"/>
+              </a:defRPr>
+            </a:pPr>
+            <a:endParaRPr lang="en-US"/>
+          </a:p>
+        </c:txPr>
+        <c:crossAx val="2046661455"/>
+        <c:crosses val="autoZero"/>
+        <c:auto val="1"/>
+        <c:lblAlgn val="ctr"/>
+        <c:lblOffset val="100"/>
+        <c:noMultiLvlLbl val="0"/>
+      </c:catAx>
+      <c:valAx>
+        <c:axId val="2046661455"/>
+        <c:scaling>
+          <c:orientation val="minMax"/>
+        </c:scaling>
+        <c:delete val="0"/>
+        <c:axPos val="l"/>
+        <c:majorGridlines>
+          <c:spPr>
+            <a:ln w="9525" cap="flat" cmpd="sng" algn="ctr">
+              <a:solidFill>
+                <a:schemeClr val="tx1">
+                  <a:lumMod val="15000"/>
+                  <a:lumOff val="85000"/>
+                </a:schemeClr>
+              </a:solidFill>
+              <a:round/>
+            </a:ln>
+            <a:effectLst/>
+          </c:spPr>
+        </c:majorGridlines>
+        <c:numFmt formatCode="General" sourceLinked="1"/>
+        <c:majorTickMark val="none"/>
+        <c:minorTickMark val="none"/>
+        <c:tickLblPos val="nextTo"/>
+        <c:spPr>
+          <a:noFill/>
+          <a:ln>
+            <a:noFill/>
+          </a:ln>
+          <a:effectLst/>
+        </c:spPr>
+        <c:txPr>
+          <a:bodyPr rot="-60000000" spcFirstLastPara="1" vertOverflow="ellipsis" vert="horz" wrap="square" anchor="ctr" anchorCtr="1"/>
+          <a:lstStyle/>
+          <a:p>
+            <a:pPr>
+              <a:defRPr sz="900" b="0" i="0" u="none" strike="noStrike" kern="1200" baseline="0">
+                <a:solidFill>
+                  <a:schemeClr val="tx1">
+                    <a:lumMod val="65000"/>
+                    <a:lumOff val="35000"/>
+                  </a:schemeClr>
+                </a:solidFill>
+                <a:latin typeface="+mn-lt"/>
+                <a:ea typeface="+mn-ea"/>
+                <a:cs typeface="+mn-cs"/>
+              </a:defRPr>
+            </a:pPr>
+            <a:endParaRPr lang="en-US"/>
+          </a:p>
+        </c:txPr>
+        <c:crossAx val="1785334751"/>
+        <c:crosses val="autoZero"/>
+        <c:crossBetween val="between"/>
+      </c:valAx>
+      <c:spPr>
+        <a:noFill/>
+        <a:ln>
+          <a:noFill/>
+        </a:ln>
+        <a:effectLst/>
+      </c:spPr>
+    </c:plotArea>
+    <c:legend>
+      <c:legendPos val="b"/>
+      <c:layout>
+        <c:manualLayout>
+          <c:xMode val="edge"/>
+          <c:yMode val="edge"/>
+          <c:x val="5.2336123078954765E-2"/>
+          <c:y val="0.87966232588376503"/>
+          <c:w val="0.91419567837039239"/>
+          <c:h val="9.868679762510911E-2"/>
+        </c:manualLayout>
+      </c:layout>
+      <c:overlay val="0"/>
+      <c:spPr>
+        <a:noFill/>
+        <a:ln>
+          <a:noFill/>
+        </a:ln>
+        <a:effectLst/>
+      </c:spPr>
+      <c:txPr>
+        <a:bodyPr rot="0" spcFirstLastPara="1" vertOverflow="ellipsis" vert="horz" wrap="square" anchor="ctr" anchorCtr="1"/>
+        <a:lstStyle/>
+        <a:p>
+          <a:pPr>
+            <a:defRPr sz="900" b="0" i="0" u="none" strike="noStrike" kern="1200" baseline="0">
+              <a:solidFill>
+                <a:schemeClr val="tx1">
+                  <a:lumMod val="65000"/>
+                  <a:lumOff val="35000"/>
+                </a:schemeClr>
+              </a:solidFill>
+              <a:latin typeface="+mn-lt"/>
+              <a:ea typeface="+mn-ea"/>
+              <a:cs typeface="+mn-cs"/>
+            </a:defRPr>
+          </a:pPr>
+          <a:endParaRPr lang="en-US"/>
+        </a:p>
+      </c:txPr>
+    </c:legend>
+    <c:plotVisOnly val="1"/>
+    <c:dispBlanksAs val="gap"/>
+    <c:showDLblsOverMax val="0"/>
+    <c:extLst>
+      <c:ext xmlns:c16r3="http://schemas.microsoft.com/office/drawing/2017/03/chart" uri="{56B9EC1D-385E-4148-901F-78D8002777C0}">
+        <c16r3:dataDisplayOptions16>
+          <c16r3:dispNaAsBlank val="1"/>
+        </c16r3:dataDisplayOptions16>
+      </c:ext>
+    </c:extLst>
+  </c:chart>
+  <c:spPr>
+    <a:noFill/>
+    <a:ln>
+      <a:noFill/>
+    </a:ln>
+    <a:effectLst/>
+  </c:spPr>
+  <c:txPr>
+    <a:bodyPr/>
+    <a:lstStyle/>
+    <a:p>
+      <a:pPr>
+        <a:defRPr/>
+      </a:pPr>
+      <a:endParaRPr lang="en-US"/>
+    </a:p>
+  </c:txPr>
+  <c:externalData r:id="rId3">
+    <c:autoUpdate val="0"/>
+  </c:externalData>
+</c:chartSpace>
+</file>
+
+<file path=ppt/charts/chart4.xml><?xml version="1.0" encoding="utf-8"?>
+<c:chartSpace xmlns:c="http://schemas.openxmlformats.org/drawingml/2006/chart" xmlns:a="http://schemas.openxmlformats.org/drawingml/2006/main" xmlns:r="http://schemas.openxmlformats.org/officeDocument/2006/relationships" xmlns:c16r2="http://schemas.microsoft.com/office/drawing/2015/06/chart">
+  <c:date1904 val="0"/>
+  <c:lang val="en-US"/>
+  <c:roundedCorners val="0"/>
+  <mc:AlternateContent xmlns:mc="http://schemas.openxmlformats.org/markup-compatibility/2006">
+    <mc:Choice xmlns:c14="http://schemas.microsoft.com/office/drawing/2007/8/2/chart" Requires="c14">
+      <c14:style val="102"/>
+    </mc:Choice>
+    <mc:Fallback>
+      <c:style val="2"/>
+    </mc:Fallback>
+  </mc:AlternateContent>
+  <c:chart>
+    <c:title>
+      <c:tx>
+        <c:rich>
+          <a:bodyPr rot="0" spcFirstLastPara="1" vertOverflow="ellipsis" vert="horz" wrap="square" anchor="ctr" anchorCtr="1"/>
+          <a:lstStyle/>
+          <a:p>
+            <a:pPr>
+              <a:defRPr sz="1400" b="0" i="0" u="none" strike="noStrike" kern="1200" spc="0" baseline="0">
+                <a:solidFill>
+                  <a:schemeClr val="tx1">
+                    <a:lumMod val="65000"/>
+                    <a:lumOff val="35000"/>
+                  </a:schemeClr>
+                </a:solidFill>
+                <a:latin typeface="+mn-lt"/>
+                <a:ea typeface="+mn-ea"/>
+                <a:cs typeface="+mn-cs"/>
+              </a:defRPr>
+            </a:pPr>
+            <a:r>
+              <a:rPr lang="en-US" dirty="0"/>
+              <a:t>average RAM</a:t>
+            </a:r>
+            <a:r>
+              <a:rPr lang="en-US" baseline="0" dirty="0"/>
+              <a:t> usage(Mib) vs DataStream objects batch </a:t>
+            </a:r>
+            <a:endParaRPr lang="en-US" dirty="0"/>
+          </a:p>
+        </c:rich>
+      </c:tx>
+      <c:overlay val="0"/>
+      <c:spPr>
+        <a:noFill/>
+        <a:ln>
+          <a:noFill/>
+        </a:ln>
+        <a:effectLst/>
+      </c:spPr>
+      <c:txPr>
+        <a:bodyPr rot="0" spcFirstLastPara="1" vertOverflow="ellipsis" vert="horz" wrap="square" anchor="ctr" anchorCtr="1"/>
+        <a:lstStyle/>
+        <a:p>
+          <a:pPr>
+            <a:defRPr sz="1400" b="0" i="0" u="none" strike="noStrike" kern="1200" spc="0" baseline="0">
+              <a:solidFill>
+                <a:schemeClr val="tx1">
+                  <a:lumMod val="65000"/>
+                  <a:lumOff val="35000"/>
+                </a:schemeClr>
+              </a:solidFill>
+              <a:latin typeface="+mn-lt"/>
+              <a:ea typeface="+mn-ea"/>
+              <a:cs typeface="+mn-cs"/>
+            </a:defRPr>
+          </a:pPr>
+          <a:endParaRPr lang="en-US"/>
+        </a:p>
+      </c:txPr>
+    </c:title>
+    <c:autoTitleDeleted val="0"/>
+    <c:plotArea>
+      <c:layout>
+        <c:manualLayout>
+          <c:layoutTarget val="inner"/>
+          <c:xMode val="edge"/>
+          <c:yMode val="edge"/>
+          <c:x val="4.7372758865848671E-2"/>
+          <c:y val="0.13026610688827467"/>
+          <c:w val="0.95262724113415131"/>
+          <c:h val="0.60152073256109984"/>
+        </c:manualLayout>
+      </c:layout>
+      <c:lineChart>
+        <c:grouping val="standard"/>
+        <c:varyColors val="0"/>
+        <c:ser>
+          <c:idx val="0"/>
+          <c:order val="0"/>
+          <c:tx>
+            <c:strRef>
+              <c:f>'memory graphs (2)'!$F$1</c:f>
+              <c:strCache>
+                <c:ptCount val="1"/>
+                <c:pt idx="0">
+                  <c:v>Crossplane</c:v>
+                </c:pt>
+              </c:strCache>
+            </c:strRef>
+          </c:tx>
+          <c:spPr>
+            <a:ln w="28575" cap="rnd">
+              <a:solidFill>
+                <a:schemeClr val="accent1"/>
+              </a:solidFill>
+              <a:round/>
+            </a:ln>
+            <a:effectLst/>
+          </c:spPr>
+          <c:marker>
+            <c:symbol val="circle"/>
+            <c:size val="5"/>
+            <c:spPr>
+              <a:solidFill>
+                <a:schemeClr val="accent1"/>
+              </a:solidFill>
+              <a:ln w="9525">
+                <a:solidFill>
+                  <a:schemeClr val="accent1"/>
+                </a:solidFill>
+              </a:ln>
+              <a:effectLst/>
+            </c:spPr>
+          </c:marker>
+          <c:cat>
+            <c:numRef>
+              <c:f>'memory graphs (2)'!$A$2:$A$7</c:f>
+              <c:numCache>
+                <c:formatCode>General</c:formatCode>
+                <c:ptCount val="6"/>
+                <c:pt idx="0">
+                  <c:v>1</c:v>
+                </c:pt>
+                <c:pt idx="1">
+                  <c:v>10</c:v>
+                </c:pt>
+                <c:pt idx="2">
+                  <c:v>50</c:v>
+                </c:pt>
+                <c:pt idx="3">
+                  <c:v>100</c:v>
+                </c:pt>
+                <c:pt idx="4">
+                  <c:v>500</c:v>
+                </c:pt>
+                <c:pt idx="5">
+                  <c:v>1000</c:v>
+                </c:pt>
+              </c:numCache>
+            </c:numRef>
+          </c:cat>
+          <c:val>
+            <c:numRef>
+              <c:f>'memory graphs (2)'!$F$2:$F$7</c:f>
+              <c:numCache>
+                <c:formatCode>General</c:formatCode>
+                <c:ptCount val="6"/>
+                <c:pt idx="0">
+                  <c:v>384</c:v>
+                </c:pt>
+                <c:pt idx="1">
+                  <c:v>384</c:v>
+                </c:pt>
+                <c:pt idx="2">
+                  <c:v>387.6</c:v>
+                </c:pt>
+                <c:pt idx="3">
+                  <c:v>406.18181818181819</c:v>
+                </c:pt>
+                <c:pt idx="4">
+                  <c:v>501.64864864864865</c:v>
+                </c:pt>
+                <c:pt idx="5">
+                  <c:v>601.53164556962031</c:v>
+                </c:pt>
+              </c:numCache>
+            </c:numRef>
+          </c:val>
+          <c:smooth val="0"/>
+          <c:extLst>
+            <c:ext xmlns:c16="http://schemas.microsoft.com/office/drawing/2014/chart" uri="{C3380CC4-5D6E-409C-BE32-E72D297353CC}">
+              <c16:uniqueId val="{00000000-6FC0-45D2-A214-8171279E834B}"/>
+            </c:ext>
+          </c:extLst>
+        </c:ser>
+        <c:ser>
+          <c:idx val="1"/>
+          <c:order val="1"/>
+          <c:tx>
+            <c:strRef>
+              <c:f>'memory graphs (2)'!$B$1</c:f>
+              <c:strCache>
+                <c:ptCount val="1"/>
+                <c:pt idx="0">
+                  <c:v>crossplane_core</c:v>
+                </c:pt>
+              </c:strCache>
+            </c:strRef>
+          </c:tx>
+          <c:spPr>
+            <a:ln w="28575" cap="rnd">
+              <a:solidFill>
+                <a:schemeClr val="accent2"/>
+              </a:solidFill>
+              <a:round/>
+            </a:ln>
+            <a:effectLst/>
+          </c:spPr>
+          <c:marker>
+            <c:symbol val="circle"/>
+            <c:size val="5"/>
+            <c:spPr>
+              <a:solidFill>
+                <a:schemeClr val="accent2"/>
+              </a:solidFill>
+              <a:ln w="9525">
+                <a:solidFill>
+                  <a:schemeClr val="accent2"/>
+                </a:solidFill>
+              </a:ln>
+              <a:effectLst/>
+            </c:spPr>
+          </c:marker>
+          <c:cat>
+            <c:numRef>
+              <c:f>'memory graphs (2)'!$A$2:$A$7</c:f>
+              <c:numCache>
+                <c:formatCode>General</c:formatCode>
+                <c:ptCount val="6"/>
+                <c:pt idx="0">
+                  <c:v>1</c:v>
+                </c:pt>
+                <c:pt idx="1">
+                  <c:v>10</c:v>
+                </c:pt>
+                <c:pt idx="2">
+                  <c:v>50</c:v>
+                </c:pt>
+                <c:pt idx="3">
+                  <c:v>100</c:v>
+                </c:pt>
+                <c:pt idx="4">
+                  <c:v>500</c:v>
+                </c:pt>
+                <c:pt idx="5">
+                  <c:v>1000</c:v>
+                </c:pt>
+              </c:numCache>
+            </c:numRef>
+          </c:cat>
+          <c:val>
+            <c:numRef>
+              <c:f>'memory graphs (2)'!$B$2:$B$7</c:f>
+              <c:numCache>
+                <c:formatCode>General</c:formatCode>
+                <c:ptCount val="6"/>
+                <c:pt idx="0">
+                  <c:v>187</c:v>
+                </c:pt>
+                <c:pt idx="1">
+                  <c:v>187</c:v>
+                </c:pt>
+                <c:pt idx="2">
+                  <c:v>188.8</c:v>
+                </c:pt>
+                <c:pt idx="3">
+                  <c:v>204.09090909090909</c:v>
+                </c:pt>
+                <c:pt idx="4">
+                  <c:v>292.18918918918916</c:v>
+                </c:pt>
+                <c:pt idx="5">
+                  <c:v>373.70886075949369</c:v>
+                </c:pt>
+              </c:numCache>
+            </c:numRef>
+          </c:val>
+          <c:smooth val="0"/>
+          <c:extLst>
+            <c:ext xmlns:c16="http://schemas.microsoft.com/office/drawing/2014/chart" uri="{C3380CC4-5D6E-409C-BE32-E72D297353CC}">
+              <c16:uniqueId val="{00000001-6FC0-45D2-A214-8171279E834B}"/>
+            </c:ext>
+          </c:extLst>
+        </c:ser>
+        <c:ser>
+          <c:idx val="2"/>
+          <c:order val="2"/>
+          <c:tx>
+            <c:strRef>
+              <c:f>'memory graphs (2)'!$C$1</c:f>
+              <c:strCache>
+                <c:ptCount val="1"/>
+                <c:pt idx="0">
+                  <c:v>function-patch-and-transform</c:v>
+                </c:pt>
+              </c:strCache>
+            </c:strRef>
+          </c:tx>
+          <c:spPr>
+            <a:ln w="28575" cap="rnd">
+              <a:solidFill>
+                <a:schemeClr val="accent3"/>
+              </a:solidFill>
+              <a:round/>
+            </a:ln>
+            <a:effectLst/>
+          </c:spPr>
+          <c:marker>
+            <c:symbol val="circle"/>
+            <c:size val="5"/>
+            <c:spPr>
+              <a:solidFill>
+                <a:schemeClr val="accent3"/>
+              </a:solidFill>
+              <a:ln w="9525">
+                <a:solidFill>
+                  <a:schemeClr val="accent3"/>
+                </a:solidFill>
+              </a:ln>
+              <a:effectLst/>
+            </c:spPr>
+          </c:marker>
+          <c:cat>
+            <c:numRef>
+              <c:f>'memory graphs (2)'!$A$2:$A$7</c:f>
+              <c:numCache>
+                <c:formatCode>General</c:formatCode>
+                <c:ptCount val="6"/>
+                <c:pt idx="0">
+                  <c:v>1</c:v>
+                </c:pt>
+                <c:pt idx="1">
+                  <c:v>10</c:v>
+                </c:pt>
+                <c:pt idx="2">
+                  <c:v>50</c:v>
+                </c:pt>
+                <c:pt idx="3">
+                  <c:v>100</c:v>
+                </c:pt>
+                <c:pt idx="4">
+                  <c:v>500</c:v>
+                </c:pt>
+                <c:pt idx="5">
+                  <c:v>1000</c:v>
+                </c:pt>
+              </c:numCache>
+            </c:numRef>
+          </c:cat>
+          <c:val>
+            <c:numRef>
+              <c:f>'memory graphs (2)'!$C$2:$C$7</c:f>
+              <c:numCache>
+                <c:formatCode>General</c:formatCode>
+                <c:ptCount val="6"/>
+                <c:pt idx="0">
+                  <c:v>52</c:v>
+                </c:pt>
+                <c:pt idx="1">
+                  <c:v>52</c:v>
+                </c:pt>
+                <c:pt idx="2">
+                  <c:v>53.8</c:v>
+                </c:pt>
+                <c:pt idx="3">
+                  <c:v>53.81818181818182</c:v>
+                </c:pt>
+                <c:pt idx="4">
+                  <c:v>42.45945945945946</c:v>
+                </c:pt>
+                <c:pt idx="5">
+                  <c:v>32.519480519480517</c:v>
+                </c:pt>
+              </c:numCache>
+            </c:numRef>
+          </c:val>
+          <c:smooth val="0"/>
+          <c:extLst>
+            <c:ext xmlns:c16="http://schemas.microsoft.com/office/drawing/2014/chart" uri="{C3380CC4-5D6E-409C-BE32-E72D297353CC}">
+              <c16:uniqueId val="{00000002-6FC0-45D2-A214-8171279E834B}"/>
+            </c:ext>
+          </c:extLst>
+        </c:ser>
+        <c:ser>
+          <c:idx val="3"/>
+          <c:order val="3"/>
+          <c:tx>
+            <c:strRef>
+              <c:f>'memory graphs (2)'!$D$1</c:f>
+              <c:strCache>
+                <c:ptCount val="1"/>
+                <c:pt idx="0">
+                  <c:v>provider-kafka</c:v>
+                </c:pt>
+              </c:strCache>
+            </c:strRef>
+          </c:tx>
+          <c:spPr>
+            <a:ln w="28575" cap="rnd">
+              <a:solidFill>
+                <a:schemeClr val="accent4"/>
+              </a:solidFill>
+              <a:round/>
+            </a:ln>
+            <a:effectLst/>
+          </c:spPr>
+          <c:marker>
+            <c:symbol val="circle"/>
+            <c:size val="5"/>
+            <c:spPr>
+              <a:solidFill>
+                <a:schemeClr val="accent4"/>
+              </a:solidFill>
+              <a:ln w="9525">
+                <a:solidFill>
+                  <a:schemeClr val="accent4"/>
+                </a:solidFill>
+              </a:ln>
+              <a:effectLst/>
+            </c:spPr>
+          </c:marker>
+          <c:cat>
+            <c:numRef>
+              <c:f>'memory graphs (2)'!$A$2:$A$7</c:f>
+              <c:numCache>
+                <c:formatCode>General</c:formatCode>
+                <c:ptCount val="6"/>
+                <c:pt idx="0">
+                  <c:v>1</c:v>
+                </c:pt>
+                <c:pt idx="1">
+                  <c:v>10</c:v>
+                </c:pt>
+                <c:pt idx="2">
+                  <c:v>50</c:v>
+                </c:pt>
+                <c:pt idx="3">
+                  <c:v>100</c:v>
+                </c:pt>
+                <c:pt idx="4">
+                  <c:v>500</c:v>
+                </c:pt>
+                <c:pt idx="5">
+                  <c:v>1000</c:v>
+                </c:pt>
+              </c:numCache>
+            </c:numRef>
+          </c:cat>
+          <c:val>
+            <c:numRef>
+              <c:f>'memory graphs (2)'!$D$2:$D$7</c:f>
+              <c:numCache>
+                <c:formatCode>General</c:formatCode>
+                <c:ptCount val="6"/>
+                <c:pt idx="0">
+                  <c:v>71</c:v>
+                </c:pt>
+                <c:pt idx="1">
+                  <c:v>71</c:v>
+                </c:pt>
+                <c:pt idx="2">
+                  <c:v>71</c:v>
+                </c:pt>
+                <c:pt idx="3">
+                  <c:v>71</c:v>
+                </c:pt>
+                <c:pt idx="4">
+                  <c:v>73.78378378378379</c:v>
+                </c:pt>
+                <c:pt idx="5">
+                  <c:v>84.075949367088612</c:v>
+                </c:pt>
+              </c:numCache>
+            </c:numRef>
+          </c:val>
+          <c:smooth val="0"/>
+          <c:extLst>
+            <c:ext xmlns:c16="http://schemas.microsoft.com/office/drawing/2014/chart" uri="{C3380CC4-5D6E-409C-BE32-E72D297353CC}">
+              <c16:uniqueId val="{00000003-6FC0-45D2-A214-8171279E834B}"/>
+            </c:ext>
+          </c:extLst>
+        </c:ser>
+        <c:ser>
+          <c:idx val="4"/>
+          <c:order val="4"/>
+          <c:tx>
+            <c:strRef>
+              <c:f>'memory graphs (2)'!$E$1</c:f>
+              <c:strCache>
+                <c:ptCount val="1"/>
+                <c:pt idx="0">
+                  <c:v>provider-kubernetes</c:v>
+                </c:pt>
+              </c:strCache>
+            </c:strRef>
+          </c:tx>
+          <c:spPr>
+            <a:ln w="28575" cap="rnd">
+              <a:solidFill>
+                <a:schemeClr val="accent5"/>
+              </a:solidFill>
+              <a:round/>
+            </a:ln>
+            <a:effectLst/>
+          </c:spPr>
+          <c:marker>
+            <c:symbol val="circle"/>
+            <c:size val="5"/>
+            <c:spPr>
+              <a:solidFill>
+                <a:schemeClr val="accent5"/>
+              </a:solidFill>
+              <a:ln w="9525">
+                <a:solidFill>
+                  <a:schemeClr val="accent5"/>
+                </a:solidFill>
+              </a:ln>
+              <a:effectLst/>
+            </c:spPr>
+          </c:marker>
+          <c:cat>
+            <c:numRef>
+              <c:f>'memory graphs (2)'!$A$2:$A$7</c:f>
+              <c:numCache>
+                <c:formatCode>General</c:formatCode>
+                <c:ptCount val="6"/>
+                <c:pt idx="0">
+                  <c:v>1</c:v>
+                </c:pt>
+                <c:pt idx="1">
+                  <c:v>10</c:v>
+                </c:pt>
+                <c:pt idx="2">
+                  <c:v>50</c:v>
+                </c:pt>
+                <c:pt idx="3">
+                  <c:v>100</c:v>
+                </c:pt>
+                <c:pt idx="4">
+                  <c:v>500</c:v>
+                </c:pt>
+                <c:pt idx="5">
+                  <c:v>1000</c:v>
+                </c:pt>
+              </c:numCache>
+            </c:numRef>
+          </c:cat>
+          <c:val>
+            <c:numRef>
+              <c:f>'memory graphs (2)'!$E$2:$E$7</c:f>
+              <c:numCache>
+                <c:formatCode>General</c:formatCode>
+                <c:ptCount val="6"/>
+                <c:pt idx="0">
+                  <c:v>74</c:v>
+                </c:pt>
+                <c:pt idx="1">
+                  <c:v>74</c:v>
+                </c:pt>
+                <c:pt idx="2">
+                  <c:v>74</c:v>
+                </c:pt>
+                <c:pt idx="3">
+                  <c:v>77.272727272727266</c:v>
+                </c:pt>
+                <c:pt idx="4">
+                  <c:v>93.21621621621621</c:v>
+                </c:pt>
+                <c:pt idx="5">
+                  <c:v>114.96103896103897</c:v>
+                </c:pt>
+              </c:numCache>
+            </c:numRef>
+          </c:val>
+          <c:smooth val="0"/>
+          <c:extLst>
+            <c:ext xmlns:c16="http://schemas.microsoft.com/office/drawing/2014/chart" uri="{C3380CC4-5D6E-409C-BE32-E72D297353CC}">
+              <c16:uniqueId val="{00000004-6FC0-45D2-A214-8171279E834B}"/>
+            </c:ext>
+          </c:extLst>
+        </c:ser>
+        <c:dLbls>
+          <c:showLegendKey val="0"/>
+          <c:showVal val="0"/>
+          <c:showCatName val="0"/>
+          <c:showSerName val="0"/>
+          <c:showPercent val="0"/>
+          <c:showBubbleSize val="0"/>
+        </c:dLbls>
+        <c:marker val="1"/>
+        <c:smooth val="0"/>
+        <c:axId val="1785334751"/>
+        <c:axId val="2046661455"/>
+      </c:lineChart>
+      <c:catAx>
+        <c:axId val="1785334751"/>
+        <c:scaling>
+          <c:orientation val="minMax"/>
+        </c:scaling>
+        <c:delete val="0"/>
+        <c:axPos val="b"/>
+        <c:numFmt formatCode="General" sourceLinked="0"/>
+        <c:majorTickMark val="none"/>
+        <c:minorTickMark val="none"/>
+        <c:tickLblPos val="nextTo"/>
+        <c:spPr>
+          <a:noFill/>
+          <a:ln w="9525" cap="flat" cmpd="sng" algn="ctr">
+            <a:solidFill>
+              <a:schemeClr val="tx1">
+                <a:lumMod val="15000"/>
+                <a:lumOff val="85000"/>
+              </a:schemeClr>
+            </a:solidFill>
+            <a:round/>
+          </a:ln>
+          <a:effectLst/>
+        </c:spPr>
+        <c:txPr>
+          <a:bodyPr rot="-60000000" spcFirstLastPara="1" vertOverflow="ellipsis" vert="horz" wrap="square" anchor="ctr" anchorCtr="1"/>
+          <a:lstStyle/>
+          <a:p>
+            <a:pPr>
+              <a:defRPr sz="900" b="0" i="0" u="none" strike="noStrike" kern="1200" baseline="0">
+                <a:solidFill>
+                  <a:schemeClr val="tx1">
+                    <a:lumMod val="65000"/>
+                    <a:lumOff val="35000"/>
+                  </a:schemeClr>
+                </a:solidFill>
+                <a:latin typeface="+mn-lt"/>
+                <a:ea typeface="+mn-ea"/>
+                <a:cs typeface="+mn-cs"/>
+              </a:defRPr>
+            </a:pPr>
+            <a:endParaRPr lang="en-US"/>
+          </a:p>
+        </c:txPr>
+        <c:crossAx val="2046661455"/>
+        <c:crosses val="autoZero"/>
+        <c:auto val="1"/>
+        <c:lblAlgn val="ctr"/>
+        <c:lblOffset val="100"/>
+        <c:noMultiLvlLbl val="0"/>
+      </c:catAx>
+      <c:valAx>
+        <c:axId val="2046661455"/>
+        <c:scaling>
+          <c:orientation val="minMax"/>
+        </c:scaling>
+        <c:delete val="0"/>
+        <c:axPos val="l"/>
+        <c:majorGridlines>
+          <c:spPr>
+            <a:ln w="9525" cap="flat" cmpd="sng" algn="ctr">
+              <a:solidFill>
+                <a:schemeClr val="tx1">
+                  <a:lumMod val="15000"/>
+                  <a:lumOff val="85000"/>
+                </a:schemeClr>
+              </a:solidFill>
+              <a:round/>
+            </a:ln>
+            <a:effectLst/>
+          </c:spPr>
+        </c:majorGridlines>
+        <c:numFmt formatCode="General" sourceLinked="1"/>
+        <c:majorTickMark val="none"/>
+        <c:minorTickMark val="none"/>
+        <c:tickLblPos val="nextTo"/>
+        <c:spPr>
+          <a:noFill/>
+          <a:ln>
+            <a:noFill/>
+          </a:ln>
+          <a:effectLst/>
+        </c:spPr>
+        <c:txPr>
+          <a:bodyPr rot="-60000000" spcFirstLastPara="1" vertOverflow="ellipsis" vert="horz" wrap="square" anchor="ctr" anchorCtr="1"/>
+          <a:lstStyle/>
+          <a:p>
+            <a:pPr>
+              <a:defRPr sz="900" b="0" i="0" u="none" strike="noStrike" kern="1200" baseline="0">
+                <a:solidFill>
+                  <a:schemeClr val="tx1">
+                    <a:lumMod val="65000"/>
+                    <a:lumOff val="35000"/>
+                  </a:schemeClr>
+                </a:solidFill>
+                <a:latin typeface="+mn-lt"/>
+                <a:ea typeface="+mn-ea"/>
+                <a:cs typeface="+mn-cs"/>
+              </a:defRPr>
+            </a:pPr>
+            <a:endParaRPr lang="en-US"/>
+          </a:p>
+        </c:txPr>
+        <c:crossAx val="1785334751"/>
+        <c:crosses val="autoZero"/>
+        <c:crossBetween val="between"/>
+      </c:valAx>
+      <c:spPr>
+        <a:noFill/>
+        <a:ln>
+          <a:noFill/>
+        </a:ln>
+        <a:effectLst/>
+      </c:spPr>
+    </c:plotArea>
+    <c:legend>
+      <c:legendPos val="b"/>
+      <c:overlay val="0"/>
+      <c:spPr>
+        <a:noFill/>
+        <a:ln>
+          <a:noFill/>
+        </a:ln>
+        <a:effectLst/>
+      </c:spPr>
+      <c:txPr>
+        <a:bodyPr rot="0" spcFirstLastPara="1" vertOverflow="ellipsis" vert="horz" wrap="square" anchor="ctr" anchorCtr="1"/>
+        <a:lstStyle/>
+        <a:p>
+          <a:pPr>
+            <a:defRPr sz="900" b="0" i="0" u="none" strike="noStrike" kern="1200" baseline="0">
+              <a:solidFill>
+                <a:schemeClr val="tx1">
+                  <a:lumMod val="65000"/>
+                  <a:lumOff val="35000"/>
+                </a:schemeClr>
+              </a:solidFill>
+              <a:latin typeface="+mn-lt"/>
+              <a:ea typeface="+mn-ea"/>
+              <a:cs typeface="+mn-cs"/>
+            </a:defRPr>
+          </a:pPr>
+          <a:endParaRPr lang="en-US"/>
+        </a:p>
+      </c:txPr>
+    </c:legend>
+    <c:plotVisOnly val="1"/>
+    <c:dispBlanksAs val="gap"/>
+    <c:showDLblsOverMax val="0"/>
+    <c:extLst>
+      <c:ext xmlns:c16r3="http://schemas.microsoft.com/office/drawing/2017/03/chart" uri="{56B9EC1D-385E-4148-901F-78D8002777C0}">
+        <c16r3:dataDisplayOptions16>
+          <c16r3:dispNaAsBlank val="1"/>
+        </c16r3:dataDisplayOptions16>
+      </c:ext>
+    </c:extLst>
+  </c:chart>
+  <c:spPr>
+    <a:noFill/>
+    <a:ln>
+      <a:noFill/>
+    </a:ln>
+    <a:effectLst/>
+  </c:spPr>
+  <c:txPr>
+    <a:bodyPr/>
+    <a:lstStyle/>
+    <a:p>
+      <a:pPr>
+        <a:defRPr/>
+      </a:pPr>
+      <a:endParaRPr lang="en-US"/>
+    </a:p>
+  </c:txPr>
+  <c:externalData r:id="rId3">
+    <c:autoUpdate val="0"/>
+  </c:externalData>
+</c:chartSpace>
+</file>
+
+<file path=ppt/charts/colors1.xml><?xml version="1.0" encoding="utf-8"?>
+<cs:colorStyle xmlns:cs="http://schemas.microsoft.com/office/drawing/2012/chartStyle" xmlns:a="http://schemas.openxmlformats.org/drawingml/2006/main" meth="cycle" id="10">
+  <a:schemeClr val="accent1"/>
+  <a:schemeClr val="accent2"/>
+  <a:schemeClr val="accent3"/>
+  <a:schemeClr val="accent4"/>
+  <a:schemeClr val="accent5"/>
+  <a:schemeClr val="accent6"/>
+  <cs:variation/>
+  <cs:variation>
+    <a:lumMod val="60000"/>
+  </cs:variation>
+  <cs:variation>
+    <a:lumMod val="80000"/>
+    <a:lumOff val="20000"/>
+  </cs:variation>
+  <cs:variation>
+    <a:lumMod val="80000"/>
+  </cs:variation>
+  <cs:variation>
+    <a:lumMod val="60000"/>
+    <a:lumOff val="40000"/>
+  </cs:variation>
+  <cs:variation>
+    <a:lumMod val="50000"/>
+  </cs:variation>
+  <cs:variation>
+    <a:lumMod val="70000"/>
+    <a:lumOff val="30000"/>
+  </cs:variation>
+  <cs:variation>
+    <a:lumMod val="70000"/>
+  </cs:variation>
+  <cs:variation>
+    <a:lumMod val="50000"/>
+    <a:lumOff val="50000"/>
+  </cs:variation>
+</cs:colorStyle>
+</file>
+
+<file path=ppt/charts/colors2.xml><?xml version="1.0" encoding="utf-8"?>
+<cs:colorStyle xmlns:cs="http://schemas.microsoft.com/office/drawing/2012/chartStyle" xmlns:a="http://schemas.openxmlformats.org/drawingml/2006/main" meth="cycle" id="10">
+  <a:schemeClr val="accent1"/>
+  <a:schemeClr val="accent2"/>
+  <a:schemeClr val="accent3"/>
+  <a:schemeClr val="accent4"/>
+  <a:schemeClr val="accent5"/>
+  <a:schemeClr val="accent6"/>
+  <cs:variation/>
+  <cs:variation>
+    <a:lumMod val="60000"/>
+  </cs:variation>
+  <cs:variation>
+    <a:lumMod val="80000"/>
+    <a:lumOff val="20000"/>
+  </cs:variation>
+  <cs:variation>
+    <a:lumMod val="80000"/>
+  </cs:variation>
+  <cs:variation>
+    <a:lumMod val="60000"/>
+    <a:lumOff val="40000"/>
+  </cs:variation>
+  <cs:variation>
+    <a:lumMod val="50000"/>
+  </cs:variation>
+  <cs:variation>
+    <a:lumMod val="70000"/>
+    <a:lumOff val="30000"/>
+  </cs:variation>
+  <cs:variation>
+    <a:lumMod val="70000"/>
+  </cs:variation>
+  <cs:variation>
+    <a:lumMod val="50000"/>
+    <a:lumOff val="50000"/>
+  </cs:variation>
+</cs:colorStyle>
+</file>
+
+<file path=ppt/charts/colors3.xml><?xml version="1.0" encoding="utf-8"?>
+<cs:colorStyle xmlns:cs="http://schemas.microsoft.com/office/drawing/2012/chartStyle" xmlns:a="http://schemas.openxmlformats.org/drawingml/2006/main" meth="cycle" id="10">
+  <a:schemeClr val="accent1"/>
+  <a:schemeClr val="accent2"/>
+  <a:schemeClr val="accent3"/>
+  <a:schemeClr val="accent4"/>
+  <a:schemeClr val="accent5"/>
+  <a:schemeClr val="accent6"/>
+  <cs:variation/>
+  <cs:variation>
+    <a:lumMod val="60000"/>
+  </cs:variation>
+  <cs:variation>
+    <a:lumMod val="80000"/>
+    <a:lumOff val="20000"/>
+  </cs:variation>
+  <cs:variation>
+    <a:lumMod val="80000"/>
+  </cs:variation>
+  <cs:variation>
+    <a:lumMod val="60000"/>
+    <a:lumOff val="40000"/>
+  </cs:variation>
+  <cs:variation>
+    <a:lumMod val="50000"/>
+  </cs:variation>
+  <cs:variation>
+    <a:lumMod val="70000"/>
+    <a:lumOff val="30000"/>
+  </cs:variation>
+  <cs:variation>
+    <a:lumMod val="70000"/>
+  </cs:variation>
+  <cs:variation>
+    <a:lumMod val="50000"/>
+    <a:lumOff val="50000"/>
+  </cs:variation>
+</cs:colorStyle>
+</file>
+
+<file path=ppt/charts/colors4.xml><?xml version="1.0" encoding="utf-8"?>
+<cs:colorStyle xmlns:cs="http://schemas.microsoft.com/office/drawing/2012/chartStyle" xmlns:a="http://schemas.openxmlformats.org/drawingml/2006/main" meth="cycle" id="10">
+  <a:schemeClr val="accent1"/>
+  <a:schemeClr val="accent2"/>
+  <a:schemeClr val="accent3"/>
+  <a:schemeClr val="accent4"/>
+  <a:schemeClr val="accent5"/>
+  <a:schemeClr val="accent6"/>
+  <cs:variation/>
+  <cs:variation>
+    <a:lumMod val="60000"/>
+  </cs:variation>
+  <cs:variation>
+    <a:lumMod val="80000"/>
+    <a:lumOff val="20000"/>
+  </cs:variation>
+  <cs:variation>
+    <a:lumMod val="80000"/>
+  </cs:variation>
+  <cs:variation>
+    <a:lumMod val="60000"/>
+    <a:lumOff val="40000"/>
+  </cs:variation>
+  <cs:variation>
+    <a:lumMod val="50000"/>
+  </cs:variation>
+  <cs:variation>
+    <a:lumMod val="70000"/>
+    <a:lumOff val="30000"/>
+  </cs:variation>
+  <cs:variation>
+    <a:lumMod val="70000"/>
+  </cs:variation>
+  <cs:variation>
+    <a:lumMod val="50000"/>
+    <a:lumOff val="50000"/>
+  </cs:variation>
+</cs:colorStyle>
+</file>
+
+<file path=ppt/charts/style1.xml><?xml version="1.0" encoding="utf-8"?>
+<cs:chartStyle xmlns:cs="http://schemas.microsoft.com/office/drawing/2012/chartStyle" xmlns:a="http://schemas.openxmlformats.org/drawingml/2006/main" id="332">
+  <cs:axisTitle>
+    <cs:lnRef idx="0"/>
+    <cs:fillRef idx="0"/>
+    <cs:effectRef idx="0"/>
+    <cs:fontRef idx="minor">
+      <a:schemeClr val="tx1">
+        <a:lumMod val="65000"/>
+        <a:lumOff val="35000"/>
+      </a:schemeClr>
+    </cs:fontRef>
+    <cs:defRPr sz="1000" kern="1200"/>
+  </cs:axisTitle>
+  <cs:categoryAxis>
+    <cs:lnRef idx="0"/>
+    <cs:fillRef idx="0"/>
+    <cs:effectRef idx="0"/>
+    <cs:fontRef idx="minor">
+      <a:schemeClr val="tx1">
+        <a:lumMod val="65000"/>
+        <a:lumOff val="35000"/>
+      </a:schemeClr>
+    </cs:fontRef>
+    <cs:spPr>
+      <a:ln w="9525" cap="flat" cmpd="sng" algn="ctr">
+        <a:solidFill>
+          <a:schemeClr val="tx1">
+            <a:lumMod val="15000"/>
+            <a:lumOff val="85000"/>
+          </a:schemeClr>
+        </a:solidFill>
+        <a:round/>
+      </a:ln>
+    </cs:spPr>
+    <cs:defRPr sz="900" kern="1200"/>
+  </cs:categoryAxis>
+  <cs:chartArea mods="allowNoFillOverride allowNoLineOverride">
+    <cs:lnRef idx="0"/>
+    <cs:fillRef idx="0"/>
+    <cs:effectRef idx="0"/>
+    <cs:fontRef idx="minor">
+      <a:schemeClr val="tx1"/>
+    </cs:fontRef>
+    <cs:spPr>
+      <a:solidFill>
+        <a:schemeClr val="bg1"/>
+      </a:solidFill>
+      <a:ln w="9525" cap="flat" cmpd="sng" algn="ctr">
+        <a:solidFill>
+          <a:schemeClr val="tx1">
+            <a:lumMod val="15000"/>
+            <a:lumOff val="85000"/>
+          </a:schemeClr>
+        </a:solidFill>
+        <a:round/>
+      </a:ln>
+    </cs:spPr>
+    <cs:defRPr sz="1000" kern="1200"/>
+  </cs:chartArea>
+  <cs:dataLabel>
+    <cs:lnRef idx="0"/>
+    <cs:fillRef idx="0"/>
+    <cs:effectRef idx="0"/>
+    <cs:fontRef idx="minor">
+      <a:schemeClr val="tx1">
+        <a:lumMod val="75000"/>
+        <a:lumOff val="25000"/>
+      </a:schemeClr>
+    </cs:fontRef>
+    <cs:defRPr sz="900" kern="1200"/>
+  </cs:dataLabel>
+  <cs:dataLabelCallout>
+    <cs:lnRef idx="0"/>
+    <cs:fillRef idx="0"/>
+    <cs:effectRef idx="0"/>
+    <cs:fontRef idx="minor">
+      <a:schemeClr val="dk1">
+        <a:lumMod val="65000"/>
+        <a:lumOff val="35000"/>
+      </a:schemeClr>
+    </cs:fontRef>
+    <cs:spPr>
+      <a:solidFill>
+        <a:schemeClr val="lt1"/>
+      </a:solidFill>
+      <a:ln>
+        <a:solidFill>
+          <a:schemeClr val="dk1">
+            <a:lumMod val="25000"/>
+            <a:lumOff val="75000"/>
+          </a:schemeClr>
+        </a:solidFill>
+      </a:ln>
+    </cs:spPr>
+    <cs:defRPr sz="900" kern="1200"/>
+    <cs:bodyPr rot="0" spcFirstLastPara="1" vertOverflow="clip" horzOverflow="clip" vert="horz" wrap="square" lIns="36576" tIns="18288" rIns="36576" bIns="18288" anchor="ctr" anchorCtr="1">
+      <a:spAutoFit/>
+    </cs:bodyPr>
+  </cs:dataLabelCallout>
+  <cs:dataPoint>
+    <cs:lnRef idx="0"/>
+    <cs:fillRef idx="1">
+      <cs:styleClr val="auto"/>
+    </cs:fillRef>
+    <cs:effectRef idx="0"/>
+    <cs:fontRef idx="minor">
+      <a:schemeClr val="tx1"/>
+    </cs:fontRef>
+  </cs:dataPoint>
+  <cs:dataPoint3D>
+    <cs:lnRef idx="0"/>
+    <cs:fillRef idx="1">
+      <cs:styleClr val="auto"/>
+    </cs:fillRef>
+    <cs:effectRef idx="0"/>
+    <cs:fontRef idx="minor">
+      <a:schemeClr val="tx1"/>
+    </cs:fontRef>
+  </cs:dataPoint3D>
+  <cs:dataPointLine>
+    <cs:lnRef idx="0">
+      <cs:styleClr val="auto"/>
+    </cs:lnRef>
+    <cs:fillRef idx="1"/>
+    <cs:effectRef idx="0"/>
+    <cs:fontRef idx="minor">
+      <a:schemeClr val="tx1"/>
+    </cs:fontRef>
+    <cs:spPr>
+      <a:ln w="28575" cap="rnd">
+        <a:solidFill>
+          <a:schemeClr val="phClr"/>
+        </a:solidFill>
+        <a:round/>
+      </a:ln>
+    </cs:spPr>
+  </cs:dataPointLine>
+  <cs:dataPointMarker>
+    <cs:lnRef idx="0">
+      <cs:styleClr val="auto"/>
+    </cs:lnRef>
+    <cs:fillRef idx="1">
+      <cs:styleClr val="auto"/>
+    </cs:fillRef>
+    <cs:effectRef idx="0"/>
+    <cs:fontRef idx="minor">
+      <a:schemeClr val="tx1"/>
+    </cs:fontRef>
+    <cs:spPr>
+      <a:ln w="9525">
+        <a:solidFill>
+          <a:schemeClr val="phClr"/>
+        </a:solidFill>
+      </a:ln>
+    </cs:spPr>
+  </cs:dataPointMarker>
+  <cs:dataPointMarkerLayout symbol="circle" size="5"/>
+  <cs:dataPointWireframe>
+    <cs:lnRef idx="0">
+      <cs:styleClr val="auto"/>
+    </cs:lnRef>
+    <cs:fillRef idx="1"/>
+    <cs:effectRef idx="0"/>
+    <cs:fontRef idx="minor">
+      <a:schemeClr val="tx1"/>
+    </cs:fontRef>
+    <cs:spPr>
+      <a:ln w="9525" cap="rnd">
+        <a:solidFill>
+          <a:schemeClr val="phClr"/>
+        </a:solidFill>
+        <a:round/>
+      </a:ln>
+    </cs:spPr>
+  </cs:dataPointWireframe>
+  <cs:dataTable>
+    <cs:lnRef idx="0"/>
+    <cs:fillRef idx="0"/>
+    <cs:effectRef idx="0"/>
+    <cs:fontRef idx="minor">
+      <a:schemeClr val="tx1">
+        <a:lumMod val="65000"/>
+        <a:lumOff val="35000"/>
+      </a:schemeClr>
+    </cs:fontRef>
+    <cs:spPr>
+      <a:noFill/>
+      <a:ln w="9525" cap="flat" cmpd="sng" algn="ctr">
+        <a:solidFill>
+          <a:schemeClr val="tx1">
+            <a:lumMod val="15000"/>
+            <a:lumOff val="85000"/>
+          </a:schemeClr>
+        </a:solidFill>
+        <a:round/>
+      </a:ln>
+    </cs:spPr>
+    <cs:defRPr sz="900" kern="1200"/>
+  </cs:dataTable>
+  <cs:downBar>
+    <cs:lnRef idx="0"/>
+    <cs:fillRef idx="0"/>
+    <cs:effectRef idx="0"/>
+    <cs:fontRef idx="minor">
+      <a:schemeClr val="dk1"/>
+    </cs:fontRef>
+    <cs:spPr>
+      <a:solidFill>
+        <a:schemeClr val="dk1">
+          <a:lumMod val="65000"/>
+          <a:lumOff val="35000"/>
+        </a:schemeClr>
+      </a:solidFill>
+      <a:ln w="9525">
+        <a:solidFill>
+          <a:schemeClr val="tx1">
+            <a:lumMod val="65000"/>
+            <a:lumOff val="35000"/>
+          </a:schemeClr>
+        </a:solidFill>
+      </a:ln>
+    </cs:spPr>
+  </cs:downBar>
+  <cs:dropLine>
+    <cs:lnRef idx="0"/>
+    <cs:fillRef idx="0"/>
+    <cs:effectRef idx="0"/>
+    <cs:fontRef idx="minor">
+      <a:schemeClr val="tx1"/>
+    </cs:fontRef>
+    <cs:spPr>
+      <a:ln w="9525" cap="flat" cmpd="sng" algn="ctr">
+        <a:solidFill>
+          <a:schemeClr val="tx1">
+            <a:lumMod val="35000"/>
+            <a:lumOff val="65000"/>
+          </a:schemeClr>
+        </a:solidFill>
+        <a:round/>
+      </a:ln>
+    </cs:spPr>
+  </cs:dropLine>
+  <cs:errorBar>
+    <cs:lnRef idx="0"/>
+    <cs:fillRef idx="0"/>
+    <cs:effectRef idx="0"/>
+    <cs:fontRef idx="minor">
+      <a:schemeClr val="tx1"/>
+    </cs:fontRef>
+    <cs:spPr>
+      <a:ln w="9525" cap="flat" cmpd="sng" algn="ctr">
+        <a:solidFill>
+          <a:schemeClr val="tx1">
+            <a:lumMod val="65000"/>
+            <a:lumOff val="35000"/>
+          </a:schemeClr>
+        </a:solidFill>
+        <a:round/>
+      </a:ln>
+    </cs:spPr>
+  </cs:errorBar>
+  <cs:floor>
+    <cs:lnRef idx="0"/>
+    <cs:fillRef idx="0"/>
+    <cs:effectRef idx="0"/>
+    <cs:fontRef idx="minor">
+      <a:schemeClr val="tx1"/>
+    </cs:fontRef>
+    <cs:spPr>
+      <a:noFill/>
+      <a:ln>
+        <a:noFill/>
+      </a:ln>
+    </cs:spPr>
+  </cs:floor>
+  <cs:gridlineMajor>
+    <cs:lnRef idx="0"/>
+    <cs:fillRef idx="0"/>
+    <cs:effectRef idx="0"/>
+    <cs:fontRef idx="minor">
+      <a:schemeClr val="tx1"/>
+    </cs:fontRef>
+    <cs:spPr>
+      <a:ln w="9525" cap="flat" cmpd="sng" algn="ctr">
+        <a:solidFill>
+          <a:schemeClr val="tx1">
+            <a:lumMod val="15000"/>
+            <a:lumOff val="85000"/>
+          </a:schemeClr>
+        </a:solidFill>
+        <a:round/>
+      </a:ln>
+    </cs:spPr>
+  </cs:gridlineMajor>
+  <cs:gridlineMinor>
+    <cs:lnRef idx="0"/>
+    <cs:fillRef idx="0"/>
+    <cs:effectRef idx="0"/>
+    <cs:fontRef idx="minor">
+      <a:schemeClr val="tx1"/>
+    </cs:fontRef>
+    <cs:spPr>
+      <a:ln w="9525" cap="flat" cmpd="sng" algn="ctr">
+        <a:solidFill>
+          <a:schemeClr val="tx1">
+            <a:lumMod val="5000"/>
+            <a:lumOff val="95000"/>
+          </a:schemeClr>
+        </a:solidFill>
+        <a:round/>
+      </a:ln>
+    </cs:spPr>
+  </cs:gridlineMinor>
+  <cs:hiLoLine>
+    <cs:lnRef idx="0"/>
+    <cs:fillRef idx="0"/>
+    <cs:effectRef idx="0"/>
+    <cs:fontRef idx="minor">
+      <a:schemeClr val="tx1"/>
+    </cs:fontRef>
+    <cs:spPr>
+      <a:ln w="9525" cap="flat" cmpd="sng" algn="ctr">
+        <a:solidFill>
+          <a:schemeClr val="tx1">
+            <a:lumMod val="75000"/>
+            <a:lumOff val="25000"/>
+          </a:schemeClr>
+        </a:solidFill>
+        <a:round/>
+      </a:ln>
+    </cs:spPr>
+  </cs:hiLoLine>
+  <cs:leaderLine>
+    <cs:lnRef idx="0"/>
+    <cs:fillRef idx="0"/>
+    <cs:effectRef idx="0"/>
+    <cs:fontRef idx="minor">
+      <a:schemeClr val="tx1"/>
+    </cs:fontRef>
+    <cs:spPr>
+      <a:ln w="9525" cap="flat" cmpd="sng" algn="ctr">
+        <a:solidFill>
+          <a:schemeClr val="tx1">
+            <a:lumMod val="35000"/>
+            <a:lumOff val="65000"/>
+          </a:schemeClr>
+        </a:solidFill>
+        <a:round/>
+      </a:ln>
+    </cs:spPr>
+  </cs:leaderLine>
+  <cs:legend>
+    <cs:lnRef idx="0"/>
+    <cs:fillRef idx="0"/>
+    <cs:effectRef idx="0"/>
+    <cs:fontRef idx="minor">
+      <a:schemeClr val="tx1">
+        <a:lumMod val="65000"/>
+        <a:lumOff val="35000"/>
+      </a:schemeClr>
+    </cs:fontRef>
+    <cs:defRPr sz="900" kern="1200"/>
+  </cs:legend>
+  <cs:plotArea mods="allowNoFillOverride allowNoLineOverride">
+    <cs:lnRef idx="0"/>
+    <cs:fillRef idx="0"/>
+    <cs:effectRef idx="0"/>
+    <cs:fontRef idx="minor">
+      <a:schemeClr val="tx1"/>
+    </cs:fontRef>
+  </cs:plotArea>
+  <cs:plotArea3D mods="allowNoFillOverride allowNoLineOverride">
+    <cs:lnRef idx="0"/>
+    <cs:fillRef idx="0"/>
+    <cs:effectRef idx="0"/>
+    <cs:fontRef idx="minor">
+      <a:schemeClr val="tx1"/>
+    </cs:fontRef>
+  </cs:plotArea3D>
+  <cs:seriesAxis>
+    <cs:lnRef idx="0"/>
+    <cs:fillRef idx="0"/>
+    <cs:effectRef idx="0"/>
+    <cs:fontRef idx="minor">
+      <a:schemeClr val="tx1">
+        <a:lumMod val="65000"/>
+        <a:lumOff val="35000"/>
+      </a:schemeClr>
+    </cs:fontRef>
+    <cs:defRPr sz="900" kern="1200"/>
+  </cs:seriesAxis>
+  <cs:seriesLine>
+    <cs:lnRef idx="0"/>
+    <cs:fillRef idx="0"/>
+    <cs:effectRef idx="0"/>
+    <cs:fontRef idx="minor">
+      <a:schemeClr val="tx1"/>
+    </cs:fontRef>
+    <cs:spPr>
+      <a:ln w="9525" cap="flat" cmpd="sng" algn="ctr">
+        <a:solidFill>
+          <a:schemeClr val="tx1">
+            <a:lumMod val="35000"/>
+            <a:lumOff val="65000"/>
+          </a:schemeClr>
+        </a:solidFill>
+        <a:round/>
+      </a:ln>
+    </cs:spPr>
+  </cs:seriesLine>
+  <cs:title>
+    <cs:lnRef idx="0"/>
+    <cs:fillRef idx="0"/>
+    <cs:effectRef idx="0"/>
+    <cs:fontRef idx="minor">
+      <a:schemeClr val="tx1">
+        <a:lumMod val="65000"/>
+        <a:lumOff val="35000"/>
+      </a:schemeClr>
+    </cs:fontRef>
+    <cs:defRPr sz="1400" b="0" kern="1200" spc="0" baseline="0"/>
+  </cs:title>
+  <cs:trendline>
+    <cs:lnRef idx="0">
+      <cs:styleClr val="auto"/>
+    </cs:lnRef>
+    <cs:fillRef idx="0"/>
+    <cs:effectRef idx="0"/>
+    <cs:fontRef idx="minor">
+      <a:schemeClr val="tx1"/>
+    </cs:fontRef>
+    <cs:spPr>
+      <a:ln w="19050" cap="rnd">
+        <a:solidFill>
+          <a:schemeClr val="phClr"/>
+        </a:solidFill>
+        <a:prstDash val="sysDot"/>
+      </a:ln>
+    </cs:spPr>
+  </cs:trendline>
+  <cs:trendlineLabel>
+    <cs:lnRef idx="0"/>
+    <cs:fillRef idx="0"/>
+    <cs:effectRef idx="0"/>
+    <cs:fontRef idx="minor">
+      <a:schemeClr val="tx1">
+        <a:lumMod val="65000"/>
+        <a:lumOff val="35000"/>
+      </a:schemeClr>
+    </cs:fontRef>
+    <cs:defRPr sz="900" kern="1200"/>
+  </cs:trendlineLabel>
+  <cs:upBar>
+    <cs:lnRef idx="0"/>
+    <cs:fillRef idx="0"/>
+    <cs:effectRef idx="0"/>
+    <cs:fontRef idx="minor">
+      <a:schemeClr val="dk1"/>
+    </cs:fontRef>
+    <cs:spPr>
+      <a:solidFill>
+        <a:schemeClr val="lt1"/>
+      </a:solidFill>
+      <a:ln w="9525">
+        <a:solidFill>
+          <a:schemeClr val="tx1">
+            <a:lumMod val="15000"/>
+            <a:lumOff val="85000"/>
+          </a:schemeClr>
+        </a:solidFill>
+      </a:ln>
+    </cs:spPr>
+  </cs:upBar>
+  <cs:valueAxis>
+    <cs:lnRef idx="0"/>
+    <cs:fillRef idx="0"/>
+    <cs:effectRef idx="0"/>
+    <cs:fontRef idx="minor">
+      <a:schemeClr val="tx1">
+        <a:lumMod val="65000"/>
+        <a:lumOff val="35000"/>
+      </a:schemeClr>
+    </cs:fontRef>
+    <cs:defRPr sz="900" kern="1200"/>
+  </cs:valueAxis>
+  <cs:wall>
+    <cs:lnRef idx="0"/>
+    <cs:fillRef idx="0"/>
+    <cs:effectRef idx="0"/>
+    <cs:fontRef idx="minor">
+      <a:schemeClr val="tx1"/>
+    </cs:fontRef>
+    <cs:spPr>
+      <a:noFill/>
+      <a:ln>
+        <a:noFill/>
+      </a:ln>
+    </cs:spPr>
+  </cs:wall>
+</cs:chartStyle>
+</file>
+
+<file path=ppt/charts/style2.xml><?xml version="1.0" encoding="utf-8"?>
+<cs:chartStyle xmlns:cs="http://schemas.microsoft.com/office/drawing/2012/chartStyle" xmlns:a="http://schemas.openxmlformats.org/drawingml/2006/main" id="332">
+  <cs:axisTitle>
+    <cs:lnRef idx="0"/>
+    <cs:fillRef idx="0"/>
+    <cs:effectRef idx="0"/>
+    <cs:fontRef idx="minor">
+      <a:schemeClr val="tx1">
+        <a:lumMod val="65000"/>
+        <a:lumOff val="35000"/>
+      </a:schemeClr>
+    </cs:fontRef>
+    <cs:defRPr sz="1000" kern="1200"/>
+  </cs:axisTitle>
+  <cs:categoryAxis>
+    <cs:lnRef idx="0"/>
+    <cs:fillRef idx="0"/>
+    <cs:effectRef idx="0"/>
+    <cs:fontRef idx="minor">
+      <a:schemeClr val="tx1">
+        <a:lumMod val="65000"/>
+        <a:lumOff val="35000"/>
+      </a:schemeClr>
+    </cs:fontRef>
+    <cs:spPr>
+      <a:ln w="9525" cap="flat" cmpd="sng" algn="ctr">
+        <a:solidFill>
+          <a:schemeClr val="tx1">
+            <a:lumMod val="15000"/>
+            <a:lumOff val="85000"/>
+          </a:schemeClr>
+        </a:solidFill>
+        <a:round/>
+      </a:ln>
+    </cs:spPr>
+    <cs:defRPr sz="900" kern="1200"/>
+  </cs:categoryAxis>
+  <cs:chartArea mods="allowNoFillOverride allowNoLineOverride">
+    <cs:lnRef idx="0"/>
+    <cs:fillRef idx="0"/>
+    <cs:effectRef idx="0"/>
+    <cs:fontRef idx="minor">
+      <a:schemeClr val="tx1"/>
+    </cs:fontRef>
+    <cs:spPr>
+      <a:solidFill>
+        <a:schemeClr val="bg1"/>
+      </a:solidFill>
+      <a:ln w="9525" cap="flat" cmpd="sng" algn="ctr">
+        <a:solidFill>
+          <a:schemeClr val="tx1">
+            <a:lumMod val="15000"/>
+            <a:lumOff val="85000"/>
+          </a:schemeClr>
+        </a:solidFill>
+        <a:round/>
+      </a:ln>
+    </cs:spPr>
+    <cs:defRPr sz="1000" kern="1200"/>
+  </cs:chartArea>
+  <cs:dataLabel>
+    <cs:lnRef idx="0"/>
+    <cs:fillRef idx="0"/>
+    <cs:effectRef idx="0"/>
+    <cs:fontRef idx="minor">
+      <a:schemeClr val="tx1">
+        <a:lumMod val="75000"/>
+        <a:lumOff val="25000"/>
+      </a:schemeClr>
+    </cs:fontRef>
+    <cs:defRPr sz="900" kern="1200"/>
+  </cs:dataLabel>
+  <cs:dataLabelCallout>
+    <cs:lnRef idx="0"/>
+    <cs:fillRef idx="0"/>
+    <cs:effectRef idx="0"/>
+    <cs:fontRef idx="minor">
+      <a:schemeClr val="dk1">
+        <a:lumMod val="65000"/>
+        <a:lumOff val="35000"/>
+      </a:schemeClr>
+    </cs:fontRef>
+    <cs:spPr>
+      <a:solidFill>
+        <a:schemeClr val="lt1"/>
+      </a:solidFill>
+      <a:ln>
+        <a:solidFill>
+          <a:schemeClr val="dk1">
+            <a:lumMod val="25000"/>
+            <a:lumOff val="75000"/>
+          </a:schemeClr>
+        </a:solidFill>
+      </a:ln>
+    </cs:spPr>
+    <cs:defRPr sz="900" kern="1200"/>
+    <cs:bodyPr rot="0" spcFirstLastPara="1" vertOverflow="clip" horzOverflow="clip" vert="horz" wrap="square" lIns="36576" tIns="18288" rIns="36576" bIns="18288" anchor="ctr" anchorCtr="1">
+      <a:spAutoFit/>
+    </cs:bodyPr>
+  </cs:dataLabelCallout>
+  <cs:dataPoint>
+    <cs:lnRef idx="0"/>
+    <cs:fillRef idx="1">
+      <cs:styleClr val="auto"/>
+    </cs:fillRef>
+    <cs:effectRef idx="0"/>
+    <cs:fontRef idx="minor">
+      <a:schemeClr val="tx1"/>
+    </cs:fontRef>
+  </cs:dataPoint>
+  <cs:dataPoint3D>
+    <cs:lnRef idx="0"/>
+    <cs:fillRef idx="1">
+      <cs:styleClr val="auto"/>
+    </cs:fillRef>
+    <cs:effectRef idx="0"/>
+    <cs:fontRef idx="minor">
+      <a:schemeClr val="tx1"/>
+    </cs:fontRef>
+  </cs:dataPoint3D>
+  <cs:dataPointLine>
+    <cs:lnRef idx="0">
+      <cs:styleClr val="auto"/>
+    </cs:lnRef>
+    <cs:fillRef idx="1"/>
+    <cs:effectRef idx="0"/>
+    <cs:fontRef idx="minor">
+      <a:schemeClr val="tx1"/>
+    </cs:fontRef>
+    <cs:spPr>
+      <a:ln w="28575" cap="rnd">
+        <a:solidFill>
+          <a:schemeClr val="phClr"/>
+        </a:solidFill>
+        <a:round/>
+      </a:ln>
+    </cs:spPr>
+  </cs:dataPointLine>
+  <cs:dataPointMarker>
+    <cs:lnRef idx="0">
+      <cs:styleClr val="auto"/>
+    </cs:lnRef>
+    <cs:fillRef idx="1">
+      <cs:styleClr val="auto"/>
+    </cs:fillRef>
+    <cs:effectRef idx="0"/>
+    <cs:fontRef idx="minor">
+      <a:schemeClr val="tx1"/>
+    </cs:fontRef>
+    <cs:spPr>
+      <a:ln w="9525">
+        <a:solidFill>
+          <a:schemeClr val="phClr"/>
+        </a:solidFill>
+      </a:ln>
+    </cs:spPr>
+  </cs:dataPointMarker>
+  <cs:dataPointMarkerLayout symbol="circle" size="5"/>
+  <cs:dataPointWireframe>
+    <cs:lnRef idx="0">
+      <cs:styleClr val="auto"/>
+    </cs:lnRef>
+    <cs:fillRef idx="1"/>
+    <cs:effectRef idx="0"/>
+    <cs:fontRef idx="minor">
+      <a:schemeClr val="tx1"/>
+    </cs:fontRef>
+    <cs:spPr>
+      <a:ln w="9525" cap="rnd">
+        <a:solidFill>
+          <a:schemeClr val="phClr"/>
+        </a:solidFill>
+        <a:round/>
+      </a:ln>
+    </cs:spPr>
+  </cs:dataPointWireframe>
+  <cs:dataTable>
+    <cs:lnRef idx="0"/>
+    <cs:fillRef idx="0"/>
+    <cs:effectRef idx="0"/>
+    <cs:fontRef idx="minor">
+      <a:schemeClr val="tx1">
+        <a:lumMod val="65000"/>
+        <a:lumOff val="35000"/>
+      </a:schemeClr>
+    </cs:fontRef>
+    <cs:spPr>
+      <a:noFill/>
+      <a:ln w="9525" cap="flat" cmpd="sng" algn="ctr">
+        <a:solidFill>
+          <a:schemeClr val="tx1">
+            <a:lumMod val="15000"/>
+            <a:lumOff val="85000"/>
+          </a:schemeClr>
+        </a:solidFill>
+        <a:round/>
+      </a:ln>
+    </cs:spPr>
+    <cs:defRPr sz="900" kern="1200"/>
+  </cs:dataTable>
+  <cs:downBar>
+    <cs:lnRef idx="0"/>
+    <cs:fillRef idx="0"/>
+    <cs:effectRef idx="0"/>
+    <cs:fontRef idx="minor">
+      <a:schemeClr val="dk1"/>
+    </cs:fontRef>
+    <cs:spPr>
+      <a:solidFill>
+        <a:schemeClr val="dk1">
+          <a:lumMod val="65000"/>
+          <a:lumOff val="35000"/>
+        </a:schemeClr>
+      </a:solidFill>
+      <a:ln w="9525">
+        <a:solidFill>
+          <a:schemeClr val="tx1">
+            <a:lumMod val="65000"/>
+            <a:lumOff val="35000"/>
+          </a:schemeClr>
+        </a:solidFill>
+      </a:ln>
+    </cs:spPr>
+  </cs:downBar>
+  <cs:dropLine>
+    <cs:lnRef idx="0"/>
+    <cs:fillRef idx="0"/>
+    <cs:effectRef idx="0"/>
+    <cs:fontRef idx="minor">
+      <a:schemeClr val="tx1"/>
+    </cs:fontRef>
+    <cs:spPr>
+      <a:ln w="9525" cap="flat" cmpd="sng" algn="ctr">
+        <a:solidFill>
+          <a:schemeClr val="tx1">
+            <a:lumMod val="35000"/>
+            <a:lumOff val="65000"/>
+          </a:schemeClr>
+        </a:solidFill>
+        <a:round/>
+      </a:ln>
+    </cs:spPr>
+  </cs:dropLine>
+  <cs:errorBar>
+    <cs:lnRef idx="0"/>
+    <cs:fillRef idx="0"/>
+    <cs:effectRef idx="0"/>
+    <cs:fontRef idx="minor">
+      <a:schemeClr val="tx1"/>
+    </cs:fontRef>
+    <cs:spPr>
+      <a:ln w="9525" cap="flat" cmpd="sng" algn="ctr">
+        <a:solidFill>
+          <a:schemeClr val="tx1">
+            <a:lumMod val="65000"/>
+            <a:lumOff val="35000"/>
+          </a:schemeClr>
+        </a:solidFill>
+        <a:round/>
+      </a:ln>
+    </cs:spPr>
+  </cs:errorBar>
+  <cs:floor>
+    <cs:lnRef idx="0"/>
+    <cs:fillRef idx="0"/>
+    <cs:effectRef idx="0"/>
+    <cs:fontRef idx="minor">
+      <a:schemeClr val="tx1"/>
+    </cs:fontRef>
+    <cs:spPr>
+      <a:noFill/>
+      <a:ln>
+        <a:noFill/>
+      </a:ln>
+    </cs:spPr>
+  </cs:floor>
+  <cs:gridlineMajor>
+    <cs:lnRef idx="0"/>
+    <cs:fillRef idx="0"/>
+    <cs:effectRef idx="0"/>
+    <cs:fontRef idx="minor">
+      <a:schemeClr val="tx1"/>
+    </cs:fontRef>
+    <cs:spPr>
+      <a:ln w="9525" cap="flat" cmpd="sng" algn="ctr">
+        <a:solidFill>
+          <a:schemeClr val="tx1">
+            <a:lumMod val="15000"/>
+            <a:lumOff val="85000"/>
+          </a:schemeClr>
+        </a:solidFill>
+        <a:round/>
+      </a:ln>
+    </cs:spPr>
+  </cs:gridlineMajor>
+  <cs:gridlineMinor>
+    <cs:lnRef idx="0"/>
+    <cs:fillRef idx="0"/>
+    <cs:effectRef idx="0"/>
+    <cs:fontRef idx="minor">
+      <a:schemeClr val="tx1"/>
+    </cs:fontRef>
+    <cs:spPr>
+      <a:ln w="9525" cap="flat" cmpd="sng" algn="ctr">
+        <a:solidFill>
+          <a:schemeClr val="tx1">
+            <a:lumMod val="5000"/>
+            <a:lumOff val="95000"/>
+          </a:schemeClr>
+        </a:solidFill>
+        <a:round/>
+      </a:ln>
+    </cs:spPr>
+  </cs:gridlineMinor>
+  <cs:hiLoLine>
+    <cs:lnRef idx="0"/>
+    <cs:fillRef idx="0"/>
+    <cs:effectRef idx="0"/>
+    <cs:fontRef idx="minor">
+      <a:schemeClr val="tx1"/>
+    </cs:fontRef>
+    <cs:spPr>
+      <a:ln w="9525" cap="flat" cmpd="sng" algn="ctr">
+        <a:solidFill>
+          <a:schemeClr val="tx1">
+            <a:lumMod val="75000"/>
+            <a:lumOff val="25000"/>
+          </a:schemeClr>
+        </a:solidFill>
+        <a:round/>
+      </a:ln>
+    </cs:spPr>
+  </cs:hiLoLine>
+  <cs:leaderLine>
+    <cs:lnRef idx="0"/>
+    <cs:fillRef idx="0"/>
+    <cs:effectRef idx="0"/>
+    <cs:fontRef idx="minor">
+      <a:schemeClr val="tx1"/>
+    </cs:fontRef>
+    <cs:spPr>
+      <a:ln w="9525" cap="flat" cmpd="sng" algn="ctr">
+        <a:solidFill>
+          <a:schemeClr val="tx1">
+            <a:lumMod val="35000"/>
+            <a:lumOff val="65000"/>
+          </a:schemeClr>
+        </a:solidFill>
+        <a:round/>
+      </a:ln>
+    </cs:spPr>
+  </cs:leaderLine>
+  <cs:legend>
+    <cs:lnRef idx="0"/>
+    <cs:fillRef idx="0"/>
+    <cs:effectRef idx="0"/>
+    <cs:fontRef idx="minor">
+      <a:schemeClr val="tx1">
+        <a:lumMod val="65000"/>
+        <a:lumOff val="35000"/>
+      </a:schemeClr>
+    </cs:fontRef>
+    <cs:defRPr sz="900" kern="1200"/>
+  </cs:legend>
+  <cs:plotArea mods="allowNoFillOverride allowNoLineOverride">
+    <cs:lnRef idx="0"/>
+    <cs:fillRef idx="0"/>
+    <cs:effectRef idx="0"/>
+    <cs:fontRef idx="minor">
+      <a:schemeClr val="tx1"/>
+    </cs:fontRef>
+  </cs:plotArea>
+  <cs:plotArea3D mods="allowNoFillOverride allowNoLineOverride">
+    <cs:lnRef idx="0"/>
+    <cs:fillRef idx="0"/>
+    <cs:effectRef idx="0"/>
+    <cs:fontRef idx="minor">
+      <a:schemeClr val="tx1"/>
+    </cs:fontRef>
+  </cs:plotArea3D>
+  <cs:seriesAxis>
+    <cs:lnRef idx="0"/>
+    <cs:fillRef idx="0"/>
+    <cs:effectRef idx="0"/>
+    <cs:fontRef idx="minor">
+      <a:schemeClr val="tx1">
+        <a:lumMod val="65000"/>
+        <a:lumOff val="35000"/>
+      </a:schemeClr>
+    </cs:fontRef>
+    <cs:defRPr sz="900" kern="1200"/>
+  </cs:seriesAxis>
+  <cs:seriesLine>
+    <cs:lnRef idx="0"/>
+    <cs:fillRef idx="0"/>
+    <cs:effectRef idx="0"/>
+    <cs:fontRef idx="minor">
+      <a:schemeClr val="tx1"/>
+    </cs:fontRef>
+    <cs:spPr>
+      <a:ln w="9525" cap="flat" cmpd="sng" algn="ctr">
+        <a:solidFill>
+          <a:schemeClr val="tx1">
+            <a:lumMod val="35000"/>
+            <a:lumOff val="65000"/>
+          </a:schemeClr>
+        </a:solidFill>
+        <a:round/>
+      </a:ln>
+    </cs:spPr>
+  </cs:seriesLine>
+  <cs:title>
+    <cs:lnRef idx="0"/>
+    <cs:fillRef idx="0"/>
+    <cs:effectRef idx="0"/>
+    <cs:fontRef idx="minor">
+      <a:schemeClr val="tx1">
+        <a:lumMod val="65000"/>
+        <a:lumOff val="35000"/>
+      </a:schemeClr>
+    </cs:fontRef>
+    <cs:defRPr sz="1400" b="0" kern="1200" spc="0" baseline="0"/>
+  </cs:title>
+  <cs:trendline>
+    <cs:lnRef idx="0">
+      <cs:styleClr val="auto"/>
+    </cs:lnRef>
+    <cs:fillRef idx="0"/>
+    <cs:effectRef idx="0"/>
+    <cs:fontRef idx="minor">
+      <a:schemeClr val="tx1"/>
+    </cs:fontRef>
+    <cs:spPr>
+      <a:ln w="19050" cap="rnd">
+        <a:solidFill>
+          <a:schemeClr val="phClr"/>
+        </a:solidFill>
+        <a:prstDash val="sysDot"/>
+      </a:ln>
+    </cs:spPr>
+  </cs:trendline>
+  <cs:trendlineLabel>
+    <cs:lnRef idx="0"/>
+    <cs:fillRef idx="0"/>
+    <cs:effectRef idx="0"/>
+    <cs:fontRef idx="minor">
+      <a:schemeClr val="tx1">
+        <a:lumMod val="65000"/>
+        <a:lumOff val="35000"/>
+      </a:schemeClr>
+    </cs:fontRef>
+    <cs:defRPr sz="900" kern="1200"/>
+  </cs:trendlineLabel>
+  <cs:upBar>
+    <cs:lnRef idx="0"/>
+    <cs:fillRef idx="0"/>
+    <cs:effectRef idx="0"/>
+    <cs:fontRef idx="minor">
+      <a:schemeClr val="dk1"/>
+    </cs:fontRef>
+    <cs:spPr>
+      <a:solidFill>
+        <a:schemeClr val="lt1"/>
+      </a:solidFill>
+      <a:ln w="9525">
+        <a:solidFill>
+          <a:schemeClr val="tx1">
+            <a:lumMod val="15000"/>
+            <a:lumOff val="85000"/>
+          </a:schemeClr>
+        </a:solidFill>
+      </a:ln>
+    </cs:spPr>
+  </cs:upBar>
+  <cs:valueAxis>
+    <cs:lnRef idx="0"/>
+    <cs:fillRef idx="0"/>
+    <cs:effectRef idx="0"/>
+    <cs:fontRef idx="minor">
+      <a:schemeClr val="tx1">
+        <a:lumMod val="65000"/>
+        <a:lumOff val="35000"/>
+      </a:schemeClr>
+    </cs:fontRef>
+    <cs:defRPr sz="900" kern="1200"/>
+  </cs:valueAxis>
+  <cs:wall>
+    <cs:lnRef idx="0"/>
+    <cs:fillRef idx="0"/>
+    <cs:effectRef idx="0"/>
+    <cs:fontRef idx="minor">
+      <a:schemeClr val="tx1"/>
+    </cs:fontRef>
+    <cs:spPr>
+      <a:noFill/>
+      <a:ln>
+        <a:noFill/>
+      </a:ln>
+    </cs:spPr>
+  </cs:wall>
+</cs:chartStyle>
+</file>
+
+<file path=ppt/charts/style3.xml><?xml version="1.0" encoding="utf-8"?>
+<cs:chartStyle xmlns:cs="http://schemas.microsoft.com/office/drawing/2012/chartStyle" xmlns:a="http://schemas.openxmlformats.org/drawingml/2006/main" id="332">
+  <cs:axisTitle>
+    <cs:lnRef idx="0"/>
+    <cs:fillRef idx="0"/>
+    <cs:effectRef idx="0"/>
+    <cs:fontRef idx="minor">
+      <a:schemeClr val="tx1">
+        <a:lumMod val="65000"/>
+        <a:lumOff val="35000"/>
+      </a:schemeClr>
+    </cs:fontRef>
+    <cs:defRPr sz="1000" kern="1200"/>
+  </cs:axisTitle>
+  <cs:categoryAxis>
+    <cs:lnRef idx="0"/>
+    <cs:fillRef idx="0"/>
+    <cs:effectRef idx="0"/>
+    <cs:fontRef idx="minor">
+      <a:schemeClr val="tx1">
+        <a:lumMod val="65000"/>
+        <a:lumOff val="35000"/>
+      </a:schemeClr>
+    </cs:fontRef>
+    <cs:spPr>
+      <a:ln w="9525" cap="flat" cmpd="sng" algn="ctr">
+        <a:solidFill>
+          <a:schemeClr val="tx1">
+            <a:lumMod val="15000"/>
+            <a:lumOff val="85000"/>
+          </a:schemeClr>
+        </a:solidFill>
+        <a:round/>
+      </a:ln>
+    </cs:spPr>
+    <cs:defRPr sz="900" kern="1200"/>
+  </cs:categoryAxis>
+  <cs:chartArea mods="allowNoFillOverride allowNoLineOverride">
+    <cs:lnRef idx="0"/>
+    <cs:fillRef idx="0"/>
+    <cs:effectRef idx="0"/>
+    <cs:fontRef idx="minor">
+      <a:schemeClr val="tx1"/>
+    </cs:fontRef>
+    <cs:spPr>
+      <a:solidFill>
+        <a:schemeClr val="bg1"/>
+      </a:solidFill>
+      <a:ln w="9525" cap="flat" cmpd="sng" algn="ctr">
+        <a:solidFill>
+          <a:schemeClr val="tx1">
+            <a:lumMod val="15000"/>
+            <a:lumOff val="85000"/>
+          </a:schemeClr>
+        </a:solidFill>
+        <a:round/>
+      </a:ln>
+    </cs:spPr>
+    <cs:defRPr sz="1000" kern="1200"/>
+  </cs:chartArea>
+  <cs:dataLabel>
+    <cs:lnRef idx="0"/>
+    <cs:fillRef idx="0"/>
+    <cs:effectRef idx="0"/>
+    <cs:fontRef idx="minor">
+      <a:schemeClr val="tx1">
+        <a:lumMod val="75000"/>
+        <a:lumOff val="25000"/>
+      </a:schemeClr>
+    </cs:fontRef>
+    <cs:defRPr sz="900" kern="1200"/>
+  </cs:dataLabel>
+  <cs:dataLabelCallout>
+    <cs:lnRef idx="0"/>
+    <cs:fillRef idx="0"/>
+    <cs:effectRef idx="0"/>
+    <cs:fontRef idx="minor">
+      <a:schemeClr val="dk1">
+        <a:lumMod val="65000"/>
+        <a:lumOff val="35000"/>
+      </a:schemeClr>
+    </cs:fontRef>
+    <cs:spPr>
+      <a:solidFill>
+        <a:schemeClr val="lt1"/>
+      </a:solidFill>
+      <a:ln>
+        <a:solidFill>
+          <a:schemeClr val="dk1">
+            <a:lumMod val="25000"/>
+            <a:lumOff val="75000"/>
+          </a:schemeClr>
+        </a:solidFill>
+      </a:ln>
+    </cs:spPr>
+    <cs:defRPr sz="900" kern="1200"/>
+    <cs:bodyPr rot="0" spcFirstLastPara="1" vertOverflow="clip" horzOverflow="clip" vert="horz" wrap="square" lIns="36576" tIns="18288" rIns="36576" bIns="18288" anchor="ctr" anchorCtr="1">
+      <a:spAutoFit/>
+    </cs:bodyPr>
+  </cs:dataLabelCallout>
+  <cs:dataPoint>
+    <cs:lnRef idx="0"/>
+    <cs:fillRef idx="1">
+      <cs:styleClr val="auto"/>
+    </cs:fillRef>
+    <cs:effectRef idx="0"/>
+    <cs:fontRef idx="minor">
+      <a:schemeClr val="tx1"/>
+    </cs:fontRef>
+  </cs:dataPoint>
+  <cs:dataPoint3D>
+    <cs:lnRef idx="0"/>
+    <cs:fillRef idx="1">
+      <cs:styleClr val="auto"/>
+    </cs:fillRef>
+    <cs:effectRef idx="0"/>
+    <cs:fontRef idx="minor">
+      <a:schemeClr val="tx1"/>
+    </cs:fontRef>
+  </cs:dataPoint3D>
+  <cs:dataPointLine>
+    <cs:lnRef idx="0">
+      <cs:styleClr val="auto"/>
+    </cs:lnRef>
+    <cs:fillRef idx="1"/>
+    <cs:effectRef idx="0"/>
+    <cs:fontRef idx="minor">
+      <a:schemeClr val="tx1"/>
+    </cs:fontRef>
+    <cs:spPr>
+      <a:ln w="28575" cap="rnd">
+        <a:solidFill>
+          <a:schemeClr val="phClr"/>
+        </a:solidFill>
+        <a:round/>
+      </a:ln>
+    </cs:spPr>
+  </cs:dataPointLine>
+  <cs:dataPointMarker>
+    <cs:lnRef idx="0">
+      <cs:styleClr val="auto"/>
+    </cs:lnRef>
+    <cs:fillRef idx="1">
+      <cs:styleClr val="auto"/>
+    </cs:fillRef>
+    <cs:effectRef idx="0"/>
+    <cs:fontRef idx="minor">
+      <a:schemeClr val="tx1"/>
+    </cs:fontRef>
+    <cs:spPr>
+      <a:ln w="9525">
+        <a:solidFill>
+          <a:schemeClr val="phClr"/>
+        </a:solidFill>
+      </a:ln>
+    </cs:spPr>
+  </cs:dataPointMarker>
+  <cs:dataPointMarkerLayout symbol="circle" size="5"/>
+  <cs:dataPointWireframe>
+    <cs:lnRef idx="0">
+      <cs:styleClr val="auto"/>
+    </cs:lnRef>
+    <cs:fillRef idx="1"/>
+    <cs:effectRef idx="0"/>
+    <cs:fontRef idx="minor">
+      <a:schemeClr val="tx1"/>
+    </cs:fontRef>
+    <cs:spPr>
+      <a:ln w="9525" cap="rnd">
+        <a:solidFill>
+          <a:schemeClr val="phClr"/>
+        </a:solidFill>
+        <a:round/>
+      </a:ln>
+    </cs:spPr>
+  </cs:dataPointWireframe>
+  <cs:dataTable>
+    <cs:lnRef idx="0"/>
+    <cs:fillRef idx="0"/>
+    <cs:effectRef idx="0"/>
+    <cs:fontRef idx="minor">
+      <a:schemeClr val="tx1">
+        <a:lumMod val="65000"/>
+        <a:lumOff val="35000"/>
+      </a:schemeClr>
+    </cs:fontRef>
+    <cs:spPr>
+      <a:noFill/>
+      <a:ln w="9525" cap="flat" cmpd="sng" algn="ctr">
+        <a:solidFill>
+          <a:schemeClr val="tx1">
+            <a:lumMod val="15000"/>
+            <a:lumOff val="85000"/>
+          </a:schemeClr>
+        </a:solidFill>
+        <a:round/>
+      </a:ln>
+    </cs:spPr>
+    <cs:defRPr sz="900" kern="1200"/>
+  </cs:dataTable>
+  <cs:downBar>
+    <cs:lnRef idx="0"/>
+    <cs:fillRef idx="0"/>
+    <cs:effectRef idx="0"/>
+    <cs:fontRef idx="minor">
+      <a:schemeClr val="dk1"/>
+    </cs:fontRef>
+    <cs:spPr>
+      <a:solidFill>
+        <a:schemeClr val="dk1">
+          <a:lumMod val="65000"/>
+          <a:lumOff val="35000"/>
+        </a:schemeClr>
+      </a:solidFill>
+      <a:ln w="9525">
+        <a:solidFill>
+          <a:schemeClr val="tx1">
+            <a:lumMod val="65000"/>
+            <a:lumOff val="35000"/>
+          </a:schemeClr>
+        </a:solidFill>
+      </a:ln>
+    </cs:spPr>
+  </cs:downBar>
+  <cs:dropLine>
+    <cs:lnRef idx="0"/>
+    <cs:fillRef idx="0"/>
+    <cs:effectRef idx="0"/>
+    <cs:fontRef idx="minor">
+      <a:schemeClr val="tx1"/>
+    </cs:fontRef>
+    <cs:spPr>
+      <a:ln w="9525" cap="flat" cmpd="sng" algn="ctr">
+        <a:solidFill>
+          <a:schemeClr val="tx1">
+            <a:lumMod val="35000"/>
+            <a:lumOff val="65000"/>
+          </a:schemeClr>
+        </a:solidFill>
+        <a:round/>
+      </a:ln>
+    </cs:spPr>
+  </cs:dropLine>
+  <cs:errorBar>
+    <cs:lnRef idx="0"/>
+    <cs:fillRef idx="0"/>
+    <cs:effectRef idx="0"/>
+    <cs:fontRef idx="minor">
+      <a:schemeClr val="tx1"/>
+    </cs:fontRef>
+    <cs:spPr>
+      <a:ln w="9525" cap="flat" cmpd="sng" algn="ctr">
+        <a:solidFill>
+          <a:schemeClr val="tx1">
+            <a:lumMod val="65000"/>
+            <a:lumOff val="35000"/>
+          </a:schemeClr>
+        </a:solidFill>
+        <a:round/>
+      </a:ln>
+    </cs:spPr>
+  </cs:errorBar>
+  <cs:floor>
+    <cs:lnRef idx="0"/>
+    <cs:fillRef idx="0"/>
+    <cs:effectRef idx="0"/>
+    <cs:fontRef idx="minor">
+      <a:schemeClr val="tx1"/>
+    </cs:fontRef>
+    <cs:spPr>
+      <a:noFill/>
+      <a:ln>
+        <a:noFill/>
+      </a:ln>
+    </cs:spPr>
+  </cs:floor>
+  <cs:gridlineMajor>
+    <cs:lnRef idx="0"/>
+    <cs:fillRef idx="0"/>
+    <cs:effectRef idx="0"/>
+    <cs:fontRef idx="minor">
+      <a:schemeClr val="tx1"/>
+    </cs:fontRef>
+    <cs:spPr>
+      <a:ln w="9525" cap="flat" cmpd="sng" algn="ctr">
+        <a:solidFill>
+          <a:schemeClr val="tx1">
+            <a:lumMod val="15000"/>
+            <a:lumOff val="85000"/>
+          </a:schemeClr>
+        </a:solidFill>
+        <a:round/>
+      </a:ln>
+    </cs:spPr>
+  </cs:gridlineMajor>
+  <cs:gridlineMinor>
+    <cs:lnRef idx="0"/>
+    <cs:fillRef idx="0"/>
+    <cs:effectRef idx="0"/>
+    <cs:fontRef idx="minor">
+      <a:schemeClr val="tx1"/>
+    </cs:fontRef>
+    <cs:spPr>
+      <a:ln w="9525" cap="flat" cmpd="sng" algn="ctr">
+        <a:solidFill>
+          <a:schemeClr val="tx1">
+            <a:lumMod val="5000"/>
+            <a:lumOff val="95000"/>
+          </a:schemeClr>
+        </a:solidFill>
+        <a:round/>
+      </a:ln>
+    </cs:spPr>
+  </cs:gridlineMinor>
+  <cs:hiLoLine>
+    <cs:lnRef idx="0"/>
+    <cs:fillRef idx="0"/>
+    <cs:effectRef idx="0"/>
+    <cs:fontRef idx="minor">
+      <a:schemeClr val="tx1"/>
+    </cs:fontRef>
+    <cs:spPr>
+      <a:ln w="9525" cap="flat" cmpd="sng" algn="ctr">
+        <a:solidFill>
+          <a:schemeClr val="tx1">
+            <a:lumMod val="75000"/>
+            <a:lumOff val="25000"/>
+          </a:schemeClr>
+        </a:solidFill>
+        <a:round/>
+      </a:ln>
+    </cs:spPr>
+  </cs:hiLoLine>
+  <cs:leaderLine>
+    <cs:lnRef idx="0"/>
+    <cs:fillRef idx="0"/>
+    <cs:effectRef idx="0"/>
+    <cs:fontRef idx="minor">
+      <a:schemeClr val="tx1"/>
+    </cs:fontRef>
+    <cs:spPr>
+      <a:ln w="9525" cap="flat" cmpd="sng" algn="ctr">
+        <a:solidFill>
+          <a:schemeClr val="tx1">
+            <a:lumMod val="35000"/>
+            <a:lumOff val="65000"/>
+          </a:schemeClr>
+        </a:solidFill>
+        <a:round/>
+      </a:ln>
+    </cs:spPr>
+  </cs:leaderLine>
+  <cs:legend>
+    <cs:lnRef idx="0"/>
+    <cs:fillRef idx="0"/>
+    <cs:effectRef idx="0"/>
+    <cs:fontRef idx="minor">
+      <a:schemeClr val="tx1">
+        <a:lumMod val="65000"/>
+        <a:lumOff val="35000"/>
+      </a:schemeClr>
+    </cs:fontRef>
+    <cs:defRPr sz="900" kern="1200"/>
+  </cs:legend>
+  <cs:plotArea mods="allowNoFillOverride allowNoLineOverride">
+    <cs:lnRef idx="0"/>
+    <cs:fillRef idx="0"/>
+    <cs:effectRef idx="0"/>
+    <cs:fontRef idx="minor">
+      <a:schemeClr val="tx1"/>
+    </cs:fontRef>
+  </cs:plotArea>
+  <cs:plotArea3D mods="allowNoFillOverride allowNoLineOverride">
+    <cs:lnRef idx="0"/>
+    <cs:fillRef idx="0"/>
+    <cs:effectRef idx="0"/>
+    <cs:fontRef idx="minor">
+      <a:schemeClr val="tx1"/>
+    </cs:fontRef>
+  </cs:plotArea3D>
+  <cs:seriesAxis>
+    <cs:lnRef idx="0"/>
+    <cs:fillRef idx="0"/>
+    <cs:effectRef idx="0"/>
+    <cs:fontRef idx="minor">
+      <a:schemeClr val="tx1">
+        <a:lumMod val="65000"/>
+        <a:lumOff val="35000"/>
+      </a:schemeClr>
+    </cs:fontRef>
+    <cs:defRPr sz="900" kern="1200"/>
+  </cs:seriesAxis>
+  <cs:seriesLine>
+    <cs:lnRef idx="0"/>
+    <cs:fillRef idx="0"/>
+    <cs:effectRef idx="0"/>
+    <cs:fontRef idx="minor">
+      <a:schemeClr val="tx1"/>
+    </cs:fontRef>
+    <cs:spPr>
+      <a:ln w="9525" cap="flat" cmpd="sng" algn="ctr">
+        <a:solidFill>
+          <a:schemeClr val="tx1">
+            <a:lumMod val="35000"/>
+            <a:lumOff val="65000"/>
+          </a:schemeClr>
+        </a:solidFill>
+        <a:round/>
+      </a:ln>
+    </cs:spPr>
+  </cs:seriesLine>
+  <cs:title>
+    <cs:lnRef idx="0"/>
+    <cs:fillRef idx="0"/>
+    <cs:effectRef idx="0"/>
+    <cs:fontRef idx="minor">
+      <a:schemeClr val="tx1">
+        <a:lumMod val="65000"/>
+        <a:lumOff val="35000"/>
+      </a:schemeClr>
+    </cs:fontRef>
+    <cs:defRPr sz="1400" b="0" kern="1200" spc="0" baseline="0"/>
+  </cs:title>
+  <cs:trendline>
+    <cs:lnRef idx="0">
+      <cs:styleClr val="auto"/>
+    </cs:lnRef>
+    <cs:fillRef idx="0"/>
+    <cs:effectRef idx="0"/>
+    <cs:fontRef idx="minor">
+      <a:schemeClr val="tx1"/>
+    </cs:fontRef>
+    <cs:spPr>
+      <a:ln w="19050" cap="rnd">
+        <a:solidFill>
+          <a:schemeClr val="phClr"/>
+        </a:solidFill>
+        <a:prstDash val="sysDot"/>
+      </a:ln>
+    </cs:spPr>
+  </cs:trendline>
+  <cs:trendlineLabel>
+    <cs:lnRef idx="0"/>
+    <cs:fillRef idx="0"/>
+    <cs:effectRef idx="0"/>
+    <cs:fontRef idx="minor">
+      <a:schemeClr val="tx1">
+        <a:lumMod val="65000"/>
+        <a:lumOff val="35000"/>
+      </a:schemeClr>
+    </cs:fontRef>
+    <cs:defRPr sz="900" kern="1200"/>
+  </cs:trendlineLabel>
+  <cs:upBar>
+    <cs:lnRef idx="0"/>
+    <cs:fillRef idx="0"/>
+    <cs:effectRef idx="0"/>
+    <cs:fontRef idx="minor">
+      <a:schemeClr val="dk1"/>
+    </cs:fontRef>
+    <cs:spPr>
+      <a:solidFill>
+        <a:schemeClr val="lt1"/>
+      </a:solidFill>
+      <a:ln w="9525">
+        <a:solidFill>
+          <a:schemeClr val="tx1">
+            <a:lumMod val="15000"/>
+            <a:lumOff val="85000"/>
+          </a:schemeClr>
+        </a:solidFill>
+      </a:ln>
+    </cs:spPr>
+  </cs:upBar>
+  <cs:valueAxis>
+    <cs:lnRef idx="0"/>
+    <cs:fillRef idx="0"/>
+    <cs:effectRef idx="0"/>
+    <cs:fontRef idx="minor">
+      <a:schemeClr val="tx1">
+        <a:lumMod val="65000"/>
+        <a:lumOff val="35000"/>
+      </a:schemeClr>
+    </cs:fontRef>
+    <cs:defRPr sz="900" kern="1200"/>
+  </cs:valueAxis>
+  <cs:wall>
+    <cs:lnRef idx="0"/>
+    <cs:fillRef idx="0"/>
+    <cs:effectRef idx="0"/>
+    <cs:fontRef idx="minor">
+      <a:schemeClr val="tx1"/>
+    </cs:fontRef>
+    <cs:spPr>
+      <a:noFill/>
+      <a:ln>
+        <a:noFill/>
+      </a:ln>
+    </cs:spPr>
+  </cs:wall>
+</cs:chartStyle>
+</file>
+
+<file path=ppt/charts/style4.xml><?xml version="1.0" encoding="utf-8"?>
+<cs:chartStyle xmlns:cs="http://schemas.microsoft.com/office/drawing/2012/chartStyle" xmlns:a="http://schemas.openxmlformats.org/drawingml/2006/main" id="332">
+  <cs:axisTitle>
+    <cs:lnRef idx="0"/>
+    <cs:fillRef idx="0"/>
+    <cs:effectRef idx="0"/>
+    <cs:fontRef idx="minor">
+      <a:schemeClr val="tx1">
+        <a:lumMod val="65000"/>
+        <a:lumOff val="35000"/>
+      </a:schemeClr>
+    </cs:fontRef>
+    <cs:defRPr sz="1000" kern="1200"/>
+  </cs:axisTitle>
+  <cs:categoryAxis>
+    <cs:lnRef idx="0"/>
+    <cs:fillRef idx="0"/>
+    <cs:effectRef idx="0"/>
+    <cs:fontRef idx="minor">
+      <a:schemeClr val="tx1">
+        <a:lumMod val="65000"/>
+        <a:lumOff val="35000"/>
+      </a:schemeClr>
+    </cs:fontRef>
+    <cs:spPr>
+      <a:ln w="9525" cap="flat" cmpd="sng" algn="ctr">
+        <a:solidFill>
+          <a:schemeClr val="tx1">
+            <a:lumMod val="15000"/>
+            <a:lumOff val="85000"/>
+          </a:schemeClr>
+        </a:solidFill>
+        <a:round/>
+      </a:ln>
+    </cs:spPr>
+    <cs:defRPr sz="900" kern="1200"/>
+  </cs:categoryAxis>
+  <cs:chartArea mods="allowNoFillOverride allowNoLineOverride">
+    <cs:lnRef idx="0"/>
+    <cs:fillRef idx="0"/>
+    <cs:effectRef idx="0"/>
+    <cs:fontRef idx="minor">
+      <a:schemeClr val="tx1"/>
+    </cs:fontRef>
+    <cs:spPr>
+      <a:solidFill>
+        <a:schemeClr val="bg1"/>
+      </a:solidFill>
+      <a:ln w="9525" cap="flat" cmpd="sng" algn="ctr">
+        <a:solidFill>
+          <a:schemeClr val="tx1">
+            <a:lumMod val="15000"/>
+            <a:lumOff val="85000"/>
+          </a:schemeClr>
+        </a:solidFill>
+        <a:round/>
+      </a:ln>
+    </cs:spPr>
+    <cs:defRPr sz="1000" kern="1200"/>
+  </cs:chartArea>
+  <cs:dataLabel>
+    <cs:lnRef idx="0"/>
+    <cs:fillRef idx="0"/>
+    <cs:effectRef idx="0"/>
+    <cs:fontRef idx="minor">
+      <a:schemeClr val="tx1">
+        <a:lumMod val="75000"/>
+        <a:lumOff val="25000"/>
+      </a:schemeClr>
+    </cs:fontRef>
+    <cs:defRPr sz="900" kern="1200"/>
+  </cs:dataLabel>
+  <cs:dataLabelCallout>
+    <cs:lnRef idx="0"/>
+    <cs:fillRef idx="0"/>
+    <cs:effectRef idx="0"/>
+    <cs:fontRef idx="minor">
+      <a:schemeClr val="dk1">
+        <a:lumMod val="65000"/>
+        <a:lumOff val="35000"/>
+      </a:schemeClr>
+    </cs:fontRef>
+    <cs:spPr>
+      <a:solidFill>
+        <a:schemeClr val="lt1"/>
+      </a:solidFill>
+      <a:ln>
+        <a:solidFill>
+          <a:schemeClr val="dk1">
+            <a:lumMod val="25000"/>
+            <a:lumOff val="75000"/>
+          </a:schemeClr>
+        </a:solidFill>
+      </a:ln>
+    </cs:spPr>
+    <cs:defRPr sz="900" kern="1200"/>
+    <cs:bodyPr rot="0" spcFirstLastPara="1" vertOverflow="clip" horzOverflow="clip" vert="horz" wrap="square" lIns="36576" tIns="18288" rIns="36576" bIns="18288" anchor="ctr" anchorCtr="1">
+      <a:spAutoFit/>
+    </cs:bodyPr>
+  </cs:dataLabelCallout>
+  <cs:dataPoint>
+    <cs:lnRef idx="0"/>
+    <cs:fillRef idx="1">
+      <cs:styleClr val="auto"/>
+    </cs:fillRef>
+    <cs:effectRef idx="0"/>
+    <cs:fontRef idx="minor">
+      <a:schemeClr val="tx1"/>
+    </cs:fontRef>
+  </cs:dataPoint>
+  <cs:dataPoint3D>
+    <cs:lnRef idx="0"/>
+    <cs:fillRef idx="1">
+      <cs:styleClr val="auto"/>
+    </cs:fillRef>
+    <cs:effectRef idx="0"/>
+    <cs:fontRef idx="minor">
+      <a:schemeClr val="tx1"/>
+    </cs:fontRef>
+  </cs:dataPoint3D>
+  <cs:dataPointLine>
+    <cs:lnRef idx="0">
+      <cs:styleClr val="auto"/>
+    </cs:lnRef>
+    <cs:fillRef idx="1"/>
+    <cs:effectRef idx="0"/>
+    <cs:fontRef idx="minor">
+      <a:schemeClr val="tx1"/>
+    </cs:fontRef>
+    <cs:spPr>
+      <a:ln w="28575" cap="rnd">
+        <a:solidFill>
+          <a:schemeClr val="phClr"/>
+        </a:solidFill>
+        <a:round/>
+      </a:ln>
+    </cs:spPr>
+  </cs:dataPointLine>
+  <cs:dataPointMarker>
+    <cs:lnRef idx="0">
+      <cs:styleClr val="auto"/>
+    </cs:lnRef>
+    <cs:fillRef idx="1">
+      <cs:styleClr val="auto"/>
+    </cs:fillRef>
+    <cs:effectRef idx="0"/>
+    <cs:fontRef idx="minor">
+      <a:schemeClr val="tx1"/>
+    </cs:fontRef>
+    <cs:spPr>
+      <a:ln w="9525">
+        <a:solidFill>
+          <a:schemeClr val="phClr"/>
+        </a:solidFill>
+      </a:ln>
+    </cs:spPr>
+  </cs:dataPointMarker>
+  <cs:dataPointMarkerLayout symbol="circle" size="5"/>
+  <cs:dataPointWireframe>
+    <cs:lnRef idx="0">
+      <cs:styleClr val="auto"/>
+    </cs:lnRef>
+    <cs:fillRef idx="1"/>
+    <cs:effectRef idx="0"/>
+    <cs:fontRef idx="minor">
+      <a:schemeClr val="tx1"/>
+    </cs:fontRef>
+    <cs:spPr>
+      <a:ln w="9525" cap="rnd">
+        <a:solidFill>
+          <a:schemeClr val="phClr"/>
+        </a:solidFill>
+        <a:round/>
+      </a:ln>
+    </cs:spPr>
+  </cs:dataPointWireframe>
+  <cs:dataTable>
+    <cs:lnRef idx="0"/>
+    <cs:fillRef idx="0"/>
+    <cs:effectRef idx="0"/>
+    <cs:fontRef idx="minor">
+      <a:schemeClr val="tx1">
+        <a:lumMod val="65000"/>
+        <a:lumOff val="35000"/>
+      </a:schemeClr>
+    </cs:fontRef>
+    <cs:spPr>
+      <a:noFill/>
+      <a:ln w="9525" cap="flat" cmpd="sng" algn="ctr">
+        <a:solidFill>
+          <a:schemeClr val="tx1">
+            <a:lumMod val="15000"/>
+            <a:lumOff val="85000"/>
+          </a:schemeClr>
+        </a:solidFill>
+        <a:round/>
+      </a:ln>
+    </cs:spPr>
+    <cs:defRPr sz="900" kern="1200"/>
+  </cs:dataTable>
+  <cs:downBar>
+    <cs:lnRef idx="0"/>
+    <cs:fillRef idx="0"/>
+    <cs:effectRef idx="0"/>
+    <cs:fontRef idx="minor">
+      <a:schemeClr val="dk1"/>
+    </cs:fontRef>
+    <cs:spPr>
+      <a:solidFill>
+        <a:schemeClr val="dk1">
+          <a:lumMod val="65000"/>
+          <a:lumOff val="35000"/>
+        </a:schemeClr>
+      </a:solidFill>
+      <a:ln w="9525">
+        <a:solidFill>
+          <a:schemeClr val="tx1">
+            <a:lumMod val="65000"/>
+            <a:lumOff val="35000"/>
+          </a:schemeClr>
+        </a:solidFill>
+      </a:ln>
+    </cs:spPr>
+  </cs:downBar>
+  <cs:dropLine>
+    <cs:lnRef idx="0"/>
+    <cs:fillRef idx="0"/>
+    <cs:effectRef idx="0"/>
+    <cs:fontRef idx="minor">
+      <a:schemeClr val="tx1"/>
+    </cs:fontRef>
+    <cs:spPr>
+      <a:ln w="9525" cap="flat" cmpd="sng" algn="ctr">
+        <a:solidFill>
+          <a:schemeClr val="tx1">
+            <a:lumMod val="35000"/>
+            <a:lumOff val="65000"/>
+          </a:schemeClr>
+        </a:solidFill>
+        <a:round/>
+      </a:ln>
+    </cs:spPr>
+  </cs:dropLine>
+  <cs:errorBar>
+    <cs:lnRef idx="0"/>
+    <cs:fillRef idx="0"/>
+    <cs:effectRef idx="0"/>
+    <cs:fontRef idx="minor">
+      <a:schemeClr val="tx1"/>
+    </cs:fontRef>
+    <cs:spPr>
+      <a:ln w="9525" cap="flat" cmpd="sng" algn="ctr">
+        <a:solidFill>
+          <a:schemeClr val="tx1">
+            <a:lumMod val="65000"/>
+            <a:lumOff val="35000"/>
+          </a:schemeClr>
+        </a:solidFill>
+        <a:round/>
+      </a:ln>
+    </cs:spPr>
+  </cs:errorBar>
+  <cs:floor>
+    <cs:lnRef idx="0"/>
+    <cs:fillRef idx="0"/>
+    <cs:effectRef idx="0"/>
+    <cs:fontRef idx="minor">
+      <a:schemeClr val="tx1"/>
+    </cs:fontRef>
+    <cs:spPr>
+      <a:noFill/>
+      <a:ln>
+        <a:noFill/>
+      </a:ln>
+    </cs:spPr>
+  </cs:floor>
+  <cs:gridlineMajor>
+    <cs:lnRef idx="0"/>
+    <cs:fillRef idx="0"/>
+    <cs:effectRef idx="0"/>
+    <cs:fontRef idx="minor">
+      <a:schemeClr val="tx1"/>
+    </cs:fontRef>
+    <cs:spPr>
+      <a:ln w="9525" cap="flat" cmpd="sng" algn="ctr">
+        <a:solidFill>
+          <a:schemeClr val="tx1">
+            <a:lumMod val="15000"/>
+            <a:lumOff val="85000"/>
+          </a:schemeClr>
+        </a:solidFill>
+        <a:round/>
+      </a:ln>
+    </cs:spPr>
+  </cs:gridlineMajor>
+  <cs:gridlineMinor>
+    <cs:lnRef idx="0"/>
+    <cs:fillRef idx="0"/>
+    <cs:effectRef idx="0"/>
+    <cs:fontRef idx="minor">
+      <a:schemeClr val="tx1"/>
+    </cs:fontRef>
+    <cs:spPr>
+      <a:ln w="9525" cap="flat" cmpd="sng" algn="ctr">
+        <a:solidFill>
+          <a:schemeClr val="tx1">
+            <a:lumMod val="5000"/>
+            <a:lumOff val="95000"/>
+          </a:schemeClr>
+        </a:solidFill>
+        <a:round/>
+      </a:ln>
+    </cs:spPr>
+  </cs:gridlineMinor>
+  <cs:hiLoLine>
+    <cs:lnRef idx="0"/>
+    <cs:fillRef idx="0"/>
+    <cs:effectRef idx="0"/>
+    <cs:fontRef idx="minor">
+      <a:schemeClr val="tx1"/>
+    </cs:fontRef>
+    <cs:spPr>
+      <a:ln w="9525" cap="flat" cmpd="sng" algn="ctr">
+        <a:solidFill>
+          <a:schemeClr val="tx1">
+            <a:lumMod val="75000"/>
+            <a:lumOff val="25000"/>
+          </a:schemeClr>
+        </a:solidFill>
+        <a:round/>
+      </a:ln>
+    </cs:spPr>
+  </cs:hiLoLine>
+  <cs:leaderLine>
+    <cs:lnRef idx="0"/>
+    <cs:fillRef idx="0"/>
+    <cs:effectRef idx="0"/>
+    <cs:fontRef idx="minor">
+      <a:schemeClr val="tx1"/>
+    </cs:fontRef>
+    <cs:spPr>
+      <a:ln w="9525" cap="flat" cmpd="sng" algn="ctr">
+        <a:solidFill>
+          <a:schemeClr val="tx1">
+            <a:lumMod val="35000"/>
+            <a:lumOff val="65000"/>
+          </a:schemeClr>
+        </a:solidFill>
+        <a:round/>
+      </a:ln>
+    </cs:spPr>
+  </cs:leaderLine>
+  <cs:legend>
+    <cs:lnRef idx="0"/>
+    <cs:fillRef idx="0"/>
+    <cs:effectRef idx="0"/>
+    <cs:fontRef idx="minor">
+      <a:schemeClr val="tx1">
+        <a:lumMod val="65000"/>
+        <a:lumOff val="35000"/>
+      </a:schemeClr>
+    </cs:fontRef>
+    <cs:defRPr sz="900" kern="1200"/>
+  </cs:legend>
+  <cs:plotArea mods="allowNoFillOverride allowNoLineOverride">
+    <cs:lnRef idx="0"/>
+    <cs:fillRef idx="0"/>
+    <cs:effectRef idx="0"/>
+    <cs:fontRef idx="minor">
+      <a:schemeClr val="tx1"/>
+    </cs:fontRef>
+  </cs:plotArea>
+  <cs:plotArea3D mods="allowNoFillOverride allowNoLineOverride">
+    <cs:lnRef idx="0"/>
+    <cs:fillRef idx="0"/>
+    <cs:effectRef idx="0"/>
+    <cs:fontRef idx="minor">
+      <a:schemeClr val="tx1"/>
+    </cs:fontRef>
+  </cs:plotArea3D>
+  <cs:seriesAxis>
+    <cs:lnRef idx="0"/>
+    <cs:fillRef idx="0"/>
+    <cs:effectRef idx="0"/>
+    <cs:fontRef idx="minor">
+      <a:schemeClr val="tx1">
+        <a:lumMod val="65000"/>
+        <a:lumOff val="35000"/>
+      </a:schemeClr>
+    </cs:fontRef>
+    <cs:defRPr sz="900" kern="1200"/>
+  </cs:seriesAxis>
+  <cs:seriesLine>
+    <cs:lnRef idx="0"/>
+    <cs:fillRef idx="0"/>
+    <cs:effectRef idx="0"/>
+    <cs:fontRef idx="minor">
+      <a:schemeClr val="tx1"/>
+    </cs:fontRef>
+    <cs:spPr>
+      <a:ln w="9525" cap="flat" cmpd="sng" algn="ctr">
+        <a:solidFill>
+          <a:schemeClr val="tx1">
+            <a:lumMod val="35000"/>
+            <a:lumOff val="65000"/>
+          </a:schemeClr>
+        </a:solidFill>
+        <a:round/>
+      </a:ln>
+    </cs:spPr>
+  </cs:seriesLine>
+  <cs:title>
+    <cs:lnRef idx="0"/>
+    <cs:fillRef idx="0"/>
+    <cs:effectRef idx="0"/>
+    <cs:fontRef idx="minor">
+      <a:schemeClr val="tx1">
+        <a:lumMod val="65000"/>
+        <a:lumOff val="35000"/>
+      </a:schemeClr>
+    </cs:fontRef>
+    <cs:defRPr sz="1400" b="0" kern="1200" spc="0" baseline="0"/>
+  </cs:title>
+  <cs:trendline>
+    <cs:lnRef idx="0">
+      <cs:styleClr val="auto"/>
+    </cs:lnRef>
+    <cs:fillRef idx="0"/>
+    <cs:effectRef idx="0"/>
+    <cs:fontRef idx="minor">
+      <a:schemeClr val="tx1"/>
+    </cs:fontRef>
+    <cs:spPr>
+      <a:ln w="19050" cap="rnd">
+        <a:solidFill>
+          <a:schemeClr val="phClr"/>
+        </a:solidFill>
+        <a:prstDash val="sysDot"/>
+      </a:ln>
+    </cs:spPr>
+  </cs:trendline>
+  <cs:trendlineLabel>
+    <cs:lnRef idx="0"/>
+    <cs:fillRef idx="0"/>
+    <cs:effectRef idx="0"/>
+    <cs:fontRef idx="minor">
+      <a:schemeClr val="tx1">
+        <a:lumMod val="65000"/>
+        <a:lumOff val="35000"/>
+      </a:schemeClr>
+    </cs:fontRef>
+    <cs:defRPr sz="900" kern="1200"/>
+  </cs:trendlineLabel>
+  <cs:upBar>
+    <cs:lnRef idx="0"/>
+    <cs:fillRef idx="0"/>
+    <cs:effectRef idx="0"/>
+    <cs:fontRef idx="minor">
+      <a:schemeClr val="dk1"/>
+    </cs:fontRef>
+    <cs:spPr>
+      <a:solidFill>
+        <a:schemeClr val="lt1"/>
+      </a:solidFill>
+      <a:ln w="9525">
+        <a:solidFill>
+          <a:schemeClr val="tx1">
+            <a:lumMod val="15000"/>
+            <a:lumOff val="85000"/>
+          </a:schemeClr>
+        </a:solidFill>
+      </a:ln>
+    </cs:spPr>
+  </cs:upBar>
+  <cs:valueAxis>
+    <cs:lnRef idx="0"/>
+    <cs:fillRef idx="0"/>
+    <cs:effectRef idx="0"/>
+    <cs:fontRef idx="minor">
+      <a:schemeClr val="tx1">
+        <a:lumMod val="65000"/>
+        <a:lumOff val="35000"/>
+      </a:schemeClr>
+    </cs:fontRef>
+    <cs:defRPr sz="900" kern="1200"/>
+  </cs:valueAxis>
+  <cs:wall>
+    <cs:lnRef idx="0"/>
+    <cs:fillRef idx="0"/>
+    <cs:effectRef idx="0"/>
+    <cs:fontRef idx="minor">
+      <a:schemeClr val="tx1"/>
+    </cs:fontRef>
+    <cs:spPr>
+      <a:noFill/>
+      <a:ln>
+        <a:noFill/>
+      </a:ln>
+    </cs:spPr>
+  </cs:wall>
+</cs:chartStyle>
 </file>
 
 <file path=ppt/notesMasters/notesMaster1.xml><?xml version="1.0" encoding="utf-8"?>
@@ -1531,6 +6229,386 @@
   <p:cSld>
     <p:spTree>
       <p:nvGrpSpPr>
+        <p:cNvPr id="1" name="Shape 88">
+          <a:extLst>
+            <a:ext uri="{FF2B5EF4-FFF2-40B4-BE49-F238E27FC236}">
+              <a16:creationId xmlns:a16="http://schemas.microsoft.com/office/drawing/2014/main" id="{A0236F17-C1B1-C9CF-8800-146027CF5071}"/>
+            </a:ext>
+          </a:extLst>
+        </p:cNvPr>
+        <p:cNvGrpSpPr/>
+        <p:nvPr/>
+      </p:nvGrpSpPr>
+      <p:grpSpPr>
+        <a:xfrm>
+          <a:off x="0" y="0"/>
+          <a:ext cx="0" cy="0"/>
+          <a:chOff x="0" y="0"/>
+          <a:chExt cx="0" cy="0"/>
+        </a:xfrm>
+      </p:grpSpPr>
+      <p:sp>
+        <p:nvSpPr>
+          <p:cNvPr id="89" name="Google Shape;89;g3ef4563ff73_0_4:notes">
+            <a:extLst>
+              <a:ext uri="{FF2B5EF4-FFF2-40B4-BE49-F238E27FC236}">
+                <a16:creationId xmlns:a16="http://schemas.microsoft.com/office/drawing/2014/main" id="{009B6865-6382-0971-56B0-CE25C73AA071}"/>
+              </a:ext>
+            </a:extLst>
+          </p:cNvPr>
+          <p:cNvSpPr txBox="1">
+            <a:spLocks noGrp="1"/>
+          </p:cNvSpPr>
+          <p:nvPr>
+            <p:ph type="body" idx="1"/>
+          </p:nvPr>
+        </p:nvSpPr>
+        <p:spPr>
+          <a:xfrm>
+            <a:off x="685800" y="4343400"/>
+            <a:ext cx="5486400" cy="4114800"/>
+          </a:xfrm>
+          <a:prstGeom prst="rect">
+            <a:avLst/>
+          </a:prstGeom>
+        </p:spPr>
+        <p:txBody>
+          <a:bodyPr spcFirstLastPara="1" wrap="square" lIns="91425" tIns="91425" rIns="91425" bIns="91425" anchor="t" anchorCtr="0">
+            <a:noAutofit/>
+          </a:bodyPr>
+          <a:lstStyle/>
+          <a:p>
+            <a:pPr marL="0" lvl="0" indent="0" algn="l" rtl="0">
+              <a:spcBef>
+                <a:spcPts val="0"/>
+              </a:spcBef>
+              <a:spcAft>
+                <a:spcPts val="0"/>
+              </a:spcAft>
+              <a:buNone/>
+            </a:pPr>
+            <a:r>
+              <a:rPr lang="en-US" dirty="0"/>
+              <a:t>Control plane framework, declarative model, composition. Internal Development Platform</a:t>
+            </a:r>
+            <a:endParaRPr dirty="0"/>
+          </a:p>
+        </p:txBody>
+      </p:sp>
+      <p:sp>
+        <p:nvSpPr>
+          <p:cNvPr id="90" name="Google Shape;90;g3ef4563ff73_0_4:notes">
+            <a:extLst>
+              <a:ext uri="{FF2B5EF4-FFF2-40B4-BE49-F238E27FC236}">
+                <a16:creationId xmlns:a16="http://schemas.microsoft.com/office/drawing/2014/main" id="{340902E1-B4FB-F313-0575-381FE0A4A883}"/>
+              </a:ext>
+            </a:extLst>
+          </p:cNvPr>
+          <p:cNvSpPr>
+            <a:spLocks noGrp="1" noRot="1" noChangeAspect="1"/>
+          </p:cNvSpPr>
+          <p:nvPr>
+            <p:ph type="sldImg" idx="2"/>
+          </p:nvPr>
+        </p:nvSpPr>
+        <p:spPr>
+          <a:xfrm>
+            <a:off x="381000" y="685800"/>
+            <a:ext cx="6096000" cy="3429000"/>
+          </a:xfrm>
+          <a:custGeom>
+            <a:avLst/>
+            <a:gdLst/>
+            <a:ahLst/>
+            <a:cxnLst/>
+            <a:rect l="l" t="t" r="r" b="b"/>
+            <a:pathLst>
+              <a:path w="120000" h="120000" extrusionOk="0">
+                <a:moveTo>
+                  <a:pt x="0" y="0"/>
+                </a:moveTo>
+                <a:lnTo>
+                  <a:pt x="120000" y="0"/>
+                </a:lnTo>
+                <a:lnTo>
+                  <a:pt x="120000" y="120000"/>
+                </a:lnTo>
+                <a:lnTo>
+                  <a:pt x="0" y="120000"/>
+                </a:lnTo>
+                <a:close/>
+              </a:path>
+            </a:pathLst>
+          </a:custGeom>
+        </p:spPr>
+        <p:txBody>
+          <a:bodyPr/>
+          <a:lstStyle/>
+          <a:p>
+            <a:endParaRPr lang="en-US"/>
+          </a:p>
+        </p:txBody>
+      </p:sp>
+    </p:spTree>
+    <p:extLst>
+      <p:ext uri="{BB962C8B-B14F-4D97-AF65-F5344CB8AC3E}">
+        <p14:creationId xmlns:p14="http://schemas.microsoft.com/office/powerpoint/2010/main" val="2773774147"/>
+      </p:ext>
+    </p:extLst>
+  </p:cSld>
+  <p:clrMapOvr>
+    <a:masterClrMapping/>
+  </p:clrMapOvr>
+</p:notes>
+</file>
+
+<file path=ppt/notesSlides/notesSlide16.xml><?xml version="1.0" encoding="utf-8"?>
+<p:notes xmlns:a="http://schemas.openxmlformats.org/drawingml/2006/main" xmlns:r="http://schemas.openxmlformats.org/officeDocument/2006/relationships" xmlns:p="http://schemas.openxmlformats.org/presentationml/2006/main" showMasterSp="0" showMasterPhAnim="0">
+  <p:cSld>
+    <p:spTree>
+      <p:nvGrpSpPr>
+        <p:cNvPr id="1" name="Shape 88">
+          <a:extLst>
+            <a:ext uri="{FF2B5EF4-FFF2-40B4-BE49-F238E27FC236}">
+              <a16:creationId xmlns:a16="http://schemas.microsoft.com/office/drawing/2014/main" id="{D0A9F554-82AE-85C6-BE7D-7ADF40DE231F}"/>
+            </a:ext>
+          </a:extLst>
+        </p:cNvPr>
+        <p:cNvGrpSpPr/>
+        <p:nvPr/>
+      </p:nvGrpSpPr>
+      <p:grpSpPr>
+        <a:xfrm>
+          <a:off x="0" y="0"/>
+          <a:ext cx="0" cy="0"/>
+          <a:chOff x="0" y="0"/>
+          <a:chExt cx="0" cy="0"/>
+        </a:xfrm>
+      </p:grpSpPr>
+      <p:sp>
+        <p:nvSpPr>
+          <p:cNvPr id="89" name="Google Shape;89;g3ef4563ff73_0_4:notes">
+            <a:extLst>
+              <a:ext uri="{FF2B5EF4-FFF2-40B4-BE49-F238E27FC236}">
+                <a16:creationId xmlns:a16="http://schemas.microsoft.com/office/drawing/2014/main" id="{B1ACB7D6-B2C0-E20F-CBCA-D2A5CB93988F}"/>
+              </a:ext>
+            </a:extLst>
+          </p:cNvPr>
+          <p:cNvSpPr txBox="1">
+            <a:spLocks noGrp="1"/>
+          </p:cNvSpPr>
+          <p:nvPr>
+            <p:ph type="body" idx="1"/>
+          </p:nvPr>
+        </p:nvSpPr>
+        <p:spPr>
+          <a:xfrm>
+            <a:off x="685800" y="4343400"/>
+            <a:ext cx="5486400" cy="4114800"/>
+          </a:xfrm>
+          <a:prstGeom prst="rect">
+            <a:avLst/>
+          </a:prstGeom>
+        </p:spPr>
+        <p:txBody>
+          <a:bodyPr spcFirstLastPara="1" wrap="square" lIns="91425" tIns="91425" rIns="91425" bIns="91425" anchor="t" anchorCtr="0">
+            <a:noAutofit/>
+          </a:bodyPr>
+          <a:lstStyle/>
+          <a:p>
+            <a:pPr marL="0" lvl="0" indent="0" algn="l" rtl="0">
+              <a:spcBef>
+                <a:spcPts val="0"/>
+              </a:spcBef>
+              <a:spcAft>
+                <a:spcPts val="0"/>
+              </a:spcAft>
+              <a:buNone/>
+            </a:pPr>
+            <a:r>
+              <a:rPr lang="en-US" dirty="0"/>
+              <a:t>function-patch-and-transform è stateless (</a:t>
+            </a:r>
+            <a:r>
+              <a:rPr lang="en-US" dirty="0" err="1"/>
+              <a:t>nessuna</a:t>
+            </a:r>
+            <a:r>
+              <a:rPr lang="en-US" dirty="0"/>
+              <a:t> cache di </a:t>
+            </a:r>
+            <a:r>
+              <a:rPr lang="en-US" dirty="0" err="1"/>
+              <a:t>oggetti</a:t>
+            </a:r>
+            <a:r>
+              <a:rPr lang="en-US" dirty="0"/>
+              <a:t> </a:t>
+            </a:r>
+            <a:r>
+              <a:rPr lang="en-US" dirty="0" err="1"/>
+              <a:t>tracciati</a:t>
+            </a:r>
+            <a:r>
+              <a:rPr lang="en-US" dirty="0"/>
+              <a:t>) — le </a:t>
+            </a:r>
+            <a:r>
+              <a:rPr lang="en-US" dirty="0" err="1"/>
+              <a:t>variazioni</a:t>
+            </a:r>
+            <a:r>
+              <a:rPr lang="en-US" dirty="0"/>
+              <a:t> </a:t>
+            </a:r>
+            <a:r>
+              <a:rPr lang="en-US" dirty="0" err="1"/>
+              <a:t>osservate</a:t>
+            </a:r>
+            <a:r>
+              <a:rPr lang="en-US" dirty="0"/>
+              <a:t> </a:t>
+            </a:r>
+            <a:r>
+              <a:rPr lang="en-US" dirty="0" err="1"/>
+              <a:t>riflettono</a:t>
+            </a:r>
+            <a:r>
+              <a:rPr lang="en-US" dirty="0"/>
+              <a:t> il </a:t>
+            </a:r>
+            <a:r>
+              <a:rPr lang="en-US" dirty="0" err="1"/>
+              <a:t>comportamento</a:t>
+            </a:r>
+            <a:r>
+              <a:rPr lang="en-US" dirty="0"/>
+              <a:t> del garbage collector Go in idle, non </a:t>
+            </a:r>
+            <a:r>
+              <a:rPr lang="en-US" dirty="0" err="1"/>
+              <a:t>una</a:t>
+            </a:r>
+            <a:r>
+              <a:rPr lang="en-US" dirty="0"/>
+              <a:t> </a:t>
+            </a:r>
+            <a:r>
+              <a:rPr lang="en-US" dirty="0" err="1"/>
+              <a:t>relazione</a:t>
+            </a:r>
+            <a:r>
+              <a:rPr lang="en-US" dirty="0"/>
+              <a:t> </a:t>
+            </a:r>
+            <a:r>
+              <a:rPr lang="en-US" dirty="0" err="1"/>
+              <a:t>reale</a:t>
+            </a:r>
+            <a:r>
+              <a:rPr lang="en-US" dirty="0"/>
+              <a:t> con la batch size, a </a:t>
+            </a:r>
+            <a:r>
+              <a:rPr lang="en-US" dirty="0" err="1"/>
+              <a:t>differenza</a:t>
+            </a:r>
+            <a:r>
+              <a:rPr lang="en-US" dirty="0"/>
+              <a:t> delle </a:t>
+            </a:r>
+            <a:r>
+              <a:rPr lang="en-US" dirty="0" err="1"/>
+              <a:t>componenti</a:t>
+            </a:r>
+            <a:r>
+              <a:rPr lang="en-US" dirty="0"/>
+              <a:t> con cache </a:t>
+            </a:r>
+            <a:r>
+              <a:rPr lang="en-US" dirty="0" err="1"/>
+              <a:t>persistente</a:t>
+            </a:r>
+            <a:r>
+              <a:rPr lang="en-US" dirty="0"/>
+              <a:t>.</a:t>
+            </a:r>
+            <a:endParaRPr dirty="0"/>
+          </a:p>
+        </p:txBody>
+      </p:sp>
+      <p:sp>
+        <p:nvSpPr>
+          <p:cNvPr id="90" name="Google Shape;90;g3ef4563ff73_0_4:notes">
+            <a:extLst>
+              <a:ext uri="{FF2B5EF4-FFF2-40B4-BE49-F238E27FC236}">
+                <a16:creationId xmlns:a16="http://schemas.microsoft.com/office/drawing/2014/main" id="{BAE4207D-6859-6890-DDCB-11202E08C0C8}"/>
+              </a:ext>
+            </a:extLst>
+          </p:cNvPr>
+          <p:cNvSpPr>
+            <a:spLocks noGrp="1" noRot="1" noChangeAspect="1"/>
+          </p:cNvSpPr>
+          <p:nvPr>
+            <p:ph type="sldImg" idx="2"/>
+          </p:nvPr>
+        </p:nvSpPr>
+        <p:spPr>
+          <a:xfrm>
+            <a:off x="381000" y="685800"/>
+            <a:ext cx="6096000" cy="3429000"/>
+          </a:xfrm>
+          <a:custGeom>
+            <a:avLst/>
+            <a:gdLst/>
+            <a:ahLst/>
+            <a:cxnLst/>
+            <a:rect l="l" t="t" r="r" b="b"/>
+            <a:pathLst>
+              <a:path w="120000" h="120000" extrusionOk="0">
+                <a:moveTo>
+                  <a:pt x="0" y="0"/>
+                </a:moveTo>
+                <a:lnTo>
+                  <a:pt x="120000" y="0"/>
+                </a:lnTo>
+                <a:lnTo>
+                  <a:pt x="120000" y="120000"/>
+                </a:lnTo>
+                <a:lnTo>
+                  <a:pt x="0" y="120000"/>
+                </a:lnTo>
+                <a:close/>
+              </a:path>
+            </a:pathLst>
+          </a:custGeom>
+        </p:spPr>
+        <p:txBody>
+          <a:bodyPr/>
+          <a:lstStyle/>
+          <a:p>
+            <a:endParaRPr lang="en-US"/>
+          </a:p>
+        </p:txBody>
+      </p:sp>
+    </p:spTree>
+    <p:extLst>
+      <p:ext uri="{BB962C8B-B14F-4D97-AF65-F5344CB8AC3E}">
+        <p14:creationId xmlns:p14="http://schemas.microsoft.com/office/powerpoint/2010/main" val="3523619765"/>
+      </p:ext>
+    </p:extLst>
+  </p:cSld>
+  <p:clrMapOvr>
+    <a:masterClrMapping/>
+  </p:clrMapOvr>
+</p:notes>
+</file>
+
+<file path=ppt/notesSlides/notesSlide17.xml><?xml version="1.0" encoding="utf-8"?>
+<p:notes xmlns:a="http://schemas.openxmlformats.org/drawingml/2006/main" xmlns:r="http://schemas.openxmlformats.org/officeDocument/2006/relationships" xmlns:p="http://schemas.openxmlformats.org/presentationml/2006/main" showMasterSp="0" showMasterPhAnim="0">
+  <p:cSld>
+    <p:spTree>
+      <p:nvGrpSpPr>
         <p:cNvPr id="1" name="Shape 148">
           <a:extLst>
             <a:ext uri="{FF2B5EF4-FFF2-40B4-BE49-F238E27FC236}">
@@ -1660,7 +6738,7 @@
 </p:notes>
 </file>
 
-<file path=ppt/notesSlides/notesSlide16.xml><?xml version="1.0" encoding="utf-8"?>
+<file path=ppt/notesSlides/notesSlide18.xml><?xml version="1.0" encoding="utf-8"?>
 <p:notes xmlns:a="http://schemas.openxmlformats.org/drawingml/2006/main" xmlns:r="http://schemas.openxmlformats.org/officeDocument/2006/relationships" xmlns:p="http://schemas.openxmlformats.org/presentationml/2006/main" showMasterSp="0" showMasterPhAnim="0">
   <p:cSld>
     <p:spTree>
@@ -1771,7 +6849,7 @@
 </p:notes>
 </file>
 
-<file path=ppt/notesSlides/notesSlide17.xml><?xml version="1.0" encoding="utf-8"?>
+<file path=ppt/notesSlides/notesSlide19.xml><?xml version="1.0" encoding="utf-8"?>
 <p:notes xmlns:a="http://schemas.openxmlformats.org/drawingml/2006/main" xmlns:r="http://schemas.openxmlformats.org/officeDocument/2006/relationships" xmlns:p="http://schemas.openxmlformats.org/presentationml/2006/main" showMasterSp="0" showMasterPhAnim="0">
   <p:cSld>
     <p:spTree>
@@ -1900,282 +6978,6 @@
     <p:extLst>
       <p:ext uri="{BB962C8B-B14F-4D97-AF65-F5344CB8AC3E}">
         <p14:creationId xmlns:p14="http://schemas.microsoft.com/office/powerpoint/2010/main" val="2445281566"/>
-      </p:ext>
-    </p:extLst>
-  </p:cSld>
-  <p:clrMapOvr>
-    <a:masterClrMapping/>
-  </p:clrMapOvr>
-</p:notes>
-</file>
-
-<file path=ppt/notesSlides/notesSlide18.xml><?xml version="1.0" encoding="utf-8"?>
-<p:notes xmlns:a="http://schemas.openxmlformats.org/drawingml/2006/main" xmlns:r="http://schemas.openxmlformats.org/officeDocument/2006/relationships" xmlns:p="http://schemas.openxmlformats.org/presentationml/2006/main" showMasterSp="0" showMasterPhAnim="0">
-  <p:cSld>
-    <p:spTree>
-      <p:nvGrpSpPr>
-        <p:cNvPr id="1" name="Shape 88">
-          <a:extLst>
-            <a:ext uri="{FF2B5EF4-FFF2-40B4-BE49-F238E27FC236}">
-              <a16:creationId xmlns:a16="http://schemas.microsoft.com/office/drawing/2014/main" id="{6BE29F1E-0032-E247-9C19-3241C1FD7090}"/>
-            </a:ext>
-          </a:extLst>
-        </p:cNvPr>
-        <p:cNvGrpSpPr/>
-        <p:nvPr/>
-      </p:nvGrpSpPr>
-      <p:grpSpPr>
-        <a:xfrm>
-          <a:off x="0" y="0"/>
-          <a:ext cx="0" cy="0"/>
-          <a:chOff x="0" y="0"/>
-          <a:chExt cx="0" cy="0"/>
-        </a:xfrm>
-      </p:grpSpPr>
-      <p:sp>
-        <p:nvSpPr>
-          <p:cNvPr id="89" name="Google Shape;89;g3ef4563ff73_0_4:notes">
-            <a:extLst>
-              <a:ext uri="{FF2B5EF4-FFF2-40B4-BE49-F238E27FC236}">
-                <a16:creationId xmlns:a16="http://schemas.microsoft.com/office/drawing/2014/main" id="{3B9DAD09-8985-450B-4E46-F1A76822304B}"/>
-              </a:ext>
-            </a:extLst>
-          </p:cNvPr>
-          <p:cNvSpPr txBox="1">
-            <a:spLocks noGrp="1"/>
-          </p:cNvSpPr>
-          <p:nvPr>
-            <p:ph type="body" idx="1"/>
-          </p:nvPr>
-        </p:nvSpPr>
-        <p:spPr>
-          <a:xfrm>
-            <a:off x="685800" y="4343400"/>
-            <a:ext cx="5486400" cy="4114800"/>
-          </a:xfrm>
-          <a:prstGeom prst="rect">
-            <a:avLst/>
-          </a:prstGeom>
-        </p:spPr>
-        <p:txBody>
-          <a:bodyPr spcFirstLastPara="1" wrap="square" lIns="91425" tIns="91425" rIns="91425" bIns="91425" anchor="t" anchorCtr="0">
-            <a:noAutofit/>
-          </a:bodyPr>
-          <a:lstStyle/>
-          <a:p>
-            <a:pPr marL="0" lvl="0" indent="0" algn="l" rtl="0">
-              <a:spcBef>
-                <a:spcPts val="0"/>
-              </a:spcBef>
-              <a:spcAft>
-                <a:spcPts val="0"/>
-              </a:spcAft>
-              <a:buNone/>
-            </a:pPr>
-            <a:r>
-              <a:rPr lang="en-US" dirty="0"/>
-              <a:t>Strong separation of the layers, Multiple reconciliation layers introduce overhead</a:t>
-            </a:r>
-            <a:endParaRPr dirty="0"/>
-          </a:p>
-        </p:txBody>
-      </p:sp>
-      <p:sp>
-        <p:nvSpPr>
-          <p:cNvPr id="90" name="Google Shape;90;g3ef4563ff73_0_4:notes">
-            <a:extLst>
-              <a:ext uri="{FF2B5EF4-FFF2-40B4-BE49-F238E27FC236}">
-                <a16:creationId xmlns:a16="http://schemas.microsoft.com/office/drawing/2014/main" id="{C8BE1C5A-3787-C6B7-0757-A312DB404F2C}"/>
-              </a:ext>
-            </a:extLst>
-          </p:cNvPr>
-          <p:cNvSpPr>
-            <a:spLocks noGrp="1" noRot="1" noChangeAspect="1"/>
-          </p:cNvSpPr>
-          <p:nvPr>
-            <p:ph type="sldImg" idx="2"/>
-          </p:nvPr>
-        </p:nvSpPr>
-        <p:spPr>
-          <a:xfrm>
-            <a:off x="381000" y="685800"/>
-            <a:ext cx="6096000" cy="3429000"/>
-          </a:xfrm>
-          <a:custGeom>
-            <a:avLst/>
-            <a:gdLst/>
-            <a:ahLst/>
-            <a:cxnLst/>
-            <a:rect l="l" t="t" r="r" b="b"/>
-            <a:pathLst>
-              <a:path w="120000" h="120000" extrusionOk="0">
-                <a:moveTo>
-                  <a:pt x="0" y="0"/>
-                </a:moveTo>
-                <a:lnTo>
-                  <a:pt x="120000" y="0"/>
-                </a:lnTo>
-                <a:lnTo>
-                  <a:pt x="120000" y="120000"/>
-                </a:lnTo>
-                <a:lnTo>
-                  <a:pt x="0" y="120000"/>
-                </a:lnTo>
-                <a:close/>
-              </a:path>
-            </a:pathLst>
-          </a:custGeom>
-        </p:spPr>
-        <p:txBody>
-          <a:bodyPr/>
-          <a:lstStyle/>
-          <a:p>
-            <a:endParaRPr lang="en-US"/>
-          </a:p>
-        </p:txBody>
-      </p:sp>
-    </p:spTree>
-    <p:extLst>
-      <p:ext uri="{BB962C8B-B14F-4D97-AF65-F5344CB8AC3E}">
-        <p14:creationId xmlns:p14="http://schemas.microsoft.com/office/powerpoint/2010/main" val="69389952"/>
-      </p:ext>
-    </p:extLst>
-  </p:cSld>
-  <p:clrMapOvr>
-    <a:masterClrMapping/>
-  </p:clrMapOvr>
-</p:notes>
-</file>
-
-<file path=ppt/notesSlides/notesSlide19.xml><?xml version="1.0" encoding="utf-8"?>
-<p:notes xmlns:a="http://schemas.openxmlformats.org/drawingml/2006/main" xmlns:r="http://schemas.openxmlformats.org/officeDocument/2006/relationships" xmlns:p="http://schemas.openxmlformats.org/presentationml/2006/main" showMasterSp="0" showMasterPhAnim="0">
-  <p:cSld>
-    <p:spTree>
-      <p:nvGrpSpPr>
-        <p:cNvPr id="1" name="Shape 88">
-          <a:extLst>
-            <a:ext uri="{FF2B5EF4-FFF2-40B4-BE49-F238E27FC236}">
-              <a16:creationId xmlns:a16="http://schemas.microsoft.com/office/drawing/2014/main" id="{AF15ACB3-E2A3-6860-B994-66CBF116185B}"/>
-            </a:ext>
-          </a:extLst>
-        </p:cNvPr>
-        <p:cNvGrpSpPr/>
-        <p:nvPr/>
-      </p:nvGrpSpPr>
-      <p:grpSpPr>
-        <a:xfrm>
-          <a:off x="0" y="0"/>
-          <a:ext cx="0" cy="0"/>
-          <a:chOff x="0" y="0"/>
-          <a:chExt cx="0" cy="0"/>
-        </a:xfrm>
-      </p:grpSpPr>
-      <p:sp>
-        <p:nvSpPr>
-          <p:cNvPr id="89" name="Google Shape;89;g3ef4563ff73_0_4:notes">
-            <a:extLst>
-              <a:ext uri="{FF2B5EF4-FFF2-40B4-BE49-F238E27FC236}">
-                <a16:creationId xmlns:a16="http://schemas.microsoft.com/office/drawing/2014/main" id="{C356C650-5882-B701-9D00-DC0BF755BC51}"/>
-              </a:ext>
-            </a:extLst>
-          </p:cNvPr>
-          <p:cNvSpPr txBox="1">
-            <a:spLocks noGrp="1"/>
-          </p:cNvSpPr>
-          <p:nvPr>
-            <p:ph type="body" idx="1"/>
-          </p:nvPr>
-        </p:nvSpPr>
-        <p:spPr>
-          <a:xfrm>
-            <a:off x="685800" y="4343400"/>
-            <a:ext cx="5486400" cy="4114800"/>
-          </a:xfrm>
-          <a:prstGeom prst="rect">
-            <a:avLst/>
-          </a:prstGeom>
-        </p:spPr>
-        <p:txBody>
-          <a:bodyPr spcFirstLastPara="1" wrap="square" lIns="91425" tIns="91425" rIns="91425" bIns="91425" anchor="t" anchorCtr="0">
-            <a:noAutofit/>
-          </a:bodyPr>
-          <a:lstStyle/>
-          <a:p>
-            <a:pPr marL="0" lvl="0" indent="0" algn="l" rtl="0">
-              <a:spcBef>
-                <a:spcPts val="0"/>
-              </a:spcBef>
-              <a:spcAft>
-                <a:spcPts val="0"/>
-              </a:spcAft>
-              <a:buNone/>
-            </a:pPr>
-            <a:r>
-              <a:rPr lang="en-US" b="0" dirty="0"/>
-              <a:t>Crossplane standardizes multi-resource orchestration; Kubebuilder gives direct control over every reconciliation step.</a:t>
-            </a:r>
-            <a:endParaRPr b="0" dirty="0"/>
-          </a:p>
-        </p:txBody>
-      </p:sp>
-      <p:sp>
-        <p:nvSpPr>
-          <p:cNvPr id="90" name="Google Shape;90;g3ef4563ff73_0_4:notes">
-            <a:extLst>
-              <a:ext uri="{FF2B5EF4-FFF2-40B4-BE49-F238E27FC236}">
-                <a16:creationId xmlns:a16="http://schemas.microsoft.com/office/drawing/2014/main" id="{83809112-65AC-37FE-F1A1-9B3B46E90ECE}"/>
-              </a:ext>
-            </a:extLst>
-          </p:cNvPr>
-          <p:cNvSpPr>
-            <a:spLocks noGrp="1" noRot="1" noChangeAspect="1"/>
-          </p:cNvSpPr>
-          <p:nvPr>
-            <p:ph type="sldImg" idx="2"/>
-          </p:nvPr>
-        </p:nvSpPr>
-        <p:spPr>
-          <a:xfrm>
-            <a:off x="381000" y="685800"/>
-            <a:ext cx="6096000" cy="3429000"/>
-          </a:xfrm>
-          <a:custGeom>
-            <a:avLst/>
-            <a:gdLst/>
-            <a:ahLst/>
-            <a:cxnLst/>
-            <a:rect l="l" t="t" r="r" b="b"/>
-            <a:pathLst>
-              <a:path w="120000" h="120000" extrusionOk="0">
-                <a:moveTo>
-                  <a:pt x="0" y="0"/>
-                </a:moveTo>
-                <a:lnTo>
-                  <a:pt x="120000" y="0"/>
-                </a:lnTo>
-                <a:lnTo>
-                  <a:pt x="120000" y="120000"/>
-                </a:lnTo>
-                <a:lnTo>
-                  <a:pt x="0" y="120000"/>
-                </a:lnTo>
-                <a:close/>
-              </a:path>
-            </a:pathLst>
-          </a:custGeom>
-        </p:spPr>
-        <p:txBody>
-          <a:bodyPr/>
-          <a:lstStyle/>
-          <a:p>
-            <a:endParaRPr lang="en-US"/>
-          </a:p>
-        </p:txBody>
-      </p:sp>
-    </p:spTree>
-    <p:extLst>
-      <p:ext uri="{BB962C8B-B14F-4D97-AF65-F5344CB8AC3E}">
-        <p14:creationId xmlns:p14="http://schemas.microsoft.com/office/powerpoint/2010/main" val="2559806042"/>
       </p:ext>
     </p:extLst>
   </p:cSld>
@@ -2339,6 +7141,282 @@
         <p:cNvPr id="1" name="Shape 88">
           <a:extLst>
             <a:ext uri="{FF2B5EF4-FFF2-40B4-BE49-F238E27FC236}">
+              <a16:creationId xmlns:a16="http://schemas.microsoft.com/office/drawing/2014/main" id="{6BE29F1E-0032-E247-9C19-3241C1FD7090}"/>
+            </a:ext>
+          </a:extLst>
+        </p:cNvPr>
+        <p:cNvGrpSpPr/>
+        <p:nvPr/>
+      </p:nvGrpSpPr>
+      <p:grpSpPr>
+        <a:xfrm>
+          <a:off x="0" y="0"/>
+          <a:ext cx="0" cy="0"/>
+          <a:chOff x="0" y="0"/>
+          <a:chExt cx="0" cy="0"/>
+        </a:xfrm>
+      </p:grpSpPr>
+      <p:sp>
+        <p:nvSpPr>
+          <p:cNvPr id="89" name="Google Shape;89;g3ef4563ff73_0_4:notes">
+            <a:extLst>
+              <a:ext uri="{FF2B5EF4-FFF2-40B4-BE49-F238E27FC236}">
+                <a16:creationId xmlns:a16="http://schemas.microsoft.com/office/drawing/2014/main" id="{3B9DAD09-8985-450B-4E46-F1A76822304B}"/>
+              </a:ext>
+            </a:extLst>
+          </p:cNvPr>
+          <p:cNvSpPr txBox="1">
+            <a:spLocks noGrp="1"/>
+          </p:cNvSpPr>
+          <p:nvPr>
+            <p:ph type="body" idx="1"/>
+          </p:nvPr>
+        </p:nvSpPr>
+        <p:spPr>
+          <a:xfrm>
+            <a:off x="685800" y="4343400"/>
+            <a:ext cx="5486400" cy="4114800"/>
+          </a:xfrm>
+          <a:prstGeom prst="rect">
+            <a:avLst/>
+          </a:prstGeom>
+        </p:spPr>
+        <p:txBody>
+          <a:bodyPr spcFirstLastPara="1" wrap="square" lIns="91425" tIns="91425" rIns="91425" bIns="91425" anchor="t" anchorCtr="0">
+            <a:noAutofit/>
+          </a:bodyPr>
+          <a:lstStyle/>
+          <a:p>
+            <a:pPr marL="0" lvl="0" indent="0" algn="l" rtl="0">
+              <a:spcBef>
+                <a:spcPts val="0"/>
+              </a:spcBef>
+              <a:spcAft>
+                <a:spcPts val="0"/>
+              </a:spcAft>
+              <a:buNone/>
+            </a:pPr>
+            <a:r>
+              <a:rPr lang="en-US" dirty="0"/>
+              <a:t>Strong separation of the layers, Multiple reconciliation layers introduce overhead</a:t>
+            </a:r>
+            <a:endParaRPr dirty="0"/>
+          </a:p>
+        </p:txBody>
+      </p:sp>
+      <p:sp>
+        <p:nvSpPr>
+          <p:cNvPr id="90" name="Google Shape;90;g3ef4563ff73_0_4:notes">
+            <a:extLst>
+              <a:ext uri="{FF2B5EF4-FFF2-40B4-BE49-F238E27FC236}">
+                <a16:creationId xmlns:a16="http://schemas.microsoft.com/office/drawing/2014/main" id="{C8BE1C5A-3787-C6B7-0757-A312DB404F2C}"/>
+              </a:ext>
+            </a:extLst>
+          </p:cNvPr>
+          <p:cNvSpPr>
+            <a:spLocks noGrp="1" noRot="1" noChangeAspect="1"/>
+          </p:cNvSpPr>
+          <p:nvPr>
+            <p:ph type="sldImg" idx="2"/>
+          </p:nvPr>
+        </p:nvSpPr>
+        <p:spPr>
+          <a:xfrm>
+            <a:off x="381000" y="685800"/>
+            <a:ext cx="6096000" cy="3429000"/>
+          </a:xfrm>
+          <a:custGeom>
+            <a:avLst/>
+            <a:gdLst/>
+            <a:ahLst/>
+            <a:cxnLst/>
+            <a:rect l="l" t="t" r="r" b="b"/>
+            <a:pathLst>
+              <a:path w="120000" h="120000" extrusionOk="0">
+                <a:moveTo>
+                  <a:pt x="0" y="0"/>
+                </a:moveTo>
+                <a:lnTo>
+                  <a:pt x="120000" y="0"/>
+                </a:lnTo>
+                <a:lnTo>
+                  <a:pt x="120000" y="120000"/>
+                </a:lnTo>
+                <a:lnTo>
+                  <a:pt x="0" y="120000"/>
+                </a:lnTo>
+                <a:close/>
+              </a:path>
+            </a:pathLst>
+          </a:custGeom>
+        </p:spPr>
+        <p:txBody>
+          <a:bodyPr/>
+          <a:lstStyle/>
+          <a:p>
+            <a:endParaRPr lang="en-US"/>
+          </a:p>
+        </p:txBody>
+      </p:sp>
+    </p:spTree>
+    <p:extLst>
+      <p:ext uri="{BB962C8B-B14F-4D97-AF65-F5344CB8AC3E}">
+        <p14:creationId xmlns:p14="http://schemas.microsoft.com/office/powerpoint/2010/main" val="69389952"/>
+      </p:ext>
+    </p:extLst>
+  </p:cSld>
+  <p:clrMapOvr>
+    <a:masterClrMapping/>
+  </p:clrMapOvr>
+</p:notes>
+</file>
+
+<file path=ppt/notesSlides/notesSlide21.xml><?xml version="1.0" encoding="utf-8"?>
+<p:notes xmlns:a="http://schemas.openxmlformats.org/drawingml/2006/main" xmlns:r="http://schemas.openxmlformats.org/officeDocument/2006/relationships" xmlns:p="http://schemas.openxmlformats.org/presentationml/2006/main" showMasterSp="0" showMasterPhAnim="0">
+  <p:cSld>
+    <p:spTree>
+      <p:nvGrpSpPr>
+        <p:cNvPr id="1" name="Shape 88">
+          <a:extLst>
+            <a:ext uri="{FF2B5EF4-FFF2-40B4-BE49-F238E27FC236}">
+              <a16:creationId xmlns:a16="http://schemas.microsoft.com/office/drawing/2014/main" id="{AF15ACB3-E2A3-6860-B994-66CBF116185B}"/>
+            </a:ext>
+          </a:extLst>
+        </p:cNvPr>
+        <p:cNvGrpSpPr/>
+        <p:nvPr/>
+      </p:nvGrpSpPr>
+      <p:grpSpPr>
+        <a:xfrm>
+          <a:off x="0" y="0"/>
+          <a:ext cx="0" cy="0"/>
+          <a:chOff x="0" y="0"/>
+          <a:chExt cx="0" cy="0"/>
+        </a:xfrm>
+      </p:grpSpPr>
+      <p:sp>
+        <p:nvSpPr>
+          <p:cNvPr id="89" name="Google Shape;89;g3ef4563ff73_0_4:notes">
+            <a:extLst>
+              <a:ext uri="{FF2B5EF4-FFF2-40B4-BE49-F238E27FC236}">
+                <a16:creationId xmlns:a16="http://schemas.microsoft.com/office/drawing/2014/main" id="{C356C650-5882-B701-9D00-DC0BF755BC51}"/>
+              </a:ext>
+            </a:extLst>
+          </p:cNvPr>
+          <p:cNvSpPr txBox="1">
+            <a:spLocks noGrp="1"/>
+          </p:cNvSpPr>
+          <p:nvPr>
+            <p:ph type="body" idx="1"/>
+          </p:nvPr>
+        </p:nvSpPr>
+        <p:spPr>
+          <a:xfrm>
+            <a:off x="685800" y="4343400"/>
+            <a:ext cx="5486400" cy="4114800"/>
+          </a:xfrm>
+          <a:prstGeom prst="rect">
+            <a:avLst/>
+          </a:prstGeom>
+        </p:spPr>
+        <p:txBody>
+          <a:bodyPr spcFirstLastPara="1" wrap="square" lIns="91425" tIns="91425" rIns="91425" bIns="91425" anchor="t" anchorCtr="0">
+            <a:noAutofit/>
+          </a:bodyPr>
+          <a:lstStyle/>
+          <a:p>
+            <a:pPr marL="0" lvl="0" indent="0" algn="l" rtl="0">
+              <a:spcBef>
+                <a:spcPts val="0"/>
+              </a:spcBef>
+              <a:spcAft>
+                <a:spcPts val="0"/>
+              </a:spcAft>
+              <a:buNone/>
+            </a:pPr>
+            <a:r>
+              <a:rPr lang="en-US" b="0" dirty="0"/>
+              <a:t>Crossplane standardizes multi-resource orchestration; Kubebuilder gives direct control over every reconciliation step.</a:t>
+            </a:r>
+            <a:endParaRPr b="0" dirty="0"/>
+          </a:p>
+        </p:txBody>
+      </p:sp>
+      <p:sp>
+        <p:nvSpPr>
+          <p:cNvPr id="90" name="Google Shape;90;g3ef4563ff73_0_4:notes">
+            <a:extLst>
+              <a:ext uri="{FF2B5EF4-FFF2-40B4-BE49-F238E27FC236}">
+                <a16:creationId xmlns:a16="http://schemas.microsoft.com/office/drawing/2014/main" id="{83809112-65AC-37FE-F1A1-9B3B46E90ECE}"/>
+              </a:ext>
+            </a:extLst>
+          </p:cNvPr>
+          <p:cNvSpPr>
+            <a:spLocks noGrp="1" noRot="1" noChangeAspect="1"/>
+          </p:cNvSpPr>
+          <p:nvPr>
+            <p:ph type="sldImg" idx="2"/>
+          </p:nvPr>
+        </p:nvSpPr>
+        <p:spPr>
+          <a:xfrm>
+            <a:off x="381000" y="685800"/>
+            <a:ext cx="6096000" cy="3429000"/>
+          </a:xfrm>
+          <a:custGeom>
+            <a:avLst/>
+            <a:gdLst/>
+            <a:ahLst/>
+            <a:cxnLst/>
+            <a:rect l="l" t="t" r="r" b="b"/>
+            <a:pathLst>
+              <a:path w="120000" h="120000" extrusionOk="0">
+                <a:moveTo>
+                  <a:pt x="0" y="0"/>
+                </a:moveTo>
+                <a:lnTo>
+                  <a:pt x="120000" y="0"/>
+                </a:lnTo>
+                <a:lnTo>
+                  <a:pt x="120000" y="120000"/>
+                </a:lnTo>
+                <a:lnTo>
+                  <a:pt x="0" y="120000"/>
+                </a:lnTo>
+                <a:close/>
+              </a:path>
+            </a:pathLst>
+          </a:custGeom>
+        </p:spPr>
+        <p:txBody>
+          <a:bodyPr/>
+          <a:lstStyle/>
+          <a:p>
+            <a:endParaRPr lang="en-US"/>
+          </a:p>
+        </p:txBody>
+      </p:sp>
+    </p:spTree>
+    <p:extLst>
+      <p:ext uri="{BB962C8B-B14F-4D97-AF65-F5344CB8AC3E}">
+        <p14:creationId xmlns:p14="http://schemas.microsoft.com/office/powerpoint/2010/main" val="2559806042"/>
+      </p:ext>
+    </p:extLst>
+  </p:cSld>
+  <p:clrMapOvr>
+    <a:masterClrMapping/>
+  </p:clrMapOvr>
+</p:notes>
+</file>
+
+<file path=ppt/notesSlides/notesSlide22.xml><?xml version="1.0" encoding="utf-8"?>
+<p:notes xmlns:a="http://schemas.openxmlformats.org/drawingml/2006/main" xmlns:r="http://schemas.openxmlformats.org/officeDocument/2006/relationships" xmlns:p="http://schemas.openxmlformats.org/presentationml/2006/main" showMasterSp="0" showMasterPhAnim="0">
+  <p:cSld>
+    <p:spTree>
+      <p:nvGrpSpPr>
+        <p:cNvPr id="1" name="Shape 88">
+          <a:extLst>
+            <a:ext uri="{FF2B5EF4-FFF2-40B4-BE49-F238E27FC236}">
               <a16:creationId xmlns:a16="http://schemas.microsoft.com/office/drawing/2014/main" id="{AF3F9182-3361-2C14-3BA8-288C799E8DC2}"/>
             </a:ext>
           </a:extLst>
@@ -2469,7 +7547,7 @@
 </p:notes>
 </file>
 
-<file path=ppt/notesSlides/notesSlide21.xml><?xml version="1.0" encoding="utf-8"?>
+<file path=ppt/notesSlides/notesSlide23.xml><?xml version="1.0" encoding="utf-8"?>
 <p:notes xmlns:a="http://schemas.openxmlformats.org/drawingml/2006/main" xmlns:r="http://schemas.openxmlformats.org/officeDocument/2006/relationships" xmlns:p="http://schemas.openxmlformats.org/presentationml/2006/main" showMasterSp="0" showMasterPhAnim="0">
   <p:cSld>
     <p:spTree>
@@ -2607,7 +7685,7 @@
 </p:notes>
 </file>
 
-<file path=ppt/notesSlides/notesSlide22.xml><?xml version="1.0" encoding="utf-8"?>
+<file path=ppt/notesSlides/notesSlide24.xml><?xml version="1.0" encoding="utf-8"?>
 <p:notes xmlns:a="http://schemas.openxmlformats.org/drawingml/2006/main" xmlns:r="http://schemas.openxmlformats.org/officeDocument/2006/relationships" xmlns:p="http://schemas.openxmlformats.org/presentationml/2006/main" showMasterSp="0" showMasterPhAnim="0">
   <p:cSld>
     <p:spTree>
@@ -15251,7 +20329,7 @@
         </p:blipFill>
         <p:spPr>
           <a:xfrm>
-            <a:off x="5501048" y="2679364"/>
+            <a:off x="4419008" y="2679364"/>
             <a:ext cx="2770909" cy="4094425"/>
           </a:xfrm>
           <a:prstGeom prst="rect">
@@ -15273,8 +20351,8 @@
         </p:nvSpPr>
         <p:spPr>
           <a:xfrm>
-            <a:off x="5501049" y="2296002"/>
-            <a:ext cx="8744953" cy="338554"/>
+            <a:off x="4419009" y="2296001"/>
+            <a:ext cx="2499951" cy="342963"/>
           </a:xfrm>
           <a:prstGeom prst="rect">
             <a:avLst/>
@@ -15306,6 +20384,76 @@
           </a:p>
         </p:txBody>
       </p:sp>
+      <p:sp>
+        <p:nvSpPr>
+          <p:cNvPr id="7" name="TextBox 6">
+            <a:extLst>
+              <a:ext uri="{FF2B5EF4-FFF2-40B4-BE49-F238E27FC236}">
+                <a16:creationId xmlns:a16="http://schemas.microsoft.com/office/drawing/2014/main" id="{26E59B9F-40A0-0BA5-8623-27513E3420C2}"/>
+              </a:ext>
+            </a:extLst>
+          </p:cNvPr>
+          <p:cNvSpPr txBox="1"/>
+          <p:nvPr/>
+        </p:nvSpPr>
+        <p:spPr>
+          <a:xfrm>
+            <a:off x="7849535" y="2298205"/>
+            <a:ext cx="5179501" cy="338554"/>
+          </a:xfrm>
+          <a:prstGeom prst="rect">
+            <a:avLst/>
+          </a:prstGeom>
+          <a:noFill/>
+        </p:spPr>
+        <p:txBody>
+          <a:bodyPr wrap="square" rtlCol="0">
+            <a:spAutoFit/>
+          </a:bodyPr>
+          <a:lstStyle/>
+          <a:p>
+            <a:r>
+              <a:rPr lang="en-US" sz="1600" dirty="0"/>
+              <a:t>compositions/</a:t>
+            </a:r>
+            <a:r>
+              <a:rPr lang="en-US" sz="1600" dirty="0" err="1"/>
+              <a:t>datastream_composition.yaml</a:t>
+            </a:r>
+            <a:endParaRPr lang="en-US" sz="1600" dirty="0"/>
+          </a:p>
+        </p:txBody>
+      </p:sp>
+      <p:pic>
+        <p:nvPicPr>
+          <p:cNvPr id="11" name="Picture 10">
+            <a:extLst>
+              <a:ext uri="{FF2B5EF4-FFF2-40B4-BE49-F238E27FC236}">
+                <a16:creationId xmlns:a16="http://schemas.microsoft.com/office/drawing/2014/main" id="{39BCEFFD-DF7D-241E-8CA8-1646B27BB681}"/>
+              </a:ext>
+            </a:extLst>
+          </p:cNvPr>
+          <p:cNvPicPr>
+            <a:picLocks noChangeAspect="1"/>
+          </p:cNvPicPr>
+          <p:nvPr/>
+        </p:nvPicPr>
+        <p:blipFill>
+          <a:blip r:embed="rId5"/>
+          <a:stretch>
+            <a:fillRect/>
+          </a:stretch>
+        </p:blipFill>
+        <p:spPr>
+          <a:xfrm>
+            <a:off x="7910153" y="2636759"/>
+            <a:ext cx="4055562" cy="3852446"/>
+          </a:xfrm>
+          <a:prstGeom prst="rect">
+            <a:avLst/>
+          </a:prstGeom>
+        </p:spPr>
+      </p:pic>
     </p:spTree>
     <p:extLst>
       <p:ext uri="{BB962C8B-B14F-4D97-AF65-F5344CB8AC3E}">
@@ -15687,37 +20835,6 @@
           </a:prstGeom>
         </p:spPr>
       </p:pic>
-      <p:pic>
-        <p:nvPicPr>
-          <p:cNvPr id="7" name="Picture 6">
-            <a:extLst>
-              <a:ext uri="{FF2B5EF4-FFF2-40B4-BE49-F238E27FC236}">
-                <a16:creationId xmlns:a16="http://schemas.microsoft.com/office/drawing/2014/main" id="{85C79353-DF8A-E0C7-BAB9-CBF703C8F48F}"/>
-              </a:ext>
-            </a:extLst>
-          </p:cNvPr>
-          <p:cNvPicPr>
-            <a:picLocks noChangeAspect="1"/>
-          </p:cNvPicPr>
-          <p:nvPr/>
-        </p:nvPicPr>
-        <p:blipFill>
-          <a:blip r:embed="rId4"/>
-          <a:srcRect t="36909"/>
-          <a:stretch>
-            <a:fillRect/>
-          </a:stretch>
-        </p:blipFill>
-        <p:spPr>
-          <a:xfrm>
-            <a:off x="6013797" y="2103535"/>
-            <a:ext cx="3836211" cy="4326766"/>
-          </a:xfrm>
-          <a:prstGeom prst="rect">
-            <a:avLst/>
-          </a:prstGeom>
-        </p:spPr>
-      </p:pic>
       <p:sp>
         <p:nvSpPr>
           <p:cNvPr id="11" name="TextBox 10">
@@ -15848,6 +20965,75 @@
           </a:p>
         </p:txBody>
       </p:sp>
+      <p:sp>
+        <p:nvSpPr>
+          <p:cNvPr id="6" name="TextBox 5">
+            <a:extLst>
+              <a:ext uri="{FF2B5EF4-FFF2-40B4-BE49-F238E27FC236}">
+                <a16:creationId xmlns:a16="http://schemas.microsoft.com/office/drawing/2014/main" id="{BDE4E20A-77D0-3990-0D78-D79B8DF35E58}"/>
+              </a:ext>
+            </a:extLst>
+          </p:cNvPr>
+          <p:cNvSpPr txBox="1"/>
+          <p:nvPr/>
+        </p:nvSpPr>
+        <p:spPr>
+          <a:xfrm>
+            <a:off x="5739994" y="2177333"/>
+            <a:ext cx="4504634" cy="307777"/>
+          </a:xfrm>
+          <a:prstGeom prst="rect">
+            <a:avLst/>
+          </a:prstGeom>
+          <a:noFill/>
+        </p:spPr>
+        <p:txBody>
+          <a:bodyPr wrap="square">
+            <a:spAutoFit/>
+          </a:bodyPr>
+          <a:lstStyle/>
+          <a:p>
+            <a:r>
+              <a:rPr lang="en-US" dirty="0" err="1"/>
+              <a:t>datastream_controller.go</a:t>
+            </a:r>
+            <a:r>
+              <a:rPr lang="en-US" dirty="0"/>
+              <a:t>:</a:t>
+            </a:r>
+          </a:p>
+        </p:txBody>
+      </p:sp>
+      <p:pic>
+        <p:nvPicPr>
+          <p:cNvPr id="14" name="Picture 13">
+            <a:extLst>
+              <a:ext uri="{FF2B5EF4-FFF2-40B4-BE49-F238E27FC236}">
+                <a16:creationId xmlns:a16="http://schemas.microsoft.com/office/drawing/2014/main" id="{69C216FA-4AD1-BBD8-5F63-AEDCDFFFD0F6}"/>
+              </a:ext>
+            </a:extLst>
+          </p:cNvPr>
+          <p:cNvPicPr>
+            <a:picLocks noChangeAspect="1"/>
+          </p:cNvPicPr>
+          <p:nvPr/>
+        </p:nvPicPr>
+        <p:blipFill>
+          <a:blip r:embed="rId5"/>
+          <a:stretch>
+            <a:fillRect/>
+          </a:stretch>
+        </p:blipFill>
+        <p:spPr>
+          <a:xfrm>
+            <a:off x="5867179" y="2485110"/>
+            <a:ext cx="5373371" cy="3638495"/>
+          </a:xfrm>
+          <a:prstGeom prst="rect">
+            <a:avLst/>
+          </a:prstGeom>
+        </p:spPr>
+      </p:pic>
     </p:spTree>
     <p:extLst>
       <p:ext uri="{BB962C8B-B14F-4D97-AF65-F5344CB8AC3E}">
@@ -16826,6 +22012,657 @@
   <p:cSld>
     <p:spTree>
       <p:nvGrpSpPr>
+        <p:cNvPr id="1" name="Shape 91">
+          <a:extLst>
+            <a:ext uri="{FF2B5EF4-FFF2-40B4-BE49-F238E27FC236}">
+              <a16:creationId xmlns:a16="http://schemas.microsoft.com/office/drawing/2014/main" id="{0E5E7A41-B7D7-4443-03B2-EEE22C6943E7}"/>
+            </a:ext>
+          </a:extLst>
+        </p:cNvPr>
+        <p:cNvGrpSpPr/>
+        <p:nvPr/>
+      </p:nvGrpSpPr>
+      <p:grpSpPr>
+        <a:xfrm>
+          <a:off x="0" y="0"/>
+          <a:ext cx="0" cy="0"/>
+          <a:chOff x="0" y="0"/>
+          <a:chExt cx="0" cy="0"/>
+        </a:xfrm>
+      </p:grpSpPr>
+      <p:pic>
+        <p:nvPicPr>
+          <p:cNvPr id="92" name="Google Shape;92;p14" title="06_LOGO-Alma-Mater-Studiorum-Universita-di-Bologna.png">
+            <a:extLst>
+              <a:ext uri="{FF2B5EF4-FFF2-40B4-BE49-F238E27FC236}">
+                <a16:creationId xmlns:a16="http://schemas.microsoft.com/office/drawing/2014/main" id="{FBAC122B-3B91-81B1-B114-1F9133885FEB}"/>
+              </a:ext>
+            </a:extLst>
+          </p:cNvPr>
+          <p:cNvPicPr preferRelativeResize="0"/>
+          <p:nvPr/>
+        </p:nvPicPr>
+        <p:blipFill>
+          <a:blip r:embed="rId3">
+            <a:alphaModFix/>
+          </a:blip>
+          <a:stretch>
+            <a:fillRect/>
+          </a:stretch>
+        </p:blipFill>
+        <p:spPr>
+          <a:xfrm>
+            <a:off x="9399175" y="4453350"/>
+            <a:ext cx="1841376" cy="1841376"/>
+          </a:xfrm>
+          <a:prstGeom prst="rect">
+            <a:avLst/>
+          </a:prstGeom>
+          <a:noFill/>
+          <a:ln>
+            <a:noFill/>
+          </a:ln>
+        </p:spPr>
+      </p:pic>
+      <p:sp>
+        <p:nvSpPr>
+          <p:cNvPr id="93" name="Google Shape;93;p14">
+            <a:extLst>
+              <a:ext uri="{FF2B5EF4-FFF2-40B4-BE49-F238E27FC236}">
+                <a16:creationId xmlns:a16="http://schemas.microsoft.com/office/drawing/2014/main" id="{5AD214F5-DF90-09A2-D098-0EA8887871CF}"/>
+              </a:ext>
+            </a:extLst>
+          </p:cNvPr>
+          <p:cNvSpPr txBox="1"/>
+          <p:nvPr/>
+        </p:nvSpPr>
+        <p:spPr>
+          <a:xfrm>
+            <a:off x="243349" y="230500"/>
+            <a:ext cx="10997201" cy="877133"/>
+          </a:xfrm>
+          <a:prstGeom prst="rect">
+            <a:avLst/>
+          </a:prstGeom>
+          <a:noFill/>
+          <a:ln>
+            <a:noFill/>
+          </a:ln>
+        </p:spPr>
+        <p:txBody>
+          <a:bodyPr spcFirstLastPara="1" wrap="square" lIns="91425" tIns="91425" rIns="91425" bIns="91425" anchor="t" anchorCtr="0">
+            <a:spAutoFit/>
+          </a:bodyPr>
+          <a:lstStyle/>
+          <a:p>
+            <a:pPr lvl="0"/>
+            <a:r>
+              <a:rPr lang="en-US" sz="4500" b="1" dirty="0">
+                <a:solidFill>
+                  <a:schemeClr val="dk1"/>
+                </a:solidFill>
+              </a:rPr>
+              <a:t>Resource consumption</a:t>
+            </a:r>
+            <a:endParaRPr sz="4500" b="1" dirty="0">
+              <a:solidFill>
+                <a:schemeClr val="dk1"/>
+              </a:solidFill>
+            </a:endParaRPr>
+          </a:p>
+        </p:txBody>
+      </p:sp>
+      <p:sp>
+        <p:nvSpPr>
+          <p:cNvPr id="2" name="Slide Number Placeholder 1">
+            <a:extLst>
+              <a:ext uri="{FF2B5EF4-FFF2-40B4-BE49-F238E27FC236}">
+                <a16:creationId xmlns:a16="http://schemas.microsoft.com/office/drawing/2014/main" id="{301F6968-E35E-40C3-E35D-D926EA4498D5}"/>
+              </a:ext>
+            </a:extLst>
+          </p:cNvPr>
+          <p:cNvSpPr>
+            <a:spLocks noGrp="1"/>
+          </p:cNvSpPr>
+          <p:nvPr>
+            <p:ph type="sldNum" idx="12"/>
+          </p:nvPr>
+        </p:nvSpPr>
+        <p:spPr>
+          <a:xfrm>
+            <a:off x="417864" y="6294726"/>
+            <a:ext cx="1597572" cy="271150"/>
+          </a:xfrm>
+        </p:spPr>
+        <p:txBody>
+          <a:bodyPr/>
+          <a:lstStyle/>
+          <a:p>
+            <a:pPr marL="0" lvl="0" indent="0" algn="l" rtl="0">
+              <a:spcBef>
+                <a:spcPts val="0"/>
+              </a:spcBef>
+              <a:spcAft>
+                <a:spcPts val="0"/>
+              </a:spcAft>
+              <a:buNone/>
+            </a:pPr>
+            <a:fld id="{00000000-1234-1234-1234-123412341234}" type="slidenum">
+              <a:rPr lang="en-US" smtClean="0"/>
+              <a:pPr marL="0" lvl="0" indent="0" algn="l" rtl="0">
+                <a:spcBef>
+                  <a:spcPts val="0"/>
+                </a:spcBef>
+                <a:spcAft>
+                  <a:spcPts val="0"/>
+                </a:spcAft>
+                <a:buNone/>
+              </a:pPr>
+              <a:t>15</a:t>
+            </a:fld>
+            <a:endParaRPr lang="en-US" dirty="0"/>
+          </a:p>
+        </p:txBody>
+      </p:sp>
+      <p:sp>
+        <p:nvSpPr>
+          <p:cNvPr id="6" name="TextBox 5">
+            <a:extLst>
+              <a:ext uri="{FF2B5EF4-FFF2-40B4-BE49-F238E27FC236}">
+                <a16:creationId xmlns:a16="http://schemas.microsoft.com/office/drawing/2014/main" id="{E5E43C8A-1BE9-48A3-5CC3-76197BD19F8C}"/>
+              </a:ext>
+            </a:extLst>
+          </p:cNvPr>
+          <p:cNvSpPr txBox="1"/>
+          <p:nvPr/>
+        </p:nvSpPr>
+        <p:spPr>
+          <a:xfrm>
+            <a:off x="417864" y="5374038"/>
+            <a:ext cx="6973536" cy="307777"/>
+          </a:xfrm>
+          <a:prstGeom prst="rect">
+            <a:avLst/>
+          </a:prstGeom>
+          <a:noFill/>
+        </p:spPr>
+        <p:txBody>
+          <a:bodyPr wrap="square">
+            <a:spAutoFit/>
+          </a:bodyPr>
+          <a:lstStyle/>
+          <a:p>
+            <a:r>
+              <a:rPr lang="en-US" dirty="0"/>
+              <a:t>X-axis: batch size, the number of DataStream resources created together (N)</a:t>
+            </a:r>
+          </a:p>
+        </p:txBody>
+      </p:sp>
+      <p:sp>
+        <p:nvSpPr>
+          <p:cNvPr id="8" name="TextBox 7">
+            <a:extLst>
+              <a:ext uri="{FF2B5EF4-FFF2-40B4-BE49-F238E27FC236}">
+                <a16:creationId xmlns:a16="http://schemas.microsoft.com/office/drawing/2014/main" id="{2B85FE6D-1305-58CA-88BD-00BD5540A0A0}"/>
+              </a:ext>
+            </a:extLst>
+          </p:cNvPr>
+          <p:cNvSpPr txBox="1"/>
+          <p:nvPr/>
+        </p:nvSpPr>
+        <p:spPr>
+          <a:xfrm>
+            <a:off x="417864" y="5609071"/>
+            <a:ext cx="10006296" cy="307777"/>
+          </a:xfrm>
+          <a:prstGeom prst="rect">
+            <a:avLst/>
+          </a:prstGeom>
+          <a:noFill/>
+        </p:spPr>
+        <p:txBody>
+          <a:bodyPr wrap="square">
+            <a:spAutoFit/>
+          </a:bodyPr>
+          <a:lstStyle/>
+          <a:p>
+            <a:r>
+              <a:rPr lang="en-US" dirty="0"/>
+              <a:t>Y-axis: average CPU rate (</a:t>
+            </a:r>
+            <a:r>
+              <a:rPr lang="en-US" dirty="0" err="1"/>
+              <a:t>millicores</a:t>
+            </a:r>
+            <a:r>
+              <a:rPr lang="en-US" dirty="0"/>
+              <a:t>)/RAM usage each component sustained while it was actively reconciling that batch </a:t>
+            </a:r>
+          </a:p>
+        </p:txBody>
+      </p:sp>
+      <p:sp>
+        <p:nvSpPr>
+          <p:cNvPr id="11" name="TextBox 10">
+            <a:extLst>
+              <a:ext uri="{FF2B5EF4-FFF2-40B4-BE49-F238E27FC236}">
+                <a16:creationId xmlns:a16="http://schemas.microsoft.com/office/drawing/2014/main" id="{8600C20A-8A4F-0999-C9CB-49FC6EE615AF}"/>
+              </a:ext>
+            </a:extLst>
+          </p:cNvPr>
+          <p:cNvSpPr txBox="1"/>
+          <p:nvPr/>
+        </p:nvSpPr>
+        <p:spPr>
+          <a:xfrm>
+            <a:off x="399963" y="5986948"/>
+            <a:ext cx="11240736" cy="307777"/>
+          </a:xfrm>
+          <a:prstGeom prst="rect">
+            <a:avLst/>
+          </a:prstGeom>
+          <a:noFill/>
+        </p:spPr>
+        <p:txBody>
+          <a:bodyPr wrap="square">
+            <a:spAutoFit/>
+          </a:bodyPr>
+          <a:lstStyle/>
+          <a:p>
+            <a:r>
+              <a:rPr lang="en-US" dirty="0"/>
+              <a:t>*Crossplane measurements includes the full control plane (core + providers + functions).</a:t>
+            </a:r>
+          </a:p>
+        </p:txBody>
+      </p:sp>
+      <p:graphicFrame>
+        <p:nvGraphicFramePr>
+          <p:cNvPr id="12" name="Chart 11">
+            <a:extLst>
+              <a:ext uri="{FF2B5EF4-FFF2-40B4-BE49-F238E27FC236}">
+                <a16:creationId xmlns:a16="http://schemas.microsoft.com/office/drawing/2014/main" id="{66AA30DF-8AA8-4E99-ACB0-E0C43003BE3A}"/>
+              </a:ext>
+            </a:extLst>
+          </p:cNvPr>
+          <p:cNvGraphicFramePr>
+            <a:graphicFrameLocks/>
+          </p:cNvGraphicFramePr>
+          <p:nvPr>
+            <p:extLst>
+              <p:ext uri="{D42A27DB-BD31-4B8C-83A1-F6EECF244321}">
+                <p14:modId xmlns:p14="http://schemas.microsoft.com/office/powerpoint/2010/main" val="1219304491"/>
+              </p:ext>
+            </p:extLst>
+          </p:nvPr>
+        </p:nvGraphicFramePr>
+        <p:xfrm>
+          <a:off x="6096000" y="1697826"/>
+          <a:ext cx="5639925" cy="3063302"/>
+        </p:xfrm>
+        <a:graphic>
+          <a:graphicData uri="http://schemas.openxmlformats.org/drawingml/2006/chart">
+            <c:chart xmlns:c="http://schemas.openxmlformats.org/drawingml/2006/chart" xmlns:r="http://schemas.openxmlformats.org/officeDocument/2006/relationships" r:id="rId4"/>
+          </a:graphicData>
+        </a:graphic>
+      </p:graphicFrame>
+      <p:graphicFrame>
+        <p:nvGraphicFramePr>
+          <p:cNvPr id="15" name="Chart 14">
+            <a:extLst>
+              <a:ext uri="{FF2B5EF4-FFF2-40B4-BE49-F238E27FC236}">
+                <a16:creationId xmlns:a16="http://schemas.microsoft.com/office/drawing/2014/main" id="{B9E46A87-AC35-4752-948D-302F9E6FE124}"/>
+              </a:ext>
+            </a:extLst>
+          </p:cNvPr>
+          <p:cNvGraphicFramePr>
+            <a:graphicFrameLocks/>
+          </p:cNvGraphicFramePr>
+          <p:nvPr>
+            <p:extLst>
+              <p:ext uri="{D42A27DB-BD31-4B8C-83A1-F6EECF244321}">
+                <p14:modId xmlns:p14="http://schemas.microsoft.com/office/powerpoint/2010/main" val="3182782365"/>
+              </p:ext>
+            </p:extLst>
+          </p:nvPr>
+        </p:nvGraphicFramePr>
+        <p:xfrm>
+          <a:off x="243349" y="1742701"/>
+          <a:ext cx="5639925" cy="2996268"/>
+        </p:xfrm>
+        <a:graphic>
+          <a:graphicData uri="http://schemas.openxmlformats.org/drawingml/2006/chart">
+            <c:chart xmlns:c="http://schemas.openxmlformats.org/drawingml/2006/chart" xmlns:r="http://schemas.openxmlformats.org/officeDocument/2006/relationships" r:id="rId5"/>
+          </a:graphicData>
+        </a:graphic>
+      </p:graphicFrame>
+    </p:spTree>
+    <p:extLst>
+      <p:ext uri="{BB962C8B-B14F-4D97-AF65-F5344CB8AC3E}">
+        <p14:creationId xmlns:p14="http://schemas.microsoft.com/office/powerpoint/2010/main" val="1486822299"/>
+      </p:ext>
+    </p:extLst>
+  </p:cSld>
+  <p:clrMapOvr>
+    <a:masterClrMapping/>
+  </p:clrMapOvr>
+</p:sld>
+</file>
+
+<file path=ppt/slides/slide16.xml><?xml version="1.0" encoding="utf-8"?>
+<p:sld xmlns:a="http://schemas.openxmlformats.org/drawingml/2006/main" xmlns:r="http://schemas.openxmlformats.org/officeDocument/2006/relationships" xmlns:p="http://schemas.openxmlformats.org/presentationml/2006/main">
+  <p:cSld>
+    <p:spTree>
+      <p:nvGrpSpPr>
+        <p:cNvPr id="1" name="Shape 91">
+          <a:extLst>
+            <a:ext uri="{FF2B5EF4-FFF2-40B4-BE49-F238E27FC236}">
+              <a16:creationId xmlns:a16="http://schemas.microsoft.com/office/drawing/2014/main" id="{34B0ED4B-129A-9E73-AF26-87FFB725125C}"/>
+            </a:ext>
+          </a:extLst>
+        </p:cNvPr>
+        <p:cNvGrpSpPr/>
+        <p:nvPr/>
+      </p:nvGrpSpPr>
+      <p:grpSpPr>
+        <a:xfrm>
+          <a:off x="0" y="0"/>
+          <a:ext cx="0" cy="0"/>
+          <a:chOff x="0" y="0"/>
+          <a:chExt cx="0" cy="0"/>
+        </a:xfrm>
+      </p:grpSpPr>
+      <p:pic>
+        <p:nvPicPr>
+          <p:cNvPr id="92" name="Google Shape;92;p14" title="06_LOGO-Alma-Mater-Studiorum-Universita-di-Bologna.png">
+            <a:extLst>
+              <a:ext uri="{FF2B5EF4-FFF2-40B4-BE49-F238E27FC236}">
+                <a16:creationId xmlns:a16="http://schemas.microsoft.com/office/drawing/2014/main" id="{48021BD9-D713-47B1-D9A1-FC76A227B7A5}"/>
+              </a:ext>
+            </a:extLst>
+          </p:cNvPr>
+          <p:cNvPicPr preferRelativeResize="0"/>
+          <p:nvPr/>
+        </p:nvPicPr>
+        <p:blipFill>
+          <a:blip r:embed="rId3">
+            <a:alphaModFix/>
+          </a:blip>
+          <a:stretch>
+            <a:fillRect/>
+          </a:stretch>
+        </p:blipFill>
+        <p:spPr>
+          <a:xfrm>
+            <a:off x="9399175" y="4453350"/>
+            <a:ext cx="1841376" cy="1841376"/>
+          </a:xfrm>
+          <a:prstGeom prst="rect">
+            <a:avLst/>
+          </a:prstGeom>
+          <a:noFill/>
+          <a:ln>
+            <a:noFill/>
+          </a:ln>
+        </p:spPr>
+      </p:pic>
+      <p:sp>
+        <p:nvSpPr>
+          <p:cNvPr id="93" name="Google Shape;93;p14">
+            <a:extLst>
+              <a:ext uri="{FF2B5EF4-FFF2-40B4-BE49-F238E27FC236}">
+                <a16:creationId xmlns:a16="http://schemas.microsoft.com/office/drawing/2014/main" id="{1680F885-061E-ED93-58D9-EFE4F3D25B2C}"/>
+              </a:ext>
+            </a:extLst>
+          </p:cNvPr>
+          <p:cNvSpPr txBox="1"/>
+          <p:nvPr/>
+        </p:nvSpPr>
+        <p:spPr>
+          <a:xfrm>
+            <a:off x="243349" y="230500"/>
+            <a:ext cx="10997201" cy="877133"/>
+          </a:xfrm>
+          <a:prstGeom prst="rect">
+            <a:avLst/>
+          </a:prstGeom>
+          <a:noFill/>
+          <a:ln>
+            <a:noFill/>
+          </a:ln>
+        </p:spPr>
+        <p:txBody>
+          <a:bodyPr spcFirstLastPara="1" wrap="square" lIns="91425" tIns="91425" rIns="91425" bIns="91425" anchor="t" anchorCtr="0">
+            <a:spAutoFit/>
+          </a:bodyPr>
+          <a:lstStyle/>
+          <a:p>
+            <a:pPr lvl="0"/>
+            <a:r>
+              <a:rPr lang="en-US" sz="4500" b="1" dirty="0">
+                <a:solidFill>
+                  <a:schemeClr val="dk1"/>
+                </a:solidFill>
+              </a:rPr>
+              <a:t>Resource consumption Crossplane</a:t>
+            </a:r>
+            <a:endParaRPr sz="4500" b="1" dirty="0">
+              <a:solidFill>
+                <a:schemeClr val="dk1"/>
+              </a:solidFill>
+            </a:endParaRPr>
+          </a:p>
+        </p:txBody>
+      </p:sp>
+      <p:sp>
+        <p:nvSpPr>
+          <p:cNvPr id="2" name="Slide Number Placeholder 1">
+            <a:extLst>
+              <a:ext uri="{FF2B5EF4-FFF2-40B4-BE49-F238E27FC236}">
+                <a16:creationId xmlns:a16="http://schemas.microsoft.com/office/drawing/2014/main" id="{B7E8F070-0C48-F773-1A0F-5844B40EDAC2}"/>
+              </a:ext>
+            </a:extLst>
+          </p:cNvPr>
+          <p:cNvSpPr>
+            <a:spLocks noGrp="1"/>
+          </p:cNvSpPr>
+          <p:nvPr>
+            <p:ph type="sldNum" idx="12"/>
+          </p:nvPr>
+        </p:nvSpPr>
+        <p:spPr>
+          <a:xfrm>
+            <a:off x="417864" y="6294726"/>
+            <a:ext cx="1597572" cy="271150"/>
+          </a:xfrm>
+        </p:spPr>
+        <p:txBody>
+          <a:bodyPr/>
+          <a:lstStyle/>
+          <a:p>
+            <a:pPr marL="0" lvl="0" indent="0" algn="l" rtl="0">
+              <a:spcBef>
+                <a:spcPts val="0"/>
+              </a:spcBef>
+              <a:spcAft>
+                <a:spcPts val="0"/>
+              </a:spcAft>
+              <a:buNone/>
+            </a:pPr>
+            <a:fld id="{00000000-1234-1234-1234-123412341234}" type="slidenum">
+              <a:rPr lang="en-US" smtClean="0"/>
+              <a:pPr marL="0" lvl="0" indent="0" algn="l" rtl="0">
+                <a:spcBef>
+                  <a:spcPts val="0"/>
+                </a:spcBef>
+                <a:spcAft>
+                  <a:spcPts val="0"/>
+                </a:spcAft>
+                <a:buNone/>
+              </a:pPr>
+              <a:t>16</a:t>
+            </a:fld>
+            <a:endParaRPr lang="en-US" dirty="0"/>
+          </a:p>
+        </p:txBody>
+      </p:sp>
+      <p:sp>
+        <p:nvSpPr>
+          <p:cNvPr id="6" name="TextBox 5">
+            <a:extLst>
+              <a:ext uri="{FF2B5EF4-FFF2-40B4-BE49-F238E27FC236}">
+                <a16:creationId xmlns:a16="http://schemas.microsoft.com/office/drawing/2014/main" id="{07CE3384-32DA-04CC-85AC-DC84F52F0C2B}"/>
+              </a:ext>
+            </a:extLst>
+          </p:cNvPr>
+          <p:cNvSpPr txBox="1"/>
+          <p:nvPr/>
+        </p:nvSpPr>
+        <p:spPr>
+          <a:xfrm>
+            <a:off x="417864" y="5374038"/>
+            <a:ext cx="6973536" cy="307777"/>
+          </a:xfrm>
+          <a:prstGeom prst="rect">
+            <a:avLst/>
+          </a:prstGeom>
+          <a:noFill/>
+        </p:spPr>
+        <p:txBody>
+          <a:bodyPr wrap="square">
+            <a:spAutoFit/>
+          </a:bodyPr>
+          <a:lstStyle/>
+          <a:p>
+            <a:r>
+              <a:rPr lang="en-US" dirty="0"/>
+              <a:t>X-axis: batch size, the number of DataStream resources created together (N)</a:t>
+            </a:r>
+          </a:p>
+        </p:txBody>
+      </p:sp>
+      <p:sp>
+        <p:nvSpPr>
+          <p:cNvPr id="8" name="TextBox 7">
+            <a:extLst>
+              <a:ext uri="{FF2B5EF4-FFF2-40B4-BE49-F238E27FC236}">
+                <a16:creationId xmlns:a16="http://schemas.microsoft.com/office/drawing/2014/main" id="{F266D6E1-9027-C3A6-CE1B-A4000332AD6C}"/>
+              </a:ext>
+            </a:extLst>
+          </p:cNvPr>
+          <p:cNvSpPr txBox="1"/>
+          <p:nvPr/>
+        </p:nvSpPr>
+        <p:spPr>
+          <a:xfrm>
+            <a:off x="417864" y="5609071"/>
+            <a:ext cx="10006296" cy="307777"/>
+          </a:xfrm>
+          <a:prstGeom prst="rect">
+            <a:avLst/>
+          </a:prstGeom>
+          <a:noFill/>
+        </p:spPr>
+        <p:txBody>
+          <a:bodyPr wrap="square">
+            <a:spAutoFit/>
+          </a:bodyPr>
+          <a:lstStyle/>
+          <a:p>
+            <a:r>
+              <a:rPr lang="en-US" dirty="0"/>
+              <a:t>Y-axis: average CPU rate (</a:t>
+            </a:r>
+            <a:r>
+              <a:rPr lang="en-US" dirty="0" err="1"/>
+              <a:t>millicores</a:t>
+            </a:r>
+            <a:r>
+              <a:rPr lang="en-US" dirty="0"/>
+              <a:t>)/RAM usage(MiB) each component sustained while it was actively reconciling that batch </a:t>
+            </a:r>
+          </a:p>
+        </p:txBody>
+      </p:sp>
+      <p:graphicFrame>
+        <p:nvGraphicFramePr>
+          <p:cNvPr id="4" name="Chart 3">
+            <a:extLst>
+              <a:ext uri="{FF2B5EF4-FFF2-40B4-BE49-F238E27FC236}">
+                <a16:creationId xmlns:a16="http://schemas.microsoft.com/office/drawing/2014/main" id="{EC6086F2-1913-4404-A3CB-24ABA1302FA8}"/>
+              </a:ext>
+            </a:extLst>
+          </p:cNvPr>
+          <p:cNvGraphicFramePr>
+            <a:graphicFrameLocks/>
+          </p:cNvGraphicFramePr>
+          <p:nvPr>
+            <p:extLst>
+              <p:ext uri="{D42A27DB-BD31-4B8C-83A1-F6EECF244321}">
+                <p14:modId xmlns:p14="http://schemas.microsoft.com/office/powerpoint/2010/main" val="4006873897"/>
+              </p:ext>
+            </p:extLst>
+          </p:nvPr>
+        </p:nvGraphicFramePr>
+        <p:xfrm>
+          <a:off x="0" y="1363575"/>
+          <a:ext cx="5940311" cy="3359729"/>
+        </p:xfrm>
+        <a:graphic>
+          <a:graphicData uri="http://schemas.openxmlformats.org/drawingml/2006/chart">
+            <c:chart xmlns:c="http://schemas.openxmlformats.org/drawingml/2006/chart" xmlns:r="http://schemas.openxmlformats.org/officeDocument/2006/relationships" r:id="rId4"/>
+          </a:graphicData>
+        </a:graphic>
+      </p:graphicFrame>
+      <p:graphicFrame>
+        <p:nvGraphicFramePr>
+          <p:cNvPr id="7" name="Chart 6">
+            <a:extLst>
+              <a:ext uri="{FF2B5EF4-FFF2-40B4-BE49-F238E27FC236}">
+                <a16:creationId xmlns:a16="http://schemas.microsoft.com/office/drawing/2014/main" id="{942170A6-5AF5-40F1-8247-67A11711644D}"/>
+              </a:ext>
+            </a:extLst>
+          </p:cNvPr>
+          <p:cNvGraphicFramePr>
+            <a:graphicFrameLocks/>
+          </p:cNvGraphicFramePr>
+          <p:nvPr>
+            <p:extLst>
+              <p:ext uri="{D42A27DB-BD31-4B8C-83A1-F6EECF244321}">
+                <p14:modId xmlns:p14="http://schemas.microsoft.com/office/powerpoint/2010/main" val="978591954"/>
+              </p:ext>
+            </p:extLst>
+          </p:nvPr>
+        </p:nvGraphicFramePr>
+        <p:xfrm>
+          <a:off x="6248673" y="1363575"/>
+          <a:ext cx="6112402" cy="3519488"/>
+        </p:xfrm>
+        <a:graphic>
+          <a:graphicData uri="http://schemas.openxmlformats.org/drawingml/2006/chart">
+            <c:chart xmlns:c="http://schemas.openxmlformats.org/drawingml/2006/chart" xmlns:r="http://schemas.openxmlformats.org/officeDocument/2006/relationships" r:id="rId5"/>
+          </a:graphicData>
+        </a:graphic>
+      </p:graphicFrame>
+    </p:spTree>
+    <p:extLst>
+      <p:ext uri="{BB962C8B-B14F-4D97-AF65-F5344CB8AC3E}">
+        <p14:creationId xmlns:p14="http://schemas.microsoft.com/office/powerpoint/2010/main" val="2496918125"/>
+      </p:ext>
+    </p:extLst>
+  </p:cSld>
+  <p:clrMapOvr>
+    <a:masterClrMapping/>
+  </p:clrMapOvr>
+</p:sld>
+</file>
+
+<file path=ppt/slides/slide17.xml><?xml version="1.0" encoding="utf-8"?>
+<p:sld xmlns:a="http://schemas.openxmlformats.org/drawingml/2006/main" xmlns:r="http://schemas.openxmlformats.org/officeDocument/2006/relationships" xmlns:p="http://schemas.openxmlformats.org/presentationml/2006/main">
+  <p:cSld>
+    <p:spTree>
+      <p:nvGrpSpPr>
         <p:cNvPr id="1" name="Shape 151">
           <a:extLst>
             <a:ext uri="{FF2B5EF4-FFF2-40B4-BE49-F238E27FC236}">
@@ -17111,7 +22948,7 @@
                 </a:spcAft>
                 <a:buNone/>
               </a:pPr>
-              <a:t>15</a:t>
+              <a:t>17</a:t>
             </a:fld>
             <a:endParaRPr lang="en-US" dirty="0"/>
           </a:p>
@@ -17130,7 +22967,7 @@
 </p:sld>
 </file>
 
-<file path=ppt/slides/slide16.xml><?xml version="1.0" encoding="utf-8"?>
+<file path=ppt/slides/slide18.xml><?xml version="1.0" encoding="utf-8"?>
 <p:sld xmlns:a="http://schemas.openxmlformats.org/drawingml/2006/main" xmlns:r="http://schemas.openxmlformats.org/officeDocument/2006/relationships" xmlns:p="http://schemas.openxmlformats.org/presentationml/2006/main">
   <p:cSld>
     <p:spTree>
@@ -17303,7 +23140,7 @@
                 </a:spcAft>
                 <a:buNone/>
               </a:pPr>
-              <a:t>16</a:t>
+              <a:t>18</a:t>
             </a:fld>
             <a:endParaRPr lang="en-US" dirty="0"/>
           </a:p>
@@ -17317,7 +23154,7 @@
 </p:sld>
 </file>
 
-<file path=ppt/slides/slide17.xml><?xml version="1.0" encoding="utf-8"?>
+<file path=ppt/slides/slide19.xml><?xml version="1.0" encoding="utf-8"?>
 <p:sld xmlns:a="http://schemas.openxmlformats.org/drawingml/2006/main" xmlns:r="http://schemas.openxmlformats.org/officeDocument/2006/relationships" xmlns:p="http://schemas.openxmlformats.org/presentationml/2006/main" show="0">
   <p:cSld>
     <p:spTree>
@@ -17610,7 +23447,7 @@
                 </a:spcAft>
                 <a:buNone/>
               </a:pPr>
-              <a:t>17</a:t>
+              <a:t>19</a:t>
             </a:fld>
             <a:endParaRPr lang="en-US" dirty="0"/>
           </a:p>
@@ -17716,7 +23553,433 @@
 </p:sld>
 </file>
 
-<file path=ppt/slides/slide18.xml><?xml version="1.0" encoding="utf-8"?>
+<file path=ppt/slides/slide2.xml><?xml version="1.0" encoding="utf-8"?>
+<p:sld xmlns:a="http://schemas.openxmlformats.org/drawingml/2006/main" xmlns:r="http://schemas.openxmlformats.org/officeDocument/2006/relationships" xmlns:p="http://schemas.openxmlformats.org/presentationml/2006/main">
+  <p:cSld>
+    <p:spTree>
+      <p:nvGrpSpPr>
+        <p:cNvPr id="1" name="Shape 91">
+          <a:extLst>
+            <a:ext uri="{FF2B5EF4-FFF2-40B4-BE49-F238E27FC236}">
+              <a16:creationId xmlns:a16="http://schemas.microsoft.com/office/drawing/2014/main" id="{331BA29A-5080-7AFB-47F5-63C00FDD71C3}"/>
+            </a:ext>
+          </a:extLst>
+        </p:cNvPr>
+        <p:cNvGrpSpPr/>
+        <p:nvPr/>
+      </p:nvGrpSpPr>
+      <p:grpSpPr>
+        <a:xfrm>
+          <a:off x="0" y="0"/>
+          <a:ext cx="0" cy="0"/>
+          <a:chOff x="0" y="0"/>
+          <a:chExt cx="0" cy="0"/>
+        </a:xfrm>
+      </p:grpSpPr>
+      <p:pic>
+        <p:nvPicPr>
+          <p:cNvPr id="92" name="Google Shape;92;p14" title="06_LOGO-Alma-Mater-Studiorum-Universita-di-Bologna.png">
+            <a:extLst>
+              <a:ext uri="{FF2B5EF4-FFF2-40B4-BE49-F238E27FC236}">
+                <a16:creationId xmlns:a16="http://schemas.microsoft.com/office/drawing/2014/main" id="{E11895F8-9A7E-A6BA-0E4B-B722BA67173E}"/>
+              </a:ext>
+            </a:extLst>
+          </p:cNvPr>
+          <p:cNvPicPr preferRelativeResize="0"/>
+          <p:nvPr/>
+        </p:nvPicPr>
+        <p:blipFill>
+          <a:blip r:embed="rId3">
+            <a:alphaModFix/>
+          </a:blip>
+          <a:stretch>
+            <a:fillRect/>
+          </a:stretch>
+        </p:blipFill>
+        <p:spPr>
+          <a:xfrm>
+            <a:off x="9399175" y="4453350"/>
+            <a:ext cx="1841376" cy="1841376"/>
+          </a:xfrm>
+          <a:prstGeom prst="rect">
+            <a:avLst/>
+          </a:prstGeom>
+          <a:noFill/>
+          <a:ln>
+            <a:noFill/>
+          </a:ln>
+        </p:spPr>
+      </p:pic>
+      <p:sp>
+        <p:nvSpPr>
+          <p:cNvPr id="93" name="Google Shape;93;p14">
+            <a:extLst>
+              <a:ext uri="{FF2B5EF4-FFF2-40B4-BE49-F238E27FC236}">
+                <a16:creationId xmlns:a16="http://schemas.microsoft.com/office/drawing/2014/main" id="{FD33CEB0-2D9E-EB57-1439-7E001FE88283}"/>
+              </a:ext>
+            </a:extLst>
+          </p:cNvPr>
+          <p:cNvSpPr txBox="1"/>
+          <p:nvPr/>
+        </p:nvSpPr>
+        <p:spPr>
+          <a:xfrm>
+            <a:off x="243349" y="230500"/>
+            <a:ext cx="10997201" cy="877133"/>
+          </a:xfrm>
+          <a:prstGeom prst="rect">
+            <a:avLst/>
+          </a:prstGeom>
+          <a:noFill/>
+          <a:ln>
+            <a:noFill/>
+          </a:ln>
+        </p:spPr>
+        <p:txBody>
+          <a:bodyPr spcFirstLastPara="1" wrap="square" lIns="91425" tIns="91425" rIns="91425" bIns="91425" anchor="t" anchorCtr="0">
+            <a:spAutoFit/>
+          </a:bodyPr>
+          <a:lstStyle/>
+          <a:p>
+            <a:pPr lvl="0"/>
+            <a:r>
+              <a:rPr lang="en-US" sz="4500" b="1" dirty="0">
+                <a:solidFill>
+                  <a:schemeClr val="dk1"/>
+                </a:solidFill>
+              </a:rPr>
+              <a:t>Kubernetes Operators</a:t>
+            </a:r>
+            <a:endParaRPr sz="4500" b="1" dirty="0">
+              <a:solidFill>
+                <a:schemeClr val="dk1"/>
+              </a:solidFill>
+            </a:endParaRPr>
+          </a:p>
+        </p:txBody>
+      </p:sp>
+      <p:sp>
+        <p:nvSpPr>
+          <p:cNvPr id="94" name="Google Shape;94;p14">
+            <a:extLst>
+              <a:ext uri="{FF2B5EF4-FFF2-40B4-BE49-F238E27FC236}">
+                <a16:creationId xmlns:a16="http://schemas.microsoft.com/office/drawing/2014/main" id="{EF13DAB9-2BC7-970F-69E8-AAAA292D738F}"/>
+              </a:ext>
+            </a:extLst>
+          </p:cNvPr>
+          <p:cNvSpPr txBox="1"/>
+          <p:nvPr/>
+        </p:nvSpPr>
+        <p:spPr>
+          <a:xfrm>
+            <a:off x="417864" y="1206073"/>
+            <a:ext cx="11163080" cy="923299"/>
+          </a:xfrm>
+          <a:prstGeom prst="rect">
+            <a:avLst/>
+          </a:prstGeom>
+          <a:noFill/>
+          <a:ln>
+            <a:noFill/>
+          </a:ln>
+        </p:spPr>
+        <p:txBody>
+          <a:bodyPr spcFirstLastPara="1" wrap="square" lIns="91425" tIns="91425" rIns="91425" bIns="91425" anchor="t" anchorCtr="0">
+            <a:spAutoFit/>
+          </a:bodyPr>
+          <a:lstStyle/>
+          <a:p>
+            <a:pPr marL="38100">
+              <a:buClr>
+                <a:schemeClr val="dk1"/>
+              </a:buClr>
+              <a:buSzPts val="3000"/>
+            </a:pPr>
+            <a:r>
+              <a:rPr lang="en-US" sz="2400" dirty="0"/>
+              <a:t>A Kubernetes Operator extends the K8s API with a Custom Resource (CR) and a controller that continuously reconciles actual state toward desired state.</a:t>
+            </a:r>
+            <a:endParaRPr lang="en-US" sz="2400" dirty="0">
+              <a:solidFill>
+                <a:schemeClr val="dk1"/>
+              </a:solidFill>
+            </a:endParaRPr>
+          </a:p>
+        </p:txBody>
+      </p:sp>
+      <p:sp>
+        <p:nvSpPr>
+          <p:cNvPr id="2" name="Slide Number Placeholder 1">
+            <a:extLst>
+              <a:ext uri="{FF2B5EF4-FFF2-40B4-BE49-F238E27FC236}">
+                <a16:creationId xmlns:a16="http://schemas.microsoft.com/office/drawing/2014/main" id="{4881A99B-FC2F-BDAE-83F1-DC71957BB303}"/>
+              </a:ext>
+            </a:extLst>
+          </p:cNvPr>
+          <p:cNvSpPr>
+            <a:spLocks noGrp="1"/>
+          </p:cNvSpPr>
+          <p:nvPr>
+            <p:ph type="sldNum" idx="12"/>
+          </p:nvPr>
+        </p:nvSpPr>
+        <p:spPr>
+          <a:xfrm>
+            <a:off x="417864" y="6294726"/>
+            <a:ext cx="1597572" cy="271150"/>
+          </a:xfrm>
+        </p:spPr>
+        <p:txBody>
+          <a:bodyPr/>
+          <a:lstStyle/>
+          <a:p>
+            <a:pPr marL="0" lvl="0" indent="0" algn="l" rtl="0">
+              <a:spcBef>
+                <a:spcPts val="0"/>
+              </a:spcBef>
+              <a:spcAft>
+                <a:spcPts val="0"/>
+              </a:spcAft>
+              <a:buNone/>
+            </a:pPr>
+            <a:fld id="{00000000-1234-1234-1234-123412341234}" type="slidenum">
+              <a:rPr lang="en-US" smtClean="0"/>
+              <a:pPr marL="0" lvl="0" indent="0" algn="l" rtl="0">
+                <a:spcBef>
+                  <a:spcPts val="0"/>
+                </a:spcBef>
+                <a:spcAft>
+                  <a:spcPts val="0"/>
+                </a:spcAft>
+                <a:buNone/>
+              </a:pPr>
+              <a:t>2</a:t>
+            </a:fld>
+            <a:endParaRPr lang="en-US" dirty="0"/>
+          </a:p>
+        </p:txBody>
+      </p:sp>
+      <p:sp>
+        <p:nvSpPr>
+          <p:cNvPr id="7" name="Google Shape;94;p14">
+            <a:extLst>
+              <a:ext uri="{FF2B5EF4-FFF2-40B4-BE49-F238E27FC236}">
+                <a16:creationId xmlns:a16="http://schemas.microsoft.com/office/drawing/2014/main" id="{848F549A-5171-A48E-5B66-2206AFA1C8C6}"/>
+              </a:ext>
+            </a:extLst>
+          </p:cNvPr>
+          <p:cNvSpPr txBox="1"/>
+          <p:nvPr/>
+        </p:nvSpPr>
+        <p:spPr>
+          <a:xfrm>
+            <a:off x="417864" y="2404650"/>
+            <a:ext cx="11163080" cy="553968"/>
+          </a:xfrm>
+          <a:prstGeom prst="rect">
+            <a:avLst/>
+          </a:prstGeom>
+          <a:noFill/>
+          <a:ln>
+            <a:noFill/>
+          </a:ln>
+        </p:spPr>
+        <p:txBody>
+          <a:bodyPr spcFirstLastPara="1" wrap="square" lIns="91425" tIns="91425" rIns="91425" bIns="91425" anchor="t" anchorCtr="0">
+            <a:spAutoFit/>
+          </a:bodyPr>
+          <a:lstStyle/>
+          <a:p>
+            <a:pPr marL="38100">
+              <a:buClr>
+                <a:schemeClr val="dk1"/>
+              </a:buClr>
+              <a:buSzPts val="3000"/>
+            </a:pPr>
+            <a:r>
+              <a:rPr lang="en-US" sz="2400" dirty="0"/>
+              <a:t>Building operators can be approached at different levels of abstraction: </a:t>
+            </a:r>
+            <a:endParaRPr lang="en-US" sz="2400" dirty="0">
+              <a:solidFill>
+                <a:schemeClr val="dk1"/>
+              </a:solidFill>
+            </a:endParaRPr>
+          </a:p>
+        </p:txBody>
+      </p:sp>
+      <p:sp>
+        <p:nvSpPr>
+          <p:cNvPr id="9" name="Google Shape;94;p14">
+            <a:extLst>
+              <a:ext uri="{FF2B5EF4-FFF2-40B4-BE49-F238E27FC236}">
+                <a16:creationId xmlns:a16="http://schemas.microsoft.com/office/drawing/2014/main" id="{1DB1C9A8-5450-BDF8-CAF0-61B4104E6176}"/>
+              </a:ext>
+            </a:extLst>
+          </p:cNvPr>
+          <p:cNvSpPr txBox="1"/>
+          <p:nvPr/>
+        </p:nvSpPr>
+        <p:spPr>
+          <a:xfrm>
+            <a:off x="1130968" y="3070136"/>
+            <a:ext cx="10449976" cy="1661963"/>
+          </a:xfrm>
+          <a:prstGeom prst="rect">
+            <a:avLst/>
+          </a:prstGeom>
+          <a:noFill/>
+          <a:ln>
+            <a:noFill/>
+          </a:ln>
+        </p:spPr>
+        <p:txBody>
+          <a:bodyPr spcFirstLastPara="1" wrap="square" lIns="91425" tIns="91425" rIns="91425" bIns="91425" anchor="t" anchorCtr="0">
+            <a:spAutoFit/>
+          </a:bodyPr>
+          <a:lstStyle/>
+          <a:p>
+            <a:pPr marL="38100">
+              <a:buClr>
+                <a:schemeClr val="dk1"/>
+              </a:buClr>
+              <a:buSzPts val="3000"/>
+            </a:pPr>
+            <a:r>
+              <a:rPr lang="en-US" sz="2400" b="1" dirty="0"/>
+              <a:t>Low-level</a:t>
+            </a:r>
+            <a:r>
+              <a:rPr lang="en-US" sz="2400" dirty="0"/>
+              <a:t>: the developer writes all the controller logic</a:t>
+            </a:r>
+          </a:p>
+          <a:p>
+            <a:pPr marL="381000" indent="-342900">
+              <a:buClr>
+                <a:schemeClr val="dk1"/>
+              </a:buClr>
+              <a:buSzPts val="3000"/>
+              <a:buFontTx/>
+              <a:buChar char="-"/>
+            </a:pPr>
+            <a:endParaRPr lang="en-US" sz="2400" dirty="0"/>
+          </a:p>
+          <a:p>
+            <a:pPr marL="38100">
+              <a:buClr>
+                <a:schemeClr val="dk1"/>
+              </a:buClr>
+              <a:buSzPts val="3000"/>
+            </a:pPr>
+            <a:r>
+              <a:rPr lang="en-US" sz="2400" b="1" dirty="0"/>
+              <a:t>High-level</a:t>
+            </a:r>
+            <a:r>
+              <a:rPr lang="en-US" sz="2400" dirty="0"/>
+              <a:t>: the developer describe what he wants and let a platform generate the controller logic</a:t>
+            </a:r>
+            <a:endParaRPr lang="en-US" sz="2400" dirty="0">
+              <a:solidFill>
+                <a:schemeClr val="dk1"/>
+              </a:solidFill>
+            </a:endParaRPr>
+          </a:p>
+        </p:txBody>
+      </p:sp>
+      <p:sp>
+        <p:nvSpPr>
+          <p:cNvPr id="13" name="Google Shape;94;p14">
+            <a:extLst>
+              <a:ext uri="{FF2B5EF4-FFF2-40B4-BE49-F238E27FC236}">
+                <a16:creationId xmlns:a16="http://schemas.microsoft.com/office/drawing/2014/main" id="{FEAB3335-E610-AA72-371F-851341D3BCD9}"/>
+              </a:ext>
+            </a:extLst>
+          </p:cNvPr>
+          <p:cNvSpPr txBox="1"/>
+          <p:nvPr/>
+        </p:nvSpPr>
+        <p:spPr>
+          <a:xfrm>
+            <a:off x="417864" y="5088011"/>
+            <a:ext cx="11163080" cy="923299"/>
+          </a:xfrm>
+          <a:prstGeom prst="rect">
+            <a:avLst/>
+          </a:prstGeom>
+          <a:noFill/>
+          <a:ln>
+            <a:noFill/>
+          </a:ln>
+        </p:spPr>
+        <p:txBody>
+          <a:bodyPr spcFirstLastPara="1" wrap="square" lIns="91425" tIns="91425" rIns="91425" bIns="91425" anchor="t" anchorCtr="0">
+            <a:spAutoFit/>
+          </a:bodyPr>
+          <a:lstStyle/>
+          <a:p>
+            <a:pPr marL="38100">
+              <a:buClr>
+                <a:schemeClr val="dk1"/>
+              </a:buClr>
+              <a:buSzPts val="3000"/>
+            </a:pPr>
+            <a:r>
+              <a:rPr lang="en-US" sz="2400" dirty="0">
+                <a:solidFill>
+                  <a:schemeClr val="dk1"/>
+                </a:solidFill>
+              </a:rPr>
+              <a:t>Both approaches solve the same problem of automating resource lifecycle but target different users and different tradeoffs.</a:t>
+            </a:r>
+          </a:p>
+        </p:txBody>
+      </p:sp>
+      <p:pic>
+        <p:nvPicPr>
+          <p:cNvPr id="17" name="Picture 16">
+            <a:extLst>
+              <a:ext uri="{FF2B5EF4-FFF2-40B4-BE49-F238E27FC236}">
+                <a16:creationId xmlns:a16="http://schemas.microsoft.com/office/drawing/2014/main" id="{2428987E-3B43-15D9-ABDC-58EBAE01CE3E}"/>
+              </a:ext>
+            </a:extLst>
+          </p:cNvPr>
+          <p:cNvPicPr>
+            <a:picLocks noChangeAspect="1"/>
+          </p:cNvPicPr>
+          <p:nvPr/>
+        </p:nvPicPr>
+        <p:blipFill>
+          <a:blip r:embed="rId4"/>
+          <a:stretch>
+            <a:fillRect/>
+          </a:stretch>
+        </p:blipFill>
+        <p:spPr>
+          <a:xfrm>
+            <a:off x="11001308" y="79406"/>
+            <a:ext cx="1159271" cy="1126667"/>
+          </a:xfrm>
+          <a:prstGeom prst="rect">
+            <a:avLst/>
+          </a:prstGeom>
+        </p:spPr>
+      </p:pic>
+    </p:spTree>
+    <p:extLst>
+      <p:ext uri="{BB962C8B-B14F-4D97-AF65-F5344CB8AC3E}">
+        <p14:creationId xmlns:p14="http://schemas.microsoft.com/office/powerpoint/2010/main" val="1207989899"/>
+      </p:ext>
+    </p:extLst>
+  </p:cSld>
+  <p:clrMapOvr>
+    <a:masterClrMapping/>
+  </p:clrMapOvr>
+</p:sld>
+</file>
+
+<file path=ppt/slides/slide20.xml><?xml version="1.0" encoding="utf-8"?>
 <p:sld xmlns:a="http://schemas.openxmlformats.org/drawingml/2006/main" xmlns:r="http://schemas.openxmlformats.org/officeDocument/2006/relationships" xmlns:p="http://schemas.openxmlformats.org/presentationml/2006/main" show="0">
   <p:cSld>
     <p:spTree>
@@ -17942,7 +24205,7 @@
                 </a:spcAft>
                 <a:buNone/>
               </a:pPr>
-              <a:t>18</a:t>
+              <a:t>20</a:t>
             </a:fld>
             <a:endParaRPr lang="en-US" dirty="0"/>
           </a:p>
@@ -18055,7 +24318,7 @@
 </p:sld>
 </file>
 
-<file path=ppt/slides/slide19.xml><?xml version="1.0" encoding="utf-8"?>
+<file path=ppt/slides/slide21.xml><?xml version="1.0" encoding="utf-8"?>
 <p:sld xmlns:a="http://schemas.openxmlformats.org/drawingml/2006/main" xmlns:r="http://schemas.openxmlformats.org/officeDocument/2006/relationships" xmlns:p="http://schemas.openxmlformats.org/presentationml/2006/main" show="0">
   <p:cSld>
     <p:spTree>
@@ -18162,7 +24425,7 @@
                 </a:spcAft>
                 <a:buNone/>
               </a:pPr>
-              <a:t>19</a:t>
+              <a:t>21</a:t>
             </a:fld>
             <a:endParaRPr lang="en-US" dirty="0"/>
           </a:p>
@@ -18837,433 +25100,7 @@
 </p:sld>
 </file>
 
-<file path=ppt/slides/slide2.xml><?xml version="1.0" encoding="utf-8"?>
-<p:sld xmlns:a="http://schemas.openxmlformats.org/drawingml/2006/main" xmlns:r="http://schemas.openxmlformats.org/officeDocument/2006/relationships" xmlns:p="http://schemas.openxmlformats.org/presentationml/2006/main">
-  <p:cSld>
-    <p:spTree>
-      <p:nvGrpSpPr>
-        <p:cNvPr id="1" name="Shape 91">
-          <a:extLst>
-            <a:ext uri="{FF2B5EF4-FFF2-40B4-BE49-F238E27FC236}">
-              <a16:creationId xmlns:a16="http://schemas.microsoft.com/office/drawing/2014/main" id="{331BA29A-5080-7AFB-47F5-63C00FDD71C3}"/>
-            </a:ext>
-          </a:extLst>
-        </p:cNvPr>
-        <p:cNvGrpSpPr/>
-        <p:nvPr/>
-      </p:nvGrpSpPr>
-      <p:grpSpPr>
-        <a:xfrm>
-          <a:off x="0" y="0"/>
-          <a:ext cx="0" cy="0"/>
-          <a:chOff x="0" y="0"/>
-          <a:chExt cx="0" cy="0"/>
-        </a:xfrm>
-      </p:grpSpPr>
-      <p:pic>
-        <p:nvPicPr>
-          <p:cNvPr id="92" name="Google Shape;92;p14" title="06_LOGO-Alma-Mater-Studiorum-Universita-di-Bologna.png">
-            <a:extLst>
-              <a:ext uri="{FF2B5EF4-FFF2-40B4-BE49-F238E27FC236}">
-                <a16:creationId xmlns:a16="http://schemas.microsoft.com/office/drawing/2014/main" id="{E11895F8-9A7E-A6BA-0E4B-B722BA67173E}"/>
-              </a:ext>
-            </a:extLst>
-          </p:cNvPr>
-          <p:cNvPicPr preferRelativeResize="0"/>
-          <p:nvPr/>
-        </p:nvPicPr>
-        <p:blipFill>
-          <a:blip r:embed="rId3">
-            <a:alphaModFix/>
-          </a:blip>
-          <a:stretch>
-            <a:fillRect/>
-          </a:stretch>
-        </p:blipFill>
-        <p:spPr>
-          <a:xfrm>
-            <a:off x="9399175" y="4453350"/>
-            <a:ext cx="1841376" cy="1841376"/>
-          </a:xfrm>
-          <a:prstGeom prst="rect">
-            <a:avLst/>
-          </a:prstGeom>
-          <a:noFill/>
-          <a:ln>
-            <a:noFill/>
-          </a:ln>
-        </p:spPr>
-      </p:pic>
-      <p:sp>
-        <p:nvSpPr>
-          <p:cNvPr id="93" name="Google Shape;93;p14">
-            <a:extLst>
-              <a:ext uri="{FF2B5EF4-FFF2-40B4-BE49-F238E27FC236}">
-                <a16:creationId xmlns:a16="http://schemas.microsoft.com/office/drawing/2014/main" id="{FD33CEB0-2D9E-EB57-1439-7E001FE88283}"/>
-              </a:ext>
-            </a:extLst>
-          </p:cNvPr>
-          <p:cNvSpPr txBox="1"/>
-          <p:nvPr/>
-        </p:nvSpPr>
-        <p:spPr>
-          <a:xfrm>
-            <a:off x="243349" y="230500"/>
-            <a:ext cx="10997201" cy="877133"/>
-          </a:xfrm>
-          <a:prstGeom prst="rect">
-            <a:avLst/>
-          </a:prstGeom>
-          <a:noFill/>
-          <a:ln>
-            <a:noFill/>
-          </a:ln>
-        </p:spPr>
-        <p:txBody>
-          <a:bodyPr spcFirstLastPara="1" wrap="square" lIns="91425" tIns="91425" rIns="91425" bIns="91425" anchor="t" anchorCtr="0">
-            <a:spAutoFit/>
-          </a:bodyPr>
-          <a:lstStyle/>
-          <a:p>
-            <a:pPr lvl="0"/>
-            <a:r>
-              <a:rPr lang="en-US" sz="4500" b="1" dirty="0">
-                <a:solidFill>
-                  <a:schemeClr val="dk1"/>
-                </a:solidFill>
-              </a:rPr>
-              <a:t>Kubernetes Operators</a:t>
-            </a:r>
-            <a:endParaRPr sz="4500" b="1" dirty="0">
-              <a:solidFill>
-                <a:schemeClr val="dk1"/>
-              </a:solidFill>
-            </a:endParaRPr>
-          </a:p>
-        </p:txBody>
-      </p:sp>
-      <p:sp>
-        <p:nvSpPr>
-          <p:cNvPr id="94" name="Google Shape;94;p14">
-            <a:extLst>
-              <a:ext uri="{FF2B5EF4-FFF2-40B4-BE49-F238E27FC236}">
-                <a16:creationId xmlns:a16="http://schemas.microsoft.com/office/drawing/2014/main" id="{EF13DAB9-2BC7-970F-69E8-AAAA292D738F}"/>
-              </a:ext>
-            </a:extLst>
-          </p:cNvPr>
-          <p:cNvSpPr txBox="1"/>
-          <p:nvPr/>
-        </p:nvSpPr>
-        <p:spPr>
-          <a:xfrm>
-            <a:off x="417864" y="1206073"/>
-            <a:ext cx="11163080" cy="923299"/>
-          </a:xfrm>
-          <a:prstGeom prst="rect">
-            <a:avLst/>
-          </a:prstGeom>
-          <a:noFill/>
-          <a:ln>
-            <a:noFill/>
-          </a:ln>
-        </p:spPr>
-        <p:txBody>
-          <a:bodyPr spcFirstLastPara="1" wrap="square" lIns="91425" tIns="91425" rIns="91425" bIns="91425" anchor="t" anchorCtr="0">
-            <a:spAutoFit/>
-          </a:bodyPr>
-          <a:lstStyle/>
-          <a:p>
-            <a:pPr marL="38100">
-              <a:buClr>
-                <a:schemeClr val="dk1"/>
-              </a:buClr>
-              <a:buSzPts val="3000"/>
-            </a:pPr>
-            <a:r>
-              <a:rPr lang="en-US" sz="2400" dirty="0"/>
-              <a:t>A Kubernetes Operator extends the K8s API with a Custom Resource (CR) and a controller that continuously reconciles actual state toward desired state.</a:t>
-            </a:r>
-            <a:endParaRPr lang="en-US" sz="2400" dirty="0">
-              <a:solidFill>
-                <a:schemeClr val="dk1"/>
-              </a:solidFill>
-            </a:endParaRPr>
-          </a:p>
-        </p:txBody>
-      </p:sp>
-      <p:sp>
-        <p:nvSpPr>
-          <p:cNvPr id="2" name="Slide Number Placeholder 1">
-            <a:extLst>
-              <a:ext uri="{FF2B5EF4-FFF2-40B4-BE49-F238E27FC236}">
-                <a16:creationId xmlns:a16="http://schemas.microsoft.com/office/drawing/2014/main" id="{4881A99B-FC2F-BDAE-83F1-DC71957BB303}"/>
-              </a:ext>
-            </a:extLst>
-          </p:cNvPr>
-          <p:cNvSpPr>
-            <a:spLocks noGrp="1"/>
-          </p:cNvSpPr>
-          <p:nvPr>
-            <p:ph type="sldNum" idx="12"/>
-          </p:nvPr>
-        </p:nvSpPr>
-        <p:spPr>
-          <a:xfrm>
-            <a:off x="417864" y="6294726"/>
-            <a:ext cx="1597572" cy="271150"/>
-          </a:xfrm>
-        </p:spPr>
-        <p:txBody>
-          <a:bodyPr/>
-          <a:lstStyle/>
-          <a:p>
-            <a:pPr marL="0" lvl="0" indent="0" algn="l" rtl="0">
-              <a:spcBef>
-                <a:spcPts val="0"/>
-              </a:spcBef>
-              <a:spcAft>
-                <a:spcPts val="0"/>
-              </a:spcAft>
-              <a:buNone/>
-            </a:pPr>
-            <a:fld id="{00000000-1234-1234-1234-123412341234}" type="slidenum">
-              <a:rPr lang="en-US" smtClean="0"/>
-              <a:pPr marL="0" lvl="0" indent="0" algn="l" rtl="0">
-                <a:spcBef>
-                  <a:spcPts val="0"/>
-                </a:spcBef>
-                <a:spcAft>
-                  <a:spcPts val="0"/>
-                </a:spcAft>
-                <a:buNone/>
-              </a:pPr>
-              <a:t>2</a:t>
-            </a:fld>
-            <a:endParaRPr lang="en-US" dirty="0"/>
-          </a:p>
-        </p:txBody>
-      </p:sp>
-      <p:sp>
-        <p:nvSpPr>
-          <p:cNvPr id="7" name="Google Shape;94;p14">
-            <a:extLst>
-              <a:ext uri="{FF2B5EF4-FFF2-40B4-BE49-F238E27FC236}">
-                <a16:creationId xmlns:a16="http://schemas.microsoft.com/office/drawing/2014/main" id="{848F549A-5171-A48E-5B66-2206AFA1C8C6}"/>
-              </a:ext>
-            </a:extLst>
-          </p:cNvPr>
-          <p:cNvSpPr txBox="1"/>
-          <p:nvPr/>
-        </p:nvSpPr>
-        <p:spPr>
-          <a:xfrm>
-            <a:off x="417864" y="2404650"/>
-            <a:ext cx="11163080" cy="553968"/>
-          </a:xfrm>
-          <a:prstGeom prst="rect">
-            <a:avLst/>
-          </a:prstGeom>
-          <a:noFill/>
-          <a:ln>
-            <a:noFill/>
-          </a:ln>
-        </p:spPr>
-        <p:txBody>
-          <a:bodyPr spcFirstLastPara="1" wrap="square" lIns="91425" tIns="91425" rIns="91425" bIns="91425" anchor="t" anchorCtr="0">
-            <a:spAutoFit/>
-          </a:bodyPr>
-          <a:lstStyle/>
-          <a:p>
-            <a:pPr marL="38100">
-              <a:buClr>
-                <a:schemeClr val="dk1"/>
-              </a:buClr>
-              <a:buSzPts val="3000"/>
-            </a:pPr>
-            <a:r>
-              <a:rPr lang="en-US" sz="2400" dirty="0"/>
-              <a:t>Building operators can be approached at different levels of abstraction: </a:t>
-            </a:r>
-            <a:endParaRPr lang="en-US" sz="2400" dirty="0">
-              <a:solidFill>
-                <a:schemeClr val="dk1"/>
-              </a:solidFill>
-            </a:endParaRPr>
-          </a:p>
-        </p:txBody>
-      </p:sp>
-      <p:sp>
-        <p:nvSpPr>
-          <p:cNvPr id="9" name="Google Shape;94;p14">
-            <a:extLst>
-              <a:ext uri="{FF2B5EF4-FFF2-40B4-BE49-F238E27FC236}">
-                <a16:creationId xmlns:a16="http://schemas.microsoft.com/office/drawing/2014/main" id="{1DB1C9A8-5450-BDF8-CAF0-61B4104E6176}"/>
-              </a:ext>
-            </a:extLst>
-          </p:cNvPr>
-          <p:cNvSpPr txBox="1"/>
-          <p:nvPr/>
-        </p:nvSpPr>
-        <p:spPr>
-          <a:xfrm>
-            <a:off x="1130968" y="3070136"/>
-            <a:ext cx="10449976" cy="1661963"/>
-          </a:xfrm>
-          <a:prstGeom prst="rect">
-            <a:avLst/>
-          </a:prstGeom>
-          <a:noFill/>
-          <a:ln>
-            <a:noFill/>
-          </a:ln>
-        </p:spPr>
-        <p:txBody>
-          <a:bodyPr spcFirstLastPara="1" wrap="square" lIns="91425" tIns="91425" rIns="91425" bIns="91425" anchor="t" anchorCtr="0">
-            <a:spAutoFit/>
-          </a:bodyPr>
-          <a:lstStyle/>
-          <a:p>
-            <a:pPr marL="38100">
-              <a:buClr>
-                <a:schemeClr val="dk1"/>
-              </a:buClr>
-              <a:buSzPts val="3000"/>
-            </a:pPr>
-            <a:r>
-              <a:rPr lang="en-US" sz="2400" b="1" dirty="0"/>
-              <a:t>Low-level</a:t>
-            </a:r>
-            <a:r>
-              <a:rPr lang="en-US" sz="2400" dirty="0"/>
-              <a:t>: the developer writes all the controller logic</a:t>
-            </a:r>
-          </a:p>
-          <a:p>
-            <a:pPr marL="381000" indent="-342900">
-              <a:buClr>
-                <a:schemeClr val="dk1"/>
-              </a:buClr>
-              <a:buSzPts val="3000"/>
-              <a:buFontTx/>
-              <a:buChar char="-"/>
-            </a:pPr>
-            <a:endParaRPr lang="en-US" sz="2400" dirty="0"/>
-          </a:p>
-          <a:p>
-            <a:pPr marL="38100">
-              <a:buClr>
-                <a:schemeClr val="dk1"/>
-              </a:buClr>
-              <a:buSzPts val="3000"/>
-            </a:pPr>
-            <a:r>
-              <a:rPr lang="en-US" sz="2400" b="1" dirty="0"/>
-              <a:t>High-level</a:t>
-            </a:r>
-            <a:r>
-              <a:rPr lang="en-US" sz="2400" dirty="0"/>
-              <a:t>: the developer describe what he wants and let a platform generate the controller logic</a:t>
-            </a:r>
-            <a:endParaRPr lang="en-US" sz="2400" dirty="0">
-              <a:solidFill>
-                <a:schemeClr val="dk1"/>
-              </a:solidFill>
-            </a:endParaRPr>
-          </a:p>
-        </p:txBody>
-      </p:sp>
-      <p:sp>
-        <p:nvSpPr>
-          <p:cNvPr id="13" name="Google Shape;94;p14">
-            <a:extLst>
-              <a:ext uri="{FF2B5EF4-FFF2-40B4-BE49-F238E27FC236}">
-                <a16:creationId xmlns:a16="http://schemas.microsoft.com/office/drawing/2014/main" id="{FEAB3335-E610-AA72-371F-851341D3BCD9}"/>
-              </a:ext>
-            </a:extLst>
-          </p:cNvPr>
-          <p:cNvSpPr txBox="1"/>
-          <p:nvPr/>
-        </p:nvSpPr>
-        <p:spPr>
-          <a:xfrm>
-            <a:off x="417864" y="5088011"/>
-            <a:ext cx="11163080" cy="923299"/>
-          </a:xfrm>
-          <a:prstGeom prst="rect">
-            <a:avLst/>
-          </a:prstGeom>
-          <a:noFill/>
-          <a:ln>
-            <a:noFill/>
-          </a:ln>
-        </p:spPr>
-        <p:txBody>
-          <a:bodyPr spcFirstLastPara="1" wrap="square" lIns="91425" tIns="91425" rIns="91425" bIns="91425" anchor="t" anchorCtr="0">
-            <a:spAutoFit/>
-          </a:bodyPr>
-          <a:lstStyle/>
-          <a:p>
-            <a:pPr marL="38100">
-              <a:buClr>
-                <a:schemeClr val="dk1"/>
-              </a:buClr>
-              <a:buSzPts val="3000"/>
-            </a:pPr>
-            <a:r>
-              <a:rPr lang="en-US" sz="2400" dirty="0">
-                <a:solidFill>
-                  <a:schemeClr val="dk1"/>
-                </a:solidFill>
-              </a:rPr>
-              <a:t>Both approaches solve the same problem of automating resource lifecycle but target different users and different tradeoffs.</a:t>
-            </a:r>
-          </a:p>
-        </p:txBody>
-      </p:sp>
-      <p:pic>
-        <p:nvPicPr>
-          <p:cNvPr id="17" name="Picture 16">
-            <a:extLst>
-              <a:ext uri="{FF2B5EF4-FFF2-40B4-BE49-F238E27FC236}">
-                <a16:creationId xmlns:a16="http://schemas.microsoft.com/office/drawing/2014/main" id="{2428987E-3B43-15D9-ABDC-58EBAE01CE3E}"/>
-              </a:ext>
-            </a:extLst>
-          </p:cNvPr>
-          <p:cNvPicPr>
-            <a:picLocks noChangeAspect="1"/>
-          </p:cNvPicPr>
-          <p:nvPr/>
-        </p:nvPicPr>
-        <p:blipFill>
-          <a:blip r:embed="rId4"/>
-          <a:stretch>
-            <a:fillRect/>
-          </a:stretch>
-        </p:blipFill>
-        <p:spPr>
-          <a:xfrm>
-            <a:off x="11001308" y="79406"/>
-            <a:ext cx="1159271" cy="1126667"/>
-          </a:xfrm>
-          <a:prstGeom prst="rect">
-            <a:avLst/>
-          </a:prstGeom>
-        </p:spPr>
-      </p:pic>
-    </p:spTree>
-    <p:extLst>
-      <p:ext uri="{BB962C8B-B14F-4D97-AF65-F5344CB8AC3E}">
-        <p14:creationId xmlns:p14="http://schemas.microsoft.com/office/powerpoint/2010/main" val="1207989899"/>
-      </p:ext>
-    </p:extLst>
-  </p:cSld>
-  <p:clrMapOvr>
-    <a:masterClrMapping/>
-  </p:clrMapOvr>
-</p:sld>
-</file>
-
-<file path=ppt/slides/slide20.xml><?xml version="1.0" encoding="utf-8"?>
+<file path=ppt/slides/slide22.xml><?xml version="1.0" encoding="utf-8"?>
 <p:sld xmlns:a="http://schemas.openxmlformats.org/drawingml/2006/main" xmlns:r="http://schemas.openxmlformats.org/officeDocument/2006/relationships" xmlns:p="http://schemas.openxmlformats.org/presentationml/2006/main" show="0">
   <p:cSld>
     <p:spTree>
@@ -19404,7 +25241,7 @@
                 </a:spcAft>
                 <a:buNone/>
               </a:pPr>
-              <a:t>20</a:t>
+              <a:t>22</a:t>
             </a:fld>
             <a:endParaRPr lang="en-US" dirty="0"/>
           </a:p>
@@ -19897,7 +25734,7 @@
 </p:sld>
 </file>
 
-<file path=ppt/slides/slide21.xml><?xml version="1.0" encoding="utf-8"?>
+<file path=ppt/slides/slide23.xml><?xml version="1.0" encoding="utf-8"?>
 <p:sld xmlns:a="http://schemas.openxmlformats.org/drawingml/2006/main" xmlns:r="http://schemas.openxmlformats.org/officeDocument/2006/relationships" xmlns:p="http://schemas.openxmlformats.org/presentationml/2006/main" show="0">
   <p:cSld>
     <p:spTree>
@@ -20004,7 +25841,7 @@
                 </a:spcAft>
                 <a:buNone/>
               </a:pPr>
-              <a:t>21</a:t>
+              <a:t>23</a:t>
             </a:fld>
             <a:endParaRPr lang="en-US" dirty="0"/>
           </a:p>
@@ -20671,7 +26508,7 @@
 </p:sld>
 </file>
 
-<file path=ppt/slides/slide22.xml><?xml version="1.0" encoding="utf-8"?>
+<file path=ppt/slides/slide24.xml><?xml version="1.0" encoding="utf-8"?>
 <p:sld xmlns:a="http://schemas.openxmlformats.org/drawingml/2006/main" xmlns:r="http://schemas.openxmlformats.org/officeDocument/2006/relationships" xmlns:p="http://schemas.openxmlformats.org/presentationml/2006/main" show="0">
   <p:cSld>
     <p:spTree>
@@ -20822,7 +26659,7 @@
                 </a:spcAft>
                 <a:buNone/>
               </a:pPr>
-              <a:t>22</a:t>
+              <a:t>24</a:t>
             </a:fld>
             <a:endParaRPr lang="en-US" dirty="0"/>
           </a:p>
@@ -25572,7 +31409,7 @@
         </p:nvSpPr>
         <p:spPr>
           <a:xfrm>
-            <a:off x="417864" y="1123761"/>
+            <a:off x="417864" y="1157584"/>
             <a:ext cx="11163080" cy="2400627"/>
           </a:xfrm>
           <a:prstGeom prst="rect">
@@ -25629,16 +31466,8 @@
               <a:buSzPts val="3000"/>
             </a:pPr>
             <a:r>
-              <a:rPr lang="en-US" sz="2400" dirty="0">
-                <a:solidFill>
-                  <a:schemeClr val="dk1"/>
-                </a:solidFill>
-              </a:rPr>
-              <a:t>	- </a:t>
-            </a:r>
-            <a:r>
               <a:rPr lang="en-US" sz="2400" dirty="0"/>
-              <a:t>Per-provider rate limiting to avoid overwhelming external systems</a:t>
+              <a:t>	- Leader election prevents duplicate reconciliation in multi-replica setups</a:t>
             </a:r>
           </a:p>
           <a:p>
@@ -25652,8 +31481,16 @@
               <a:buSzPts val="3000"/>
             </a:pPr>
             <a:r>
+              <a:rPr lang="en-US" sz="2400" dirty="0">
+                <a:solidFill>
+                  <a:schemeClr val="dk1"/>
+                </a:solidFill>
+              </a:rPr>
+              <a:t>	- </a:t>
+            </a:r>
+            <a:r>
               <a:rPr lang="en-US" sz="2400" dirty="0"/>
-              <a:t>	- Leader election prevents duplicate reconciliation in multi-replica setups</a:t>
+              <a:t>Multiple controllers run concurrently (core + each provider + functions)</a:t>
             </a:r>
             <a:endParaRPr lang="en-US" sz="2400" dirty="0">
               <a:solidFill>
@@ -25677,8 +31514,8 @@
         </p:nvSpPr>
         <p:spPr>
           <a:xfrm>
-            <a:off x="417864" y="3611251"/>
-            <a:ext cx="11163080" cy="2585293"/>
+            <a:off x="417864" y="3804501"/>
+            <a:ext cx="11163080" cy="2400627"/>
           </a:xfrm>
           <a:prstGeom prst="rect">
             <a:avLst/>
@@ -25695,9 +31532,6 @@
           <a:lstStyle/>
           <a:p>
             <a:pPr marL="38100">
-              <a:lnSpc>
-                <a:spcPct val="150000"/>
-              </a:lnSpc>
               <a:buClr>
                 <a:schemeClr val="dk1"/>
               </a:buClr>
